--- a/docs/content/nmds_cluster_analysis/nmds_cluster_analysis_activity.pptx
+++ b/docs/content/nmds_cluster_analysis/nmds_cluster_analysis_activity.pptx
@@ -15,7 +15,6 @@
     <p:sldId id="263" r:id="rId9"/>
     <p:sldId id="264" r:id="rId10"/>
     <p:sldId id="265" r:id="rId11"/>
-    <p:sldId id="266" r:id="rId12"/>
   </p:sldIdLst>
   <p:sldSz cx="9144000" cy="5143500" type="screen16x9"/>
   <p:notesSz cx="6858000" cy="9144000"/>
@@ -3303,7 +3302,7 @@
             </a:pPr>
             <a:r>
               <a:rPr/>
-              <a:t>NMDS &amp; PERMANOVA</a:t>
+              <a:t>Activity: NMDS &amp; PERMANOVA</a:t>
             </a:r>
           </a:p>
         </p:txBody>
@@ -3379,143 +3378,6 @@
         <p:spPr>
           <a:xfrm>
             <a:off x="0" y="0"/>
-            <a:ext cx="9144000" cy="871538"/>
-          </a:xfrm>
-        </p:spPr>
-        <p:txBody>
-          <a:bodyPr/>
-          <a:lstStyle/>
-          <a:p>
-            <a:pPr lvl="0" indent="0" marL="0">
-              <a:buNone/>
-            </a:pPr>
-            <a:r>
-              <a:rPr/>
-              <a:t>Part 5: Environmental Fitting (Optional)</a:t>
-            </a:r>
-          </a:p>
-        </p:txBody>
-      </p:sp>
-      <p:sp>
-        <p:nvSpPr>
-          <p:cNvPr id="4" name="Text Placeholder 3"/>
-          <p:cNvSpPr>
-            <a:spLocks noGrp="1"/>
-          </p:cNvSpPr>
-          <p:nvPr>
-            <p:ph idx="2" sz="half" type="body"/>
-          </p:nvPr>
-        </p:nvSpPr>
-        <p:spPr/>
-        <p:txBody>
-          <a:bodyPr/>
-          <a:lstStyle/>
-          <a:p>
-            <a:pPr lvl="0" indent="0" marL="0">
-              <a:buNone/>
-            </a:pPr>
-            <a:r>
-              <a:rPr/>
-              <a:t>If we had environmental variables, we could fit them to the ordination.</a:t>
-            </a:r>
-          </a:p>
-          <a:p>
-            <a:pPr lvl="0" indent="0">
-              <a:buNone/>
-            </a:pPr>
-            <a:r>
-              <a:rPr>
-                <a:latin typeface="Courier"/>
-              </a:rPr>
-              <a:t>
-***VECTORS
-                NMDS1    NMDS2     r2 Pr(&gt;r)    
-petal_length  0.98205 -0.18862 0.9979  0.001 ***
----
-Signif. codes:  0 '***' 0.001 '**' 0.01 '*' 0.05 '.' 0.1 ' ' 1
-Permutation: free
-Number of permutations: 999</a:t>
-            </a:r>
-          </a:p>
-          <a:p>
-            <a:pPr lvl="0" indent="0" marL="0">
-              <a:spcBef>
-                <a:spcPts val="3000"/>
-              </a:spcBef>
-              <a:buNone/>
-            </a:pPr>
-            <a:r>
-              <a:rPr b="1"/>
-              <a:t>Visualize Environmental Vectors</a:t>
-            </a:r>
-          </a:p>
-        </p:txBody>
-      </p:sp>
-      <p:pic>
-        <p:nvPicPr>
-          <p:cNvPr descr="nmds_cluster_analysis_activity_files/figure-pptx/nmds_envfit_plot-1.png" id="0" name="Picture 1"/>
-          <p:cNvPicPr>
-            <a:picLocks noGrp="1" noChangeAspect="1"/>
-          </p:cNvPicPr>
-          <p:nvPr/>
-        </p:nvPicPr>
-        <p:blipFill>
-          <a:blip r:embed="rId2"/>
-          <a:stretch>
-            <a:fillRect/>
-          </a:stretch>
-        </p:blipFill>
-        <p:spPr bwMode="auto">
-          <a:xfrm>
-            <a:off x="3657600" y="1244600"/>
-            <a:ext cx="5232400" cy="3225800"/>
-          </a:xfrm>
-          <a:prstGeom prst="rect">
-            <a:avLst/>
-          </a:prstGeom>
-          <a:noFill/>
-          <a:ln w="9525">
-            <a:noFill/>
-            <a:headEnd/>
-            <a:tailEnd/>
-          </a:ln>
-        </p:spPr>
-      </p:pic>
-    </p:spTree>
-  </p:cSld>
-</p:sld>
-</file>
-
-<file path=ppt/slides/slide11.xml><?xml version="1.0" encoding="utf-8"?>
-<p:sld xmlns:a="http://schemas.openxmlformats.org/drawingml/2006/main" xmlns:r="http://schemas.openxmlformats.org/officeDocument/2006/relationships" xmlns:p="http://schemas.openxmlformats.org/presentationml/2006/main">
-  <p:cSld>
-    <p:spTree>
-      <p:nvGrpSpPr>
-        <p:cNvPr id="1" name=""/>
-        <p:cNvGrpSpPr/>
-        <p:nvPr/>
-      </p:nvGrpSpPr>
-      <p:grpSpPr>
-        <a:xfrm>
-          <a:off x="0" y="0"/>
-          <a:ext cx="0" cy="0"/>
-          <a:chOff x="0" y="0"/>
-          <a:chExt cx="0" cy="0"/>
-        </a:xfrm>
-      </p:grpSpPr>
-      <p:sp>
-        <p:nvSpPr>
-          <p:cNvPr id="2" name="Title 1"/>
-          <p:cNvSpPr>
-            <a:spLocks noGrp="1"/>
-          </p:cNvSpPr>
-          <p:nvPr>
-            <p:ph type="title"/>
-          </p:nvPr>
-        </p:nvSpPr>
-        <p:spPr>
-          <a:xfrm>
-            <a:off x="0" y="0"/>
             <a:ext cx="9144000" cy="582780"/>
           </a:xfrm>
         </p:spPr>
@@ -3528,7 +3390,7 @@
             </a:pPr>
             <a:r>
               <a:rPr/>
-              <a:t>Summary Checklist for NMDS and PERMANOVA</a:t>
+              <a:t>Getting unstuck</a:t>
             </a:r>
           </a:p>
         </p:txBody>
@@ -3548,12 +3410,12 @@
           <a:bodyPr/>
           <a:lstStyle/>
           <a:p>
-            <a:pPr lvl="0" indent="0" marL="1270000">
+            <a:pPr lvl="0" indent="0" marL="0">
               <a:buNone/>
             </a:pPr>
             <a:r>
-              <a:rPr sz="2000" b="1"/>
-              <a:t>Analysis Checklist</a:t>
+              <a:rPr/>
+              <a:t>When code breaks — and it will, that is normal:</a:t>
             </a:r>
           </a:p>
           <a:p>
@@ -3561,12 +3423,12 @@
               <a:buAutoNum type="arabicPeriod"/>
             </a:pPr>
             <a:r>
-              <a:rPr sz="2000" b="1"/>
-              <a:t>Prepare your data</a:t>
-            </a:r>
-            <a:r>
-              <a:rPr sz="2000"/>
-              <a:t> - ensure numeric matrix format</a:t>
+              <a:rPr b="1"/>
+              <a:t>Read the error message out loud.</a:t>
+            </a:r>
+            <a:r>
+              <a:rPr/>
+              <a:t> R usually names the line and the problem.</a:t>
             </a:r>
           </a:p>
           <a:p>
@@ -3574,22 +3436,50 @@
               <a:buAutoNum type="arabicPeriod"/>
             </a:pPr>
             <a:r>
-              <a:rPr sz="2000" b="1"/>
-              <a:t>Choose appropriate distance measure</a:t>
-            </a:r>
-          </a:p>
-          <a:p>
-            <a:pPr lvl="1"/>
-            <a:r>
-              <a:rPr sz="2000"/>
-              <a:t>Bray-Curtis for abundance data</a:t>
-            </a:r>
-          </a:p>
-          <a:p>
-            <a:pPr lvl="1"/>
-            <a:r>
-              <a:rPr sz="2000"/>
-              <a:t>Euclidean for measurement data</a:t>
+              <a:rPr b="1"/>
+              <a:t>Check the usual suspects:</a:t>
+            </a:r>
+            <a:r>
+              <a:rPr/>
+              <a:t> did you run all the </a:t>
+            </a:r>
+            <a:r>
+              <a:rPr>
+                <a:latin typeface="Courier"/>
+              </a:rPr>
+              <a:t>library()</a:t>
+            </a:r>
+            <a:r>
+              <a:rPr/>
+              <a:t> calls at the top? Spelling? A missing </a:t>
+            </a:r>
+            <a:r>
+              <a:rPr>
+                <a:latin typeface="Courier"/>
+              </a:rPr>
+              <a:t>)</a:t>
+            </a:r>
+            <a:r>
+              <a:rPr/>
+              <a:t> or </a:t>
+            </a:r>
+            <a:r>
+              <a:rPr>
+                <a:latin typeface="Courier"/>
+              </a:rPr>
+              <a:t>%&gt;%</a:t>
+            </a:r>
+            <a:r>
+              <a:rPr/>
+              <a:t> at the </a:t>
+            </a:r>
+            <a:r>
+              <a:rPr i="1"/>
+              <a:t>start</a:t>
+            </a:r>
+            <a:r>
+              <a:rPr/>
+              <a:t> of a line?</a:t>
             </a:r>
           </a:p>
           <a:p>
@@ -3597,12 +3487,14 @@
               <a:buAutoNum type="arabicPeriod"/>
             </a:pPr>
             <a:r>
-              <a:rPr sz="2000" b="1"/>
-              <a:t>Run NMDS</a:t>
-            </a:r>
-            <a:r>
-              <a:rPr sz="2000"/>
-              <a:t> with sufficient iterations</a:t>
+              <a:rPr>
+                <a:latin typeface="Courier"/>
+              </a:rPr>
+              <a:t>?function_name</a:t>
+            </a:r>
+            <a:r>
+              <a:rPr/>
+              <a:t> opens the built-in help page.</a:t>
             </a:r>
           </a:p>
           <a:p>
@@ -3610,275 +3502,29 @@
               <a:buAutoNum type="arabicPeriod"/>
             </a:pPr>
             <a:r>
+              <a:rPr b="1"/>
+              <a:t>Bring the exact error</a:t>
+            </a:r>
+            <a:r>
+              <a:rPr/>
+              <a:t> (copy-paste it) to class or office hours.</a:t>
+            </a:r>
+          </a:p>
+          <a:p>
+            <a:pPr lvl="0" indent="0" marL="1270000">
+              <a:buNone/>
+            </a:pPr>
+            <a:r>
+              <a:rPr sz="2000"/>
+              <a:t>💡 </a:t>
+            </a:r>
+            <a:r>
               <a:rPr sz="2000" b="1"/>
-              <a:t>Check stress value</a:t>
+              <a:t>Key idea:</a:t>
             </a:r>
             <a:r>
               <a:rPr sz="2000"/>
-              <a:t> - must be &lt; 0.2</a:t>
-            </a:r>
-          </a:p>
-          <a:p>
-            <a:pPr lvl="0" indent="-342900" marL="342900">
-              <a:buAutoNum type="arabicPeriod"/>
-            </a:pPr>
-            <a:r>
-              <a:rPr sz="2000" b="1"/>
-              <a:t>Create ordination plots</a:t>
-            </a:r>
-            <a:r>
-              <a:rPr sz="2000"/>
-              <a:t> with groups identified</a:t>
-            </a:r>
-          </a:p>
-          <a:p>
-            <a:pPr lvl="0" indent="-342900" marL="342900">
-              <a:buAutoNum type="arabicPeriod"/>
-            </a:pPr>
-            <a:r>
-              <a:rPr sz="2000" b="1"/>
-              <a:t>Test homogeneity of dispersions</a:t>
-            </a:r>
-            <a:r>
-              <a:rPr sz="2000"/>
-              <a:t> before PERMANOVA</a:t>
-            </a:r>
-          </a:p>
-          <a:p>
-            <a:pPr lvl="0" indent="-342900" marL="342900">
-              <a:buAutoNum type="arabicPeriod"/>
-            </a:pPr>
-            <a:r>
-              <a:rPr sz="2000" b="1"/>
-              <a:t>Run PERMANOVA</a:t>
-            </a:r>
-            <a:r>
-              <a:rPr sz="2000"/>
-              <a:t> to test group differences</a:t>
-            </a:r>
-          </a:p>
-          <a:p>
-            <a:pPr lvl="0" indent="-342900" marL="342900">
-              <a:buAutoNum type="arabicPeriod"/>
-            </a:pPr>
-            <a:r>
-              <a:rPr sz="2000" b="1"/>
-              <a:t>Consider ANOSIM</a:t>
-            </a:r>
-            <a:r>
-              <a:rPr sz="2000"/>
-              <a:t> as complementary test</a:t>
-            </a:r>
-          </a:p>
-          <a:p>
-            <a:pPr lvl="0" indent="-342900" marL="342900">
-              <a:buAutoNum type="arabicPeriod"/>
-            </a:pPr>
-            <a:r>
-              <a:rPr sz="2000" b="1"/>
-              <a:t>Fit environmental variables</a:t>
-            </a:r>
-            <a:r>
-              <a:rPr sz="2000"/>
-              <a:t> if available</a:t>
-            </a:r>
-          </a:p>
-          <a:p>
-            <a:pPr lvl="0" indent="0" marL="0">
-              <a:spcBef>
-                <a:spcPts val="3000"/>
-              </a:spcBef>
-              <a:buNone/>
-            </a:pPr>
-            <a:r>
-              <a:rPr b="1"/>
-              <a:t>Key Points to Remember</a:t>
-            </a:r>
-          </a:p>
-          <a:p>
-            <a:pPr lvl="0"/>
-            <a:r>
-              <a:rPr b="1"/>
-              <a:t>NMDS preserves rank order</a:t>
-            </a:r>
-            <a:r>
-              <a:rPr/>
-              <a:t> of distances, not exact values</a:t>
-            </a:r>
-          </a:p>
-          <a:p>
-            <a:pPr lvl="0"/>
-            <a:r>
-              <a:rPr b="1"/>
-              <a:t>Stress &lt; 0.2</a:t>
-            </a:r>
-            <a:r>
-              <a:rPr/>
-              <a:t> is acceptable, &lt; 0.1 is excellent</a:t>
-            </a:r>
-          </a:p>
-          <a:p>
-            <a:pPr lvl="0"/>
-            <a:r>
-              <a:rPr b="1"/>
-              <a:t>PERMANOVA tests centroids</a:t>
-            </a:r>
-            <a:r>
-              <a:rPr/>
-              <a:t>, ANOSIM tests overlap</a:t>
-            </a:r>
-          </a:p>
-          <a:p>
-            <a:pPr lvl="0"/>
-            <a:r>
-              <a:rPr b="1"/>
-              <a:t>Check dispersion homogeneity</a:t>
-            </a:r>
-            <a:r>
-              <a:rPr/>
-              <a:t> - violated assumption affects interpretation</a:t>
-            </a:r>
-          </a:p>
-          <a:p>
-            <a:pPr lvl="0"/>
-            <a:r>
-              <a:rPr b="1"/>
-              <a:t>Multiple comparisons</a:t>
-            </a:r>
-            <a:r>
-              <a:rPr/>
-              <a:t> require p-value adjustment</a:t>
-            </a:r>
-          </a:p>
-          <a:p>
-            <a:pPr lvl="0"/>
-            <a:r>
-              <a:rPr b="1"/>
-              <a:t>Axes have no inherent meaning</a:t>
-            </a:r>
-            <a:r>
-              <a:rPr/>
-              <a:t> in NMDS (unlike PCA)</a:t>
-            </a:r>
-          </a:p>
-          <a:p>
-            <a:pPr lvl="0"/>
-            <a:r>
-              <a:rPr b="1"/>
-              <a:t>Use appropriate distance measures</a:t>
-            </a:r>
-            <a:r>
-              <a:rPr/>
-              <a:t> for your data type</a:t>
-            </a:r>
-          </a:p>
-          <a:p>
-            <a:pPr lvl="0" indent="0" marL="1270000">
-              <a:buNone/>
-            </a:pPr>
-            <a:r>
-              <a:rPr sz="2000" b="1"/>
-              <a:t>Key Takeaways from NMDS/PERMANOVA Analysis</a:t>
-            </a:r>
-          </a:p>
-          <a:p>
-            <a:pPr lvl="0" indent="-342900" marL="342900">
-              <a:buAutoNum type="arabicPeriod"/>
-            </a:pPr>
-            <a:r>
-              <a:rPr sz="2000" b="1"/>
-              <a:t>NMDS is flexible</a:t>
-            </a:r>
-            <a:r>
-              <a:rPr sz="2000"/>
-              <a:t> - works with any distance measure and makes few assumptions</a:t>
-            </a:r>
-          </a:p>
-          <a:p>
-            <a:pPr lvl="0" indent="-342900" marL="342900">
-              <a:buAutoNum type="arabicPeriod"/>
-            </a:pPr>
-            <a:r>
-              <a:rPr sz="2000" b="1"/>
-              <a:t>Stress indicates fit quality</a:t>
-            </a:r>
-            <a:r>
-              <a:rPr sz="2000"/>
-              <a:t> - always report and check this value</a:t>
-            </a:r>
-          </a:p>
-          <a:p>
-            <a:pPr lvl="0" indent="-342900" marL="342900">
-              <a:buAutoNum type="arabicPeriod"/>
-            </a:pPr>
-            <a:r>
-              <a:rPr sz="2000" b="1"/>
-              <a:t>PERMANOVA is powerful</a:t>
-            </a:r>
-            <a:r>
-              <a:rPr sz="2000"/>
-              <a:t> but assumes homogeneous dispersions</a:t>
-            </a:r>
-          </a:p>
-          <a:p>
-            <a:pPr lvl="0" indent="-342900" marL="342900">
-              <a:buAutoNum type="arabicPeriod"/>
-            </a:pPr>
-            <a:r>
-              <a:rPr sz="2000" b="1"/>
-              <a:t>ANOSIM is complementary</a:t>
-            </a:r>
-            <a:r>
-              <a:rPr sz="2000"/>
-              <a:t> - provides different perspective on group separation</a:t>
-            </a:r>
-          </a:p>
-          <a:p>
-            <a:pPr lvl="0" indent="-342900" marL="342900">
-              <a:buAutoNum type="arabicPeriod"/>
-            </a:pPr>
-            <a:r>
-              <a:rPr sz="2000" b="1"/>
-              <a:t>Visualization is crucial</a:t>
-            </a:r>
-            <a:r>
-              <a:rPr sz="2000"/>
-              <a:t> - always plot your ordination results</a:t>
-            </a:r>
-          </a:p>
-          <a:p>
-            <a:pPr lvl="0" indent="-342900" marL="342900">
-              <a:buAutoNum type="arabicPeriod"/>
-            </a:pPr>
-            <a:r>
-              <a:rPr sz="2000" b="1"/>
-              <a:t>Environmental fitting</a:t>
-            </a:r>
-            <a:r>
-              <a:rPr sz="2000"/>
-              <a:t> helps interpret ecological patterns</a:t>
-            </a:r>
-          </a:p>
-          <a:p>
-            <a:pPr lvl="0" indent="-342900" marL="342900">
-              <a:buAutoNum type="arabicPeriod"/>
-            </a:pPr>
-            <a:r>
-              <a:rPr sz="2000" b="1"/>
-              <a:t>Permutation tests</a:t>
-            </a:r>
-            <a:r>
-              <a:rPr sz="2000"/>
-              <a:t> avoid distributional assumptions</a:t>
-            </a:r>
-          </a:p>
-          <a:p>
-            <a:pPr lvl="0" indent="0" marL="1270000">
-              <a:buNone/>
-            </a:pPr>
-            <a:r>
-              <a:rPr sz="2000"/>
-              <a:t>Remember: NMDS is iterative and may find different solutions - always set a seed for reproducibility!</a:t>
+              <a:t> Every working scientist googles error messages daily. Getting stuck is not failing — it is the job.</a:t>
             </a:r>
           </a:p>
         </p:txBody>
@@ -3930,7 +3576,7 @@
             </a:pPr>
             <a:r>
               <a:rPr/>
-              <a:t>Lecture 18: Non-metric Multidimensional Scaling (NMDS) and PERMANOVA</a:t>
+              <a:t>Worksheet: NMDS &amp; PERMANOVA</a:t>
             </a:r>
           </a:p>
         </p:txBody>
@@ -3957,74 +3603,284 @@
               <a:buNone/>
             </a:pPr>
             <a:r>
+              <a:rPr sz="2000" b="1"/>
+              <a:t>How to use this worksheet</a:t>
+            </a:r>
+          </a:p>
+          <a:p>
+            <a:pPr lvl="0" indent="0" marL="1270000">
+              <a:buNone/>
+            </a:pPr>
+            <a:r>
+              <a:rPr sz="2000"/>
+              <a:t>Work through each part in order, at your own pace. Type every line of code yourself into a </a:t>
+            </a:r>
+            <a:r>
+              <a:rPr sz="2000" b="1"/>
+              <a:t>plain R script</a:t>
+            </a:r>
+            <a:r>
+              <a:rPr sz="2000"/>
+              <a:t> — do not copy-paste. Blocks marked </a:t>
+            </a:r>
+            <a:r>
+              <a:rPr sz="2000" b="1"/>
+              <a:t>▶ Run this</a:t>
+            </a:r>
+            <a:r>
+              <a:rPr sz="2000"/>
+              <a:t> are code you should type and execute. Blocks marked </a:t>
+            </a:r>
+            <a:r>
+              <a:rPr sz="2000" b="1"/>
+              <a:t>✏️ Your turn</a:t>
+            </a:r>
+            <a:r>
+              <a:rPr sz="2000"/>
+              <a:t> ask you to write, modify, or answer something. Boxes marked </a:t>
+            </a:r>
+            <a:r>
+              <a:rPr sz="2000" b="1"/>
+              <a:t>🚀 If you finish early</a:t>
+            </a:r>
+            <a:r>
+              <a:rPr sz="2000"/>
+              <a:t> are optional bonus material that goes a bit further than what we covered in lecture.</a:t>
+            </a:r>
+          </a:p>
+          <a:p>
+            <a:pPr lvl="0" indent="0" marL="1270000">
+              <a:buNone/>
+            </a:pPr>
+            <a:r>
+              <a:rPr sz="2000"/>
+              <a:t>This worksheet uses the iris dataset, treating the four flower measurements as if they were abundances of different “species” at different “sites” — a handy stand-in for real community data.</a:t>
+            </a:r>
+          </a:p>
+          <a:p>
+            <a:pPr lvl="0" indent="0" marL="0">
+              <a:buNone/>
+            </a:pPr>
+            <a:r>
+              <a:rPr b="1"/>
+              <a:t>▶ Run this in your Script:</a:t>
+            </a:r>
+          </a:p>
+          <a:p>
+            <a:pPr lvl="0" indent="0">
+              <a:buNone/>
+            </a:pPr>
+            <a:r>
+              <a:rPr>
+                <a:solidFill>
+                  <a:srgbClr val="4758AB"/>
+                </a:solidFill>
+                <a:latin typeface="Courier"/>
+              </a:rPr>
+              <a:t>library</a:t>
+            </a:r>
+            <a:r>
+              <a:rPr>
+                <a:solidFill>
+                  <a:srgbClr val="003B4F"/>
+                </a:solidFill>
+                <a:latin typeface="Courier"/>
+              </a:rPr>
+              <a:t>(vegan)</a:t>
+            </a:r>
+            <a:br/>
+            <a:r>
+              <a:rPr>
+                <a:solidFill>
+                  <a:srgbClr val="4758AB"/>
+                </a:solidFill>
+                <a:latin typeface="Courier"/>
+              </a:rPr>
+              <a:t>library</a:t>
+            </a:r>
+            <a:r>
+              <a:rPr>
+                <a:solidFill>
+                  <a:srgbClr val="003B4F"/>
+                </a:solidFill>
+                <a:latin typeface="Courier"/>
+              </a:rPr>
+              <a:t>(janitor)</a:t>
+            </a:r>
+            <a:br/>
+            <a:r>
+              <a:rPr>
+                <a:solidFill>
+                  <a:srgbClr val="4758AB"/>
+                </a:solidFill>
+                <a:latin typeface="Courier"/>
+              </a:rPr>
+              <a:t>library</a:t>
+            </a:r>
+            <a:r>
+              <a:rPr>
+                <a:solidFill>
+                  <a:srgbClr val="003B4F"/>
+                </a:solidFill>
+                <a:latin typeface="Courier"/>
+              </a:rPr>
+              <a:t>(patchwork)</a:t>
+            </a:r>
+            <a:br/>
+            <a:r>
+              <a:rPr>
+                <a:solidFill>
+                  <a:srgbClr val="4758AB"/>
+                </a:solidFill>
+                <a:latin typeface="Courier"/>
+              </a:rPr>
+              <a:t>library</a:t>
+            </a:r>
+            <a:r>
+              <a:rPr>
+                <a:solidFill>
+                  <a:srgbClr val="003B4F"/>
+                </a:solidFill>
+                <a:latin typeface="Courier"/>
+              </a:rPr>
+              <a:t>(tidyverse)</a:t>
+            </a:r>
+            <a:br/>
+            <a:br/>
+            <a:r>
+              <a:rPr>
+                <a:solidFill>
+                  <a:srgbClr val="4758AB"/>
+                </a:solidFill>
+                <a:latin typeface="Courier"/>
+              </a:rPr>
+              <a:t>theme_set</a:t>
+            </a:r>
+            <a:r>
+              <a:rPr>
+                <a:solidFill>
+                  <a:srgbClr val="003B4F"/>
+                </a:solidFill>
+                <a:latin typeface="Courier"/>
+              </a:rPr>
+              <a:t>(</a:t>
+            </a:r>
+            <a:r>
+              <a:rPr>
+                <a:solidFill>
+                  <a:srgbClr val="4758AB"/>
+                </a:solidFill>
+                <a:latin typeface="Courier"/>
+              </a:rPr>
+              <a:t>theme_minimal</a:t>
+            </a:r>
+            <a:r>
+              <a:rPr>
+                <a:solidFill>
+                  <a:srgbClr val="003B4F"/>
+                </a:solidFill>
+                <a:latin typeface="Courier"/>
+              </a:rPr>
+              <a:t>(</a:t>
+            </a:r>
+            <a:r>
+              <a:rPr>
+                <a:solidFill>
+                  <a:srgbClr val="657422"/>
+                </a:solidFill>
+                <a:latin typeface="Courier"/>
+              </a:rPr>
+              <a:t>base_size =</a:t>
+            </a:r>
+            <a:r>
+              <a:rPr>
+                <a:solidFill>
+                  <a:srgbClr val="003B4F"/>
+                </a:solidFill>
+                <a:latin typeface="Courier"/>
+              </a:rPr>
+              <a:t> </a:t>
+            </a:r>
+            <a:r>
+              <a:rPr>
+                <a:solidFill>
+                  <a:srgbClr val="AD0000"/>
+                </a:solidFill>
+                <a:latin typeface="Courier"/>
+              </a:rPr>
+              <a:t>9</a:t>
+            </a:r>
+            <a:r>
+              <a:rPr>
+                <a:solidFill>
+                  <a:srgbClr val="003B4F"/>
+                </a:solidFill>
+                <a:latin typeface="Courier"/>
+              </a:rPr>
+              <a:t>))</a:t>
+            </a:r>
+          </a:p>
+          <a:p>
+            <a:pPr lvl="0" indent="0" marL="0">
+              <a:buNone/>
+            </a:pPr>
+            <a:r>
               <a:rPr b="1"/>
               <a:t>What is NMDS?</a:t>
             </a:r>
+            <a:r>
+              <a:rPr/>
+              <a:t> NMDS (Non-metric Multidimensional Scaling) is an ordination technique that:</a:t>
+            </a:r>
+          </a:p>
+          <a:p>
+            <a:pPr lvl="0"/>
+            <a:r>
+              <a:rPr/>
+              <a:t>Visualizes dissimilarity between objects in reduced dimensions</a:t>
+            </a:r>
+          </a:p>
+          <a:p>
+            <a:pPr lvl="0"/>
+            <a:r>
+              <a:rPr/>
+              <a:t>Preserves rank order of distances, not exact distances</a:t>
+            </a:r>
+          </a:p>
+          <a:p>
+            <a:pPr lvl="0"/>
+            <a:r>
+              <a:rPr/>
+              <a:t>Works well with non-linear ecological relationships</a:t>
+            </a:r>
+          </a:p>
+          <a:p>
+            <a:pPr lvl="0"/>
+            <a:r>
+              <a:rPr/>
+              <a:t>Makes few assumptions about data structure</a:t>
+            </a:r>
           </a:p>
           <a:p>
             <a:pPr lvl="0" indent="0" marL="0">
               <a:buNone/>
             </a:pPr>
             <a:r>
+              <a:rPr b="1"/>
+              <a:t>When to use NMDS:</a:t>
+            </a:r>
+            <a:r>
               <a:rPr/>
-              <a:t>NMDS (Non-metric Multidimensional Scaling) is an ordination technique that: - Visualizes dissimilarity between objects in reduced dimensions - Preserves rank order of distances, not exact distances - Works well with non-linear ecological relationships - Makes few assumptions about data structure</a:t>
+              <a:t> community data (species abundance or presence/absence matrices), non-linear relationships (when PCA assumptions are violated), or complex ecological gradients (multiple environmental factors affecting communities).</a:t>
             </a:r>
           </a:p>
           <a:p>
             <a:pPr lvl="0" indent="0" marL="0">
-              <a:spcBef>
-                <a:spcPts val="3000"/>
-              </a:spcBef>
               <a:buNone/>
             </a:pPr>
             <a:r>
               <a:rPr b="1"/>
-              <a:t>When to Use NMDS</a:t>
-            </a:r>
-          </a:p>
-          <a:p>
-            <a:pPr lvl="0" indent="0" marL="0">
-              <a:buNone/>
-            </a:pPr>
-            <a:r>
-              <a:rPr/>
-              <a:t>Use NMDS when you have: - </a:t>
-            </a:r>
-            <a:r>
-              <a:rPr b="1"/>
-              <a:t>Community data</a:t>
-            </a:r>
-            <a:r>
-              <a:rPr/>
-              <a:t>: Species abundance or presence/absence matrices - </a:t>
-            </a:r>
-            <a:r>
-              <a:rPr b="1"/>
-              <a:t>Non-linear relationships</a:t>
-            </a:r>
-            <a:r>
-              <a:rPr/>
-              <a:t>: When PCA assumptions are violated - </a:t>
-            </a:r>
-            <a:r>
-              <a:rPr b="1"/>
-              <a:t>Complex ecological gradients</a:t>
-            </a:r>
-            <a:r>
-              <a:rPr/>
-              <a:t>: Multiple environmental factors affecting communities</a:t>
-            </a:r>
-          </a:p>
-          <a:p>
-            <a:pPr lvl="0" indent="0" marL="0">
-              <a:spcBef>
-                <a:spcPts val="3000"/>
-              </a:spcBef>
-              <a:buNone/>
-            </a:pPr>
-            <a:r>
-              <a:rPr b="1"/>
-              <a:t>Key Concepts of NMDS</a:t>
+              <a:t>Key concepts of NMDS:</a:t>
             </a:r>
           </a:p>
           <a:p>
@@ -4050,7 +3906,7 @@
             </a:r>
             <a:r>
               <a:rPr/>
-              <a:t> measure goodness of fit (&lt;0.2 is acceptable)</a:t>
+              <a:t> measure goodness of fit (&lt; 0.2 is acceptable)</a:t>
             </a:r>
           </a:p>
           <a:p>
@@ -4098,7 +3954,7 @@
             </a:pPr>
             <a:r>
               <a:rPr sz="2000" b="1"/>
-              <a:t>Critical First Step</a:t>
+              <a:t>Important</a:t>
             </a:r>
           </a:p>
           <a:p>
@@ -4106,8 +3962,12 @@
               <a:buNone/>
             </a:pPr>
             <a:r>
+              <a:rPr sz="2000" b="1"/>
+              <a:t>Critical first step:</a:t>
+            </a:r>
+            <a:r>
               <a:rPr sz="2000"/>
-              <a:t>Always check your stress value! Stress &lt; 0.1 is excellent, 0.1-0.2 is good, &gt; 0.2 is poor representation.</a:t>
+              <a:t> Always check your stress value! Stress &lt; 0.1 is excellent, 0.1-0.2 is good, &gt; 0.2 is poor representation.</a:t>
             </a:r>
           </a:p>
         </p:txBody>
@@ -4147,7 +4007,7 @@
         <p:spPr>
           <a:xfrm>
             <a:off x="0" y="0"/>
-            <a:ext cx="9144000" cy="871538"/>
+            <a:ext cx="9144000" cy="582780"/>
           </a:xfrm>
         </p:spPr>
         <p:txBody>
@@ -4159,19 +4019,19 @@
             </a:pPr>
             <a:r>
               <a:rPr/>
-              <a:t>Part 1: Data Preparation and Exploration</a:t>
+              <a:t>Part 1 · Data Preparation and Exploration</a:t>
             </a:r>
           </a:p>
         </p:txBody>
       </p:sp>
       <p:sp>
         <p:nvSpPr>
-          <p:cNvPr id="4" name="Text Placeholder 3"/>
+          <p:cNvPr id="3" name="Content Placeholder 2"/>
           <p:cNvSpPr>
             <a:spLocks noGrp="1"/>
           </p:cNvSpPr>
           <p:nvPr>
-            <p:ph idx="2" sz="half" type="body"/>
+            <p:ph idx="1"/>
           </p:nvPr>
         </p:nvSpPr>
         <p:spPr/>
@@ -4180,18 +4040,6 @@
           <a:lstStyle/>
           <a:p>
             <a:pPr lvl="0" indent="0" marL="0">
-              <a:spcBef>
-                <a:spcPts val="3000"/>
-              </a:spcBef>
-              <a:buNone/>
-            </a:pPr>
-            <a:r>
-              <a:rPr b="1"/>
-              <a:t>Load and Prepare Data</a:t>
-            </a:r>
-          </a:p>
-          <a:p>
-            <a:pPr lvl="0" indent="0" marL="0">
               <a:buNone/>
             </a:pPr>
             <a:r>
@@ -4200,22 +4048,132 @@
             </a:r>
           </a:p>
           <a:p>
+            <a:pPr lvl="0" indent="0" marL="0">
+              <a:buNone/>
+            </a:pPr>
+            <a:r>
+              <a:rPr b="1"/>
+              <a:t>▶ Run this:</a:t>
+            </a:r>
+          </a:p>
+          <a:p>
             <a:pPr lvl="0" indent="0">
               <a:buNone/>
             </a:pPr>
             <a:r>
               <a:rPr>
-                <a:latin typeface="Courier"/>
-              </a:rPr>
-              <a:t># A tibble: 6 × 5
-  sepal_length sepal_width petal_length petal_width species
-         &lt;dbl&gt;       &lt;dbl&gt;        &lt;dbl&gt;       &lt;dbl&gt; &lt;chr&gt;  
-1          5.1         3.5          1.4         0.2 setosa 
-2          4.9         3            1.4         0.2 setosa 
-3          4.7         3.2          1.3         0.2 setosa 
-4          4.6         3.1          1.5         0.2 setosa 
-5          5           3.6          1.4         0.2 setosa 
-6          5.4         3.9          1.7         0.4 setosa </a:t>
+                <a:solidFill>
+                  <a:srgbClr val="003B4F"/>
+                </a:solidFill>
+                <a:latin typeface="Courier"/>
+              </a:rPr>
+              <a:t>iris_df &lt;- </a:t>
+            </a:r>
+            <a:r>
+              <a:rPr>
+                <a:solidFill>
+                  <a:srgbClr val="4758AB"/>
+                </a:solidFill>
+                <a:latin typeface="Courier"/>
+              </a:rPr>
+              <a:t>read_csv</a:t>
+            </a:r>
+            <a:r>
+              <a:rPr>
+                <a:solidFill>
+                  <a:srgbClr val="003B4F"/>
+                </a:solidFill>
+                <a:latin typeface="Courier"/>
+              </a:rPr>
+              <a:t>(</a:t>
+            </a:r>
+            <a:r>
+              <a:rPr>
+                <a:solidFill>
+                  <a:srgbClr val="20794D"/>
+                </a:solidFill>
+                <a:latin typeface="Courier"/>
+              </a:rPr>
+              <a:t>"data/iris.csv"</a:t>
+            </a:r>
+            <a:r>
+              <a:rPr>
+                <a:solidFill>
+                  <a:srgbClr val="003B4F"/>
+                </a:solidFill>
+                <a:latin typeface="Courier"/>
+              </a:rPr>
+              <a:t>) </a:t>
+            </a:r>
+            <a:r>
+              <a:rPr>
+                <a:solidFill>
+                  <a:srgbClr val="5E5E5E"/>
+                </a:solidFill>
+                <a:latin typeface="Courier"/>
+              </a:rPr>
+              <a:t>%&gt;%</a:t>
+            </a:r>
+            <a:br/>
+            <a:r>
+              <a:rPr>
+                <a:solidFill>
+                  <a:srgbClr val="003B4F"/>
+                </a:solidFill>
+                <a:latin typeface="Courier"/>
+              </a:rPr>
+              <a:t>  </a:t>
+            </a:r>
+            <a:r>
+              <a:rPr>
+                <a:solidFill>
+                  <a:srgbClr val="4758AB"/>
+                </a:solidFill>
+                <a:latin typeface="Courier"/>
+              </a:rPr>
+              <a:t>clean_names</a:t>
+            </a:r>
+            <a:r>
+              <a:rPr>
+                <a:solidFill>
+                  <a:srgbClr val="003B4F"/>
+                </a:solidFill>
+                <a:latin typeface="Courier"/>
+              </a:rPr>
+              <a:t>()</a:t>
+            </a:r>
+            <a:br/>
+            <a:br/>
+            <a:r>
+              <a:rPr>
+                <a:solidFill>
+                  <a:srgbClr val="4758AB"/>
+                </a:solidFill>
+                <a:latin typeface="Courier"/>
+              </a:rPr>
+              <a:t>head</a:t>
+            </a:r>
+            <a:r>
+              <a:rPr>
+                <a:solidFill>
+                  <a:srgbClr val="003B4F"/>
+                </a:solidFill>
+                <a:latin typeface="Courier"/>
+              </a:rPr>
+              <a:t>(iris_df)</a:t>
+            </a:r>
+          </a:p>
+          <a:p>
+            <a:pPr lvl="0" indent="0" marL="0">
+              <a:buNone/>
+            </a:pPr>
+            <a:r>
+              <a:rPr b="1"/>
+              <a:t>▶ Run this</a:t>
+            </a:r>
+            <a:r>
+              <a:rPr/>
+              <a:t> — separate the grouping variable from the numeric “community” matrix:</a:t>
             </a:r>
           </a:p>
           <a:p>
@@ -4224,59 +4182,321 @@
             </a:pPr>
             <a:r>
               <a:rPr>
-                <a:latin typeface="Courier"/>
-              </a:rPr>
-              <a:t>tibble [150 × 4] (S3: tbl_df/tbl/data.frame)
- $ sepal_length: num [1:150] 5.1 4.9 4.7 4.6 5 5.4 4.6 5 4.4 4.9 ...
- $ sepal_width : num [1:150] 3.5 3 3.2 3.1 3.6 3.9 3.4 3.4 2.9 3.1 ...
- $ petal_length: num [1:150] 1.4 1.4 1.3 1.5 1.4 1.7 1.4 1.5 1.4 1.5 ...
- $ petal_width : num [1:150] 0.2 0.2 0.2 0.2 0.2 0.4 0.3 0.2 0.2 0.1 ...</a:t>
+                <a:solidFill>
+                  <a:srgbClr val="003B4F"/>
+                </a:solidFill>
+                <a:latin typeface="Courier"/>
+              </a:rPr>
+              <a:t>iris_species_df &lt;- iris_df </a:t>
+            </a:r>
+            <a:r>
+              <a:rPr>
+                <a:solidFill>
+                  <a:srgbClr val="5E5E5E"/>
+                </a:solidFill>
+                <a:latin typeface="Courier"/>
+              </a:rPr>
+              <a:t>%&gt;%</a:t>
+            </a:r>
+            <a:br/>
+            <a:r>
+              <a:rPr>
+                <a:solidFill>
+                  <a:srgbClr val="003B4F"/>
+                </a:solidFill>
+                <a:latin typeface="Courier"/>
+              </a:rPr>
+              <a:t>  dplyr</a:t>
+            </a:r>
+            <a:r>
+              <a:rPr>
+                <a:solidFill>
+                  <a:srgbClr val="5E5E5E"/>
+                </a:solidFill>
+                <a:latin typeface="Courier"/>
+              </a:rPr>
+              <a:t>::</a:t>
+            </a:r>
+            <a:r>
+              <a:rPr>
+                <a:solidFill>
+                  <a:srgbClr val="4758AB"/>
+                </a:solidFill>
+                <a:latin typeface="Courier"/>
+              </a:rPr>
+              <a:t>select</a:t>
+            </a:r>
+            <a:r>
+              <a:rPr>
+                <a:solidFill>
+                  <a:srgbClr val="003B4F"/>
+                </a:solidFill>
+                <a:latin typeface="Courier"/>
+              </a:rPr>
+              <a:t>(species)</a:t>
+            </a:r>
+            <a:br/>
+            <a:br/>
+            <a:r>
+              <a:rPr>
+                <a:solidFill>
+                  <a:srgbClr val="003B4F"/>
+                </a:solidFill>
+                <a:latin typeface="Courier"/>
+              </a:rPr>
+              <a:t>iris_numeric_df &lt;- iris_df </a:t>
+            </a:r>
+            <a:r>
+              <a:rPr>
+                <a:solidFill>
+                  <a:srgbClr val="5E5E5E"/>
+                </a:solidFill>
+                <a:latin typeface="Courier"/>
+              </a:rPr>
+              <a:t>%&gt;%</a:t>
+            </a:r>
+            <a:br/>
+            <a:r>
+              <a:rPr>
+                <a:solidFill>
+                  <a:srgbClr val="003B4F"/>
+                </a:solidFill>
+                <a:latin typeface="Courier"/>
+              </a:rPr>
+              <a:t>  dplyr</a:t>
+            </a:r>
+            <a:r>
+              <a:rPr>
+                <a:solidFill>
+                  <a:srgbClr val="5E5E5E"/>
+                </a:solidFill>
+                <a:latin typeface="Courier"/>
+              </a:rPr>
+              <a:t>::</a:t>
+            </a:r>
+            <a:r>
+              <a:rPr>
+                <a:solidFill>
+                  <a:srgbClr val="4758AB"/>
+                </a:solidFill>
+                <a:latin typeface="Courier"/>
+              </a:rPr>
+              <a:t>select</a:t>
+            </a:r>
+            <a:r>
+              <a:rPr>
+                <a:solidFill>
+                  <a:srgbClr val="003B4F"/>
+                </a:solidFill>
+                <a:latin typeface="Courier"/>
+              </a:rPr>
+              <a:t>(</a:t>
+            </a:r>
+            <a:r>
+              <a:rPr>
+                <a:solidFill>
+                  <a:srgbClr val="5E5E5E"/>
+                </a:solidFill>
+                <a:latin typeface="Courier"/>
+              </a:rPr>
+              <a:t>-</a:t>
+            </a:r>
+            <a:r>
+              <a:rPr>
+                <a:solidFill>
+                  <a:srgbClr val="003B4F"/>
+                </a:solidFill>
+                <a:latin typeface="Courier"/>
+              </a:rPr>
+              <a:t>species)</a:t>
+            </a:r>
+            <a:br/>
+            <a:br/>
+            <a:r>
+              <a:rPr>
+                <a:solidFill>
+                  <a:srgbClr val="4758AB"/>
+                </a:solidFill>
+                <a:latin typeface="Courier"/>
+              </a:rPr>
+              <a:t>str</a:t>
+            </a:r>
+            <a:r>
+              <a:rPr>
+                <a:solidFill>
+                  <a:srgbClr val="003B4F"/>
+                </a:solidFill>
+                <a:latin typeface="Courier"/>
+              </a:rPr>
+              <a:t>(iris_numeric_df)</a:t>
             </a:r>
           </a:p>
           <a:p>
             <a:pPr lvl="0" indent="0" marL="0">
-              <a:spcBef>
-                <a:spcPts val="3000"/>
-              </a:spcBef>
               <a:buNone/>
             </a:pPr>
             <a:r>
               <a:rPr b="1"/>
-              <a:t>Visualize the Data</a:t>
+              <a:t>▶ Run this</a:t>
+            </a:r>
+            <a:r>
+              <a:rPr/>
+              <a:t> — a quick pairs plot to see relationships:</a:t>
+            </a:r>
+          </a:p>
+          <a:p>
+            <a:pPr lvl="0" indent="0">
+              <a:buNone/>
+            </a:pPr>
+            <a:r>
+              <a:rPr>
+                <a:solidFill>
+                  <a:srgbClr val="003B4F"/>
+                </a:solidFill>
+                <a:latin typeface="Courier"/>
+              </a:rPr>
+              <a:t>iris_pairs_plot &lt;- iris_df </a:t>
+            </a:r>
+            <a:r>
+              <a:rPr>
+                <a:solidFill>
+                  <a:srgbClr val="5E5E5E"/>
+                </a:solidFill>
+                <a:latin typeface="Courier"/>
+              </a:rPr>
+              <a:t>%&gt;%</a:t>
+            </a:r>
+            <a:br/>
+            <a:r>
+              <a:rPr>
+                <a:solidFill>
+                  <a:srgbClr val="003B4F"/>
+                </a:solidFill>
+                <a:latin typeface="Courier"/>
+              </a:rPr>
+              <a:t>  dplyr</a:t>
+            </a:r>
+            <a:r>
+              <a:rPr>
+                <a:solidFill>
+                  <a:srgbClr val="5E5E5E"/>
+                </a:solidFill>
+                <a:latin typeface="Courier"/>
+              </a:rPr>
+              <a:t>::</a:t>
+            </a:r>
+            <a:r>
+              <a:rPr>
+                <a:solidFill>
+                  <a:srgbClr val="4758AB"/>
+                </a:solidFill>
+                <a:latin typeface="Courier"/>
+              </a:rPr>
+              <a:t>select</a:t>
+            </a:r>
+            <a:r>
+              <a:rPr>
+                <a:solidFill>
+                  <a:srgbClr val="003B4F"/>
+                </a:solidFill>
+                <a:latin typeface="Courier"/>
+              </a:rPr>
+              <a:t>(</a:t>
+            </a:r>
+            <a:r>
+              <a:rPr>
+                <a:solidFill>
+                  <a:srgbClr val="5E5E5E"/>
+                </a:solidFill>
+                <a:latin typeface="Courier"/>
+              </a:rPr>
+              <a:t>-</a:t>
+            </a:r>
+            <a:r>
+              <a:rPr>
+                <a:solidFill>
+                  <a:srgbClr val="003B4F"/>
+                </a:solidFill>
+                <a:latin typeface="Courier"/>
+              </a:rPr>
+              <a:t>species) </a:t>
+            </a:r>
+            <a:r>
+              <a:rPr>
+                <a:solidFill>
+                  <a:srgbClr val="5E5E5E"/>
+                </a:solidFill>
+                <a:latin typeface="Courier"/>
+              </a:rPr>
+              <a:t>%&gt;%</a:t>
+            </a:r>
+            <a:br/>
+            <a:r>
+              <a:rPr>
+                <a:solidFill>
+                  <a:srgbClr val="003B4F"/>
+                </a:solidFill>
+                <a:latin typeface="Courier"/>
+              </a:rPr>
+              <a:t>  </a:t>
+            </a:r>
+            <a:r>
+              <a:rPr>
+                <a:solidFill>
+                  <a:srgbClr val="4758AB"/>
+                </a:solidFill>
+                <a:latin typeface="Courier"/>
+              </a:rPr>
+              <a:t>pairs</a:t>
+            </a:r>
+            <a:r>
+              <a:rPr>
+                <a:solidFill>
+                  <a:srgbClr val="003B4F"/>
+                </a:solidFill>
+                <a:latin typeface="Courier"/>
+              </a:rPr>
+              <a:t>(</a:t>
+            </a:r>
+            <a:r>
+              <a:rPr>
+                <a:solidFill>
+                  <a:srgbClr val="657422"/>
+                </a:solidFill>
+                <a:latin typeface="Courier"/>
+              </a:rPr>
+              <a:t>main =</a:t>
+            </a:r>
+            <a:r>
+              <a:rPr>
+                <a:solidFill>
+                  <a:srgbClr val="003B4F"/>
+                </a:solidFill>
+                <a:latin typeface="Courier"/>
+              </a:rPr>
+              <a:t> </a:t>
+            </a:r>
+            <a:r>
+              <a:rPr>
+                <a:solidFill>
+                  <a:srgbClr val="20794D"/>
+                </a:solidFill>
+                <a:latin typeface="Courier"/>
+              </a:rPr>
+              <a:t>"Iris Measurements Relationships"</a:t>
+            </a:r>
+            <a:r>
+              <a:rPr>
+                <a:solidFill>
+                  <a:srgbClr val="003B4F"/>
+                </a:solidFill>
+                <a:latin typeface="Courier"/>
+              </a:rPr>
+              <a:t>)</a:t>
             </a:r>
           </a:p>
         </p:txBody>
       </p:sp>
-      <p:pic>
-        <p:nvPicPr>
-          <p:cNvPr descr="nmds_cluster_analysis_activity_files/figure-pptx/initial_plot-1.png" id="0" name="Picture 1"/>
-          <p:cNvPicPr>
-            <a:picLocks noGrp="1" noChangeAspect="1"/>
-          </p:cNvPicPr>
-          <p:nvPr/>
-        </p:nvPicPr>
-        <p:blipFill>
-          <a:blip r:embed="rId2"/>
-          <a:stretch>
-            <a:fillRect/>
-          </a:stretch>
-        </p:blipFill>
-        <p:spPr bwMode="auto">
-          <a:xfrm>
-            <a:off x="3657600" y="1244600"/>
-            <a:ext cx="5232400" cy="3225800"/>
-          </a:xfrm>
-          <a:prstGeom prst="rect">
-            <a:avLst/>
-          </a:prstGeom>
-          <a:noFill/>
-          <a:ln w="9525">
-            <a:noFill/>
-            <a:headEnd/>
-            <a:tailEnd/>
-          </a:ln>
-        </p:spPr>
-      </p:pic>
     </p:spTree>
   </p:cSld>
 </p:sld>
@@ -4312,7 +4532,7 @@
         <p:spPr>
           <a:xfrm>
             <a:off x="0" y="0"/>
-            <a:ext cx="9144000" cy="871538"/>
+            <a:ext cx="9144000" cy="582780"/>
           </a:xfrm>
         </p:spPr>
         <p:txBody>
@@ -4324,19 +4544,19 @@
             </a:pPr>
             <a:r>
               <a:rPr/>
-              <a:t>Part 2: Running NMDS</a:t>
+              <a:t>Part 2 · Running NMDS</a:t>
             </a:r>
           </a:p>
         </p:txBody>
       </p:sp>
       <p:sp>
         <p:nvSpPr>
-          <p:cNvPr id="4" name="Text Placeholder 3"/>
+          <p:cNvPr id="3" name="Content Placeholder 2"/>
           <p:cNvSpPr>
             <a:spLocks noGrp="1"/>
           </p:cNvSpPr>
           <p:nvPr>
-            <p:ph idx="2" sz="half" type="body"/>
+            <p:ph idx="1"/>
           </p:nvPr>
         </p:nvSpPr>
         <p:spPr/>
@@ -4352,7 +4572,7 @@
             </a:pPr>
             <a:r>
               <a:rPr b="1"/>
-              <a:t>Step 1: Calculate Distance Matrix</a:t>
+              <a:t>Step 1: Calculate a distance matrix</a:t>
             </a:r>
           </a:p>
           <a:p>
@@ -4361,9 +4581,133 @@
             </a:pPr>
             <a:r>
               <a:rPr>
-                <a:latin typeface="Courier"/>
-              </a:rPr>
-              <a:t>[1] 0.5385165 0.5099020 0.6480741 0.1414214 0.6164414</a:t>
+                <a:solidFill>
+                  <a:srgbClr val="5E5E5E"/>
+                </a:solidFill>
+                <a:latin typeface="Courier"/>
+              </a:rPr>
+              <a:t># For iris data, we'll use Euclidean distance since these are measurements</a:t>
+            </a:r>
+            <a:br/>
+            <a:r>
+              <a:rPr>
+                <a:solidFill>
+                  <a:srgbClr val="5E5E5E"/>
+                </a:solidFill>
+                <a:latin typeface="Courier"/>
+              </a:rPr>
+              <a:t># (Bray-Curtis is more common for real abundance/count data)</a:t>
+            </a:r>
+            <a:br/>
+            <a:r>
+              <a:rPr>
+                <a:solidFill>
+                  <a:srgbClr val="003B4F"/>
+                </a:solidFill>
+                <a:latin typeface="Courier"/>
+              </a:rPr>
+              <a:t>iris_dist &lt;- </a:t>
+            </a:r>
+            <a:r>
+              <a:rPr>
+                <a:solidFill>
+                  <a:srgbClr val="4758AB"/>
+                </a:solidFill>
+                <a:latin typeface="Courier"/>
+              </a:rPr>
+              <a:t>dist</a:t>
+            </a:r>
+            <a:r>
+              <a:rPr>
+                <a:solidFill>
+                  <a:srgbClr val="003B4F"/>
+                </a:solidFill>
+                <a:latin typeface="Courier"/>
+              </a:rPr>
+              <a:t>(iris_numeric_df, </a:t>
+            </a:r>
+            <a:r>
+              <a:rPr>
+                <a:solidFill>
+                  <a:srgbClr val="657422"/>
+                </a:solidFill>
+                <a:latin typeface="Courier"/>
+              </a:rPr>
+              <a:t>method =</a:t>
+            </a:r>
+            <a:r>
+              <a:rPr>
+                <a:solidFill>
+                  <a:srgbClr val="003B4F"/>
+                </a:solidFill>
+                <a:latin typeface="Courier"/>
+              </a:rPr>
+              <a:t> </a:t>
+            </a:r>
+            <a:r>
+              <a:rPr>
+                <a:solidFill>
+                  <a:srgbClr val="20794D"/>
+                </a:solidFill>
+                <a:latin typeface="Courier"/>
+              </a:rPr>
+              <a:t>"euclidean"</a:t>
+            </a:r>
+            <a:r>
+              <a:rPr>
+                <a:solidFill>
+                  <a:srgbClr val="003B4F"/>
+                </a:solidFill>
+                <a:latin typeface="Courier"/>
+              </a:rPr>
+              <a:t>)</a:t>
+            </a:r>
+            <a:br/>
+            <a:br/>
+            <a:r>
+              <a:rPr>
+                <a:solidFill>
+                  <a:srgbClr val="003B4F"/>
+                </a:solidFill>
+                <a:latin typeface="Courier"/>
+              </a:rPr>
+              <a:t>iris_dist[</a:t>
+            </a:r>
+            <a:r>
+              <a:rPr>
+                <a:solidFill>
+                  <a:srgbClr val="AD0000"/>
+                </a:solidFill>
+                <a:latin typeface="Courier"/>
+              </a:rPr>
+              <a:t>1</a:t>
+            </a:r>
+            <a:r>
+              <a:rPr>
+                <a:solidFill>
+                  <a:srgbClr val="5E5E5E"/>
+                </a:solidFill>
+                <a:latin typeface="Courier"/>
+              </a:rPr>
+              <a:t>:</a:t>
+            </a:r>
+            <a:r>
+              <a:rPr>
+                <a:solidFill>
+                  <a:srgbClr val="AD0000"/>
+                </a:solidFill>
+                <a:latin typeface="Courier"/>
+              </a:rPr>
+              <a:t>5</a:t>
+            </a:r>
+            <a:r>
+              <a:rPr>
+                <a:solidFill>
+                  <a:srgbClr val="003B4F"/>
+                </a:solidFill>
+                <a:latin typeface="Courier"/>
+              </a:rPr>
+              <a:t>]</a:t>
             </a:r>
           </a:p>
           <a:p>
@@ -4384,73 +4728,249 @@
             </a:pPr>
             <a:r>
               <a:rPr>
-                <a:latin typeface="Courier"/>
-              </a:rPr>
-              <a:t>Run 0 stress 0.02525035 
-Run 1 stress 0.04045544 
-Run 2 stress 0.03566855 
-Run 3 stress 0.0268287 
-Run 4 stress 0.03695952 
-Run 5 stress 0.03104439 
-Run 6 stress 0.02682881 
-Run 7 stress 0.03962709 
-Run 8 stress 0.03210416 
-Run 9 stress 0.04325555 
-Run 10 stress 0.02525031 
-... New best solution
-... Procrustes: rmse 1.741237e-05  max resid 7.129696e-05 
-... Similar to previous best
-Run 11 stress 0.02525038 
-... Procrustes: rmse 1.217807e-05  max resid 8.876481e-05 
-... Similar to previous best
-Run 12 stress 0.04000578 
-Run 13 stress 0.03552087 
-Run 14 stress 0.0309981 
-Run 15 stress 0.04078306 
-Run 16 stress 0.04008785 
-Run 17 stress 0.03197035 
-Run 18 stress 0.02525033 
-... Procrustes: rmse 5.481604e-06  max resid 2.712782e-05 
-... Similar to previous best
-Run 19 stress 0.02682875 
-Run 20 stress 0.03270101 
-*** Best solution repeated 3 times</a:t>
-            </a:r>
-          </a:p>
-          <a:p>
-            <a:pPr lvl="0" indent="0">
+                <a:solidFill>
+                  <a:srgbClr val="4758AB"/>
+                </a:solidFill>
+                <a:latin typeface="Courier"/>
+              </a:rPr>
+              <a:t>set.seed</a:t>
+            </a:r>
+            <a:r>
+              <a:rPr>
+                <a:solidFill>
+                  <a:srgbClr val="003B4F"/>
+                </a:solidFill>
+                <a:latin typeface="Courier"/>
+              </a:rPr>
+              <a:t>(</a:t>
+            </a:r>
+            <a:r>
+              <a:rPr>
+                <a:solidFill>
+                  <a:srgbClr val="AD0000"/>
+                </a:solidFill>
+                <a:latin typeface="Courier"/>
+              </a:rPr>
+              <a:t>123</a:t>
+            </a:r>
+            <a:r>
+              <a:rPr>
+                <a:solidFill>
+                  <a:srgbClr val="003B4F"/>
+                </a:solidFill>
+                <a:latin typeface="Courier"/>
+              </a:rPr>
+              <a:t>)</a:t>
+            </a:r>
+            <a:br/>
+            <a:r>
+              <a:rPr>
+                <a:solidFill>
+                  <a:srgbClr val="003B4F"/>
+                </a:solidFill>
+                <a:latin typeface="Courier"/>
+              </a:rPr>
+              <a:t>iris_nmds_model &lt;- </a:t>
+            </a:r>
+            <a:r>
+              <a:rPr>
+                <a:solidFill>
+                  <a:srgbClr val="4758AB"/>
+                </a:solidFill>
+                <a:latin typeface="Courier"/>
+              </a:rPr>
+              <a:t>metaMDS</a:t>
+            </a:r>
+            <a:r>
+              <a:rPr>
+                <a:solidFill>
+                  <a:srgbClr val="003B4F"/>
+                </a:solidFill>
+                <a:latin typeface="Courier"/>
+              </a:rPr>
+              <a:t>(iris_numeric_df,</a:t>
+            </a:r>
+            <a:br/>
+            <a:r>
+              <a:rPr>
+                <a:solidFill>
+                  <a:srgbClr val="003B4F"/>
+                </a:solidFill>
+                <a:latin typeface="Courier"/>
+              </a:rPr>
+              <a:t>                           </a:t>
+            </a:r>
+            <a:r>
+              <a:rPr>
+                <a:solidFill>
+                  <a:srgbClr val="657422"/>
+                </a:solidFill>
+                <a:latin typeface="Courier"/>
+              </a:rPr>
+              <a:t>distance =</a:t>
+            </a:r>
+            <a:r>
+              <a:rPr>
+                <a:solidFill>
+                  <a:srgbClr val="003B4F"/>
+                </a:solidFill>
+                <a:latin typeface="Courier"/>
+              </a:rPr>
+              <a:t> </a:t>
+            </a:r>
+            <a:r>
+              <a:rPr>
+                <a:solidFill>
+                  <a:srgbClr val="20794D"/>
+                </a:solidFill>
+                <a:latin typeface="Courier"/>
+              </a:rPr>
+              <a:t>"euclidean"</a:t>
+            </a:r>
+            <a:r>
+              <a:rPr>
+                <a:solidFill>
+                  <a:srgbClr val="003B4F"/>
+                </a:solidFill>
+                <a:latin typeface="Courier"/>
+              </a:rPr>
+              <a:t>,</a:t>
+            </a:r>
+            <a:br/>
+            <a:r>
+              <a:rPr>
+                <a:solidFill>
+                  <a:srgbClr val="003B4F"/>
+                </a:solidFill>
+                <a:latin typeface="Courier"/>
+              </a:rPr>
+              <a:t>                           </a:t>
+            </a:r>
+            <a:r>
+              <a:rPr>
+                <a:solidFill>
+                  <a:srgbClr val="657422"/>
+                </a:solidFill>
+                <a:latin typeface="Courier"/>
+              </a:rPr>
+              <a:t>k =</a:t>
+            </a:r>
+            <a:r>
+              <a:rPr>
+                <a:solidFill>
+                  <a:srgbClr val="003B4F"/>
+                </a:solidFill>
+                <a:latin typeface="Courier"/>
+              </a:rPr>
+              <a:t> </a:t>
+            </a:r>
+            <a:r>
+              <a:rPr>
+                <a:solidFill>
+                  <a:srgbClr val="AD0000"/>
+                </a:solidFill>
+                <a:latin typeface="Courier"/>
+              </a:rPr>
+              <a:t>2</a:t>
+            </a:r>
+            <a:r>
+              <a:rPr>
+                <a:solidFill>
+                  <a:srgbClr val="003B4F"/>
+                </a:solidFill>
+                <a:latin typeface="Courier"/>
+              </a:rPr>
+              <a:t>,</a:t>
+            </a:r>
+            <a:br/>
+            <a:r>
+              <a:rPr>
+                <a:solidFill>
+                  <a:srgbClr val="003B4F"/>
+                </a:solidFill>
+                <a:latin typeface="Courier"/>
+              </a:rPr>
+              <a:t>                           </a:t>
+            </a:r>
+            <a:r>
+              <a:rPr>
+                <a:solidFill>
+                  <a:srgbClr val="657422"/>
+                </a:solidFill>
+                <a:latin typeface="Courier"/>
+              </a:rPr>
+              <a:t>trymax =</a:t>
+            </a:r>
+            <a:r>
+              <a:rPr>
+                <a:solidFill>
+                  <a:srgbClr val="003B4F"/>
+                </a:solidFill>
+                <a:latin typeface="Courier"/>
+              </a:rPr>
+              <a:t> </a:t>
+            </a:r>
+            <a:r>
+              <a:rPr>
+                <a:solidFill>
+                  <a:srgbClr val="AD0000"/>
+                </a:solidFill>
+                <a:latin typeface="Courier"/>
+              </a:rPr>
+              <a:t>100</a:t>
+            </a:r>
+            <a:r>
+              <a:rPr>
+                <a:solidFill>
+                  <a:srgbClr val="003B4F"/>
+                </a:solidFill>
+                <a:latin typeface="Courier"/>
+              </a:rPr>
+              <a:t>)</a:t>
+            </a:r>
+            <a:br/>
+            <a:br/>
+            <a:r>
+              <a:rPr>
+                <a:solidFill>
+                  <a:srgbClr val="003B4F"/>
+                </a:solidFill>
+                <a:latin typeface="Courier"/>
+              </a:rPr>
+              <a:t>iris_nmds_model</a:t>
+            </a:r>
+          </a:p>
+          <a:p>
+            <a:pPr lvl="0" indent="0" marL="0">
               <a:buNone/>
             </a:pPr>
             <a:r>
-              <a:rPr>
-                <a:latin typeface="Courier"/>
-              </a:rPr>
-              <a:t>
-Call:
-metaMDS(comm = iris_numeric_df, distance = "euclidean", k = 2,      trymax = 100) 
-global Multidimensional Scaling using monoMDS
-Data:     iris_numeric_df 
-Distance: euclidean 
-Dimensions: 2 
-Stress:     0.02525031 
-Stress type 1, weak ties
-Best solution was repeated 3 times in 20 tries
-The best solution was from try 10 (random start)
-Scaling: centring, PC rotation 
-Species: expanded scores based on 'iris_numeric_df' </a:t>
-            </a:r>
-          </a:p>
-          <a:p>
-            <a:pPr lvl="0" indent="0" marL="0">
-              <a:buNone/>
-            </a:pPr>
+              <a:rPr/>
+              <a:t>✏️ </a:t>
+            </a:r>
             <a:r>
               <a:rPr b="1"/>
-              <a:t>Interpretation</a:t>
+              <a:t>Your turn:</a:t>
             </a:r>
             <a:r>
               <a:rPr/>
-              <a:t>: - Stress value: 0.025 - This is excellent representation</a:t>
+              <a:t> Fill in from your own output — Stress value: </a:t>
+            </a:r>
+            <a:r>
+              <a:rPr>
+                <a:latin typeface="Courier"/>
+              </a:rPr>
+              <a:t>______</a:t>
+            </a:r>
+            <a:r>
+              <a:rPr/>
+              <a:t>. Is that excellent (&lt;0.1), good (0.1–0.2), or poor (&gt;0.2)? </a:t>
+            </a:r>
+            <a:r>
+              <a:rPr>
+                <a:latin typeface="Courier"/>
+              </a:rPr>
+              <a:t>________________________</a:t>
             </a:r>
           </a:p>
           <a:p>
@@ -4462,7 +4982,7 @@
             </a:pPr>
             <a:r>
               <a:rPr b="1"/>
-              <a:t>Step 3: Extract NMDS Scores</a:t>
+              <a:t>Step 3: Extract NMDS scores</a:t>
             </a:r>
           </a:p>
           <a:p>
@@ -4471,15 +4991,178 @@
             </a:pPr>
             <a:r>
               <a:rPr>
-                <a:latin typeface="Courier"/>
-              </a:rPr>
-              <a:t>      nmds1      nmds2 species
-1 -2.687311  0.2758924  setosa
-2 -2.717262 -0.1705943  setosa
-3 -2.882071 -0.1017541  setosa
-4 -2.746720 -0.2603709  setosa
-5 -2.730486  0.2902002  setosa
-6 -2.311408  0.6625723  setosa</a:t>
+                <a:solidFill>
+                  <a:srgbClr val="003B4F"/>
+                </a:solidFill>
+                <a:latin typeface="Courier"/>
+              </a:rPr>
+              <a:t>nmds_scores_df &lt;- </a:t>
+            </a:r>
+            <a:r>
+              <a:rPr>
+                <a:solidFill>
+                  <a:srgbClr val="4758AB"/>
+                </a:solidFill>
+                <a:latin typeface="Courier"/>
+              </a:rPr>
+              <a:t>as.data.frame</a:t>
+            </a:r>
+            <a:r>
+              <a:rPr>
+                <a:solidFill>
+                  <a:srgbClr val="003B4F"/>
+                </a:solidFill>
+                <a:latin typeface="Courier"/>
+              </a:rPr>
+              <a:t>(iris_nmds_model</a:t>
+            </a:r>
+            <a:r>
+              <a:rPr>
+                <a:solidFill>
+                  <a:srgbClr val="5E5E5E"/>
+                </a:solidFill>
+                <a:latin typeface="Courier"/>
+              </a:rPr>
+              <a:t>$</a:t>
+            </a:r>
+            <a:r>
+              <a:rPr>
+                <a:solidFill>
+                  <a:srgbClr val="003B4F"/>
+                </a:solidFill>
+                <a:latin typeface="Courier"/>
+              </a:rPr>
+              <a:t>points) </a:t>
+            </a:r>
+            <a:r>
+              <a:rPr>
+                <a:solidFill>
+                  <a:srgbClr val="5E5E5E"/>
+                </a:solidFill>
+                <a:latin typeface="Courier"/>
+              </a:rPr>
+              <a:t>%&gt;%</a:t>
+            </a:r>
+            <a:br/>
+            <a:r>
+              <a:rPr>
+                <a:solidFill>
+                  <a:srgbClr val="003B4F"/>
+                </a:solidFill>
+                <a:latin typeface="Courier"/>
+              </a:rPr>
+              <a:t>  </a:t>
+            </a:r>
+            <a:r>
+              <a:rPr>
+                <a:solidFill>
+                  <a:srgbClr val="4758AB"/>
+                </a:solidFill>
+                <a:latin typeface="Courier"/>
+              </a:rPr>
+              <a:t>rename</a:t>
+            </a:r>
+            <a:r>
+              <a:rPr>
+                <a:solidFill>
+                  <a:srgbClr val="003B4F"/>
+                </a:solidFill>
+                <a:latin typeface="Courier"/>
+              </a:rPr>
+              <a:t>(</a:t>
+            </a:r>
+            <a:r>
+              <a:rPr>
+                <a:solidFill>
+                  <a:srgbClr val="657422"/>
+                </a:solidFill>
+                <a:latin typeface="Courier"/>
+              </a:rPr>
+              <a:t>nmds1 =</a:t>
+            </a:r>
+            <a:r>
+              <a:rPr>
+                <a:solidFill>
+                  <a:srgbClr val="003B4F"/>
+                </a:solidFill>
+                <a:latin typeface="Courier"/>
+              </a:rPr>
+              <a:t> MDS1, </a:t>
+            </a:r>
+            <a:r>
+              <a:rPr>
+                <a:solidFill>
+                  <a:srgbClr val="657422"/>
+                </a:solidFill>
+                <a:latin typeface="Courier"/>
+              </a:rPr>
+              <a:t>nmds2 =</a:t>
+            </a:r>
+            <a:r>
+              <a:rPr>
+                <a:solidFill>
+                  <a:srgbClr val="003B4F"/>
+                </a:solidFill>
+                <a:latin typeface="Courier"/>
+              </a:rPr>
+              <a:t> MDS2) </a:t>
+            </a:r>
+            <a:r>
+              <a:rPr>
+                <a:solidFill>
+                  <a:srgbClr val="5E5E5E"/>
+                </a:solidFill>
+                <a:latin typeface="Courier"/>
+              </a:rPr>
+              <a:t>%&gt;%</a:t>
+            </a:r>
+            <a:br/>
+            <a:r>
+              <a:rPr>
+                <a:solidFill>
+                  <a:srgbClr val="003B4F"/>
+                </a:solidFill>
+                <a:latin typeface="Courier"/>
+              </a:rPr>
+              <a:t>  </a:t>
+            </a:r>
+            <a:r>
+              <a:rPr>
+                <a:solidFill>
+                  <a:srgbClr val="4758AB"/>
+                </a:solidFill>
+                <a:latin typeface="Courier"/>
+              </a:rPr>
+              <a:t>bind_cols</a:t>
+            </a:r>
+            <a:r>
+              <a:rPr>
+                <a:solidFill>
+                  <a:srgbClr val="003B4F"/>
+                </a:solidFill>
+                <a:latin typeface="Courier"/>
+              </a:rPr>
+              <a:t>(iris_species_df)</a:t>
+            </a:r>
+            <a:br/>
+            <a:br/>
+            <a:r>
+              <a:rPr>
+                <a:solidFill>
+                  <a:srgbClr val="4758AB"/>
+                </a:solidFill>
+                <a:latin typeface="Courier"/>
+              </a:rPr>
+              <a:t>head</a:t>
+            </a:r>
+            <a:r>
+              <a:rPr>
+                <a:solidFill>
+                  <a:srgbClr val="003B4F"/>
+                </a:solidFill>
+                <a:latin typeface="Courier"/>
+              </a:rPr>
+              <a:t>(nmds_scores_df)</a:t>
             </a:r>
           </a:p>
           <a:p>
@@ -4491,41 +5174,1406 @@
             </a:pPr>
             <a:r>
               <a:rPr b="1"/>
-              <a:t>Step 4: Create NMDS Plot</a:t>
+              <a:t>Step 4: Create an NMDS plot</a:t>
+            </a:r>
+          </a:p>
+          <a:p>
+            <a:pPr lvl="0" indent="0">
+              <a:buNone/>
+            </a:pPr>
+            <a:r>
+              <a:rPr>
+                <a:solidFill>
+                  <a:srgbClr val="003B4F"/>
+                </a:solidFill>
+                <a:latin typeface="Courier"/>
+              </a:rPr>
+              <a:t>nmds_basic_plot &lt;- </a:t>
+            </a:r>
+            <a:r>
+              <a:rPr>
+                <a:solidFill>
+                  <a:srgbClr val="4758AB"/>
+                </a:solidFill>
+                <a:latin typeface="Courier"/>
+              </a:rPr>
+              <a:t>ggplot</a:t>
+            </a:r>
+            <a:r>
+              <a:rPr>
+                <a:solidFill>
+                  <a:srgbClr val="003B4F"/>
+                </a:solidFill>
+                <a:latin typeface="Courier"/>
+              </a:rPr>
+              <a:t>(nmds_scores_df, </a:t>
+            </a:r>
+            <a:r>
+              <a:rPr>
+                <a:solidFill>
+                  <a:srgbClr val="4758AB"/>
+                </a:solidFill>
+                <a:latin typeface="Courier"/>
+              </a:rPr>
+              <a:t>aes</a:t>
+            </a:r>
+            <a:r>
+              <a:rPr>
+                <a:solidFill>
+                  <a:srgbClr val="003B4F"/>
+                </a:solidFill>
+                <a:latin typeface="Courier"/>
+              </a:rPr>
+              <a:t>(</a:t>
+            </a:r>
+            <a:r>
+              <a:rPr>
+                <a:solidFill>
+                  <a:srgbClr val="657422"/>
+                </a:solidFill>
+                <a:latin typeface="Courier"/>
+              </a:rPr>
+              <a:t>x =</a:t>
+            </a:r>
+            <a:r>
+              <a:rPr>
+                <a:solidFill>
+                  <a:srgbClr val="003B4F"/>
+                </a:solidFill>
+                <a:latin typeface="Courier"/>
+              </a:rPr>
+              <a:t> nmds1, </a:t>
+            </a:r>
+            <a:r>
+              <a:rPr>
+                <a:solidFill>
+                  <a:srgbClr val="657422"/>
+                </a:solidFill>
+                <a:latin typeface="Courier"/>
+              </a:rPr>
+              <a:t>y =</a:t>
+            </a:r>
+            <a:r>
+              <a:rPr>
+                <a:solidFill>
+                  <a:srgbClr val="003B4F"/>
+                </a:solidFill>
+                <a:latin typeface="Courier"/>
+              </a:rPr>
+              <a:t> nmds2, </a:t>
+            </a:r>
+            <a:r>
+              <a:rPr>
+                <a:solidFill>
+                  <a:srgbClr val="657422"/>
+                </a:solidFill>
+                <a:latin typeface="Courier"/>
+              </a:rPr>
+              <a:t>color =</a:t>
+            </a:r>
+            <a:r>
+              <a:rPr>
+                <a:solidFill>
+                  <a:srgbClr val="003B4F"/>
+                </a:solidFill>
+                <a:latin typeface="Courier"/>
+              </a:rPr>
+              <a:t> species)) </a:t>
+            </a:r>
+            <a:r>
+              <a:rPr>
+                <a:solidFill>
+                  <a:srgbClr val="5E5E5E"/>
+                </a:solidFill>
+                <a:latin typeface="Courier"/>
+              </a:rPr>
+              <a:t>+</a:t>
+            </a:r>
+            <a:br/>
+            <a:r>
+              <a:rPr>
+                <a:solidFill>
+                  <a:srgbClr val="003B4F"/>
+                </a:solidFill>
+                <a:latin typeface="Courier"/>
+              </a:rPr>
+              <a:t>  </a:t>
+            </a:r>
+            <a:r>
+              <a:rPr>
+                <a:solidFill>
+                  <a:srgbClr val="4758AB"/>
+                </a:solidFill>
+                <a:latin typeface="Courier"/>
+              </a:rPr>
+              <a:t>geom_point</a:t>
+            </a:r>
+            <a:r>
+              <a:rPr>
+                <a:solidFill>
+                  <a:srgbClr val="003B4F"/>
+                </a:solidFill>
+                <a:latin typeface="Courier"/>
+              </a:rPr>
+              <a:t>(</a:t>
+            </a:r>
+            <a:r>
+              <a:rPr>
+                <a:solidFill>
+                  <a:srgbClr val="657422"/>
+                </a:solidFill>
+                <a:latin typeface="Courier"/>
+              </a:rPr>
+              <a:t>size =</a:t>
+            </a:r>
+            <a:r>
+              <a:rPr>
+                <a:solidFill>
+                  <a:srgbClr val="003B4F"/>
+                </a:solidFill>
+                <a:latin typeface="Courier"/>
+              </a:rPr>
+              <a:t> </a:t>
+            </a:r>
+            <a:r>
+              <a:rPr>
+                <a:solidFill>
+                  <a:srgbClr val="AD0000"/>
+                </a:solidFill>
+                <a:latin typeface="Courier"/>
+              </a:rPr>
+              <a:t>3</a:t>
+            </a:r>
+            <a:r>
+              <a:rPr>
+                <a:solidFill>
+                  <a:srgbClr val="003B4F"/>
+                </a:solidFill>
+                <a:latin typeface="Courier"/>
+              </a:rPr>
+              <a:t>, </a:t>
+            </a:r>
+            <a:r>
+              <a:rPr>
+                <a:solidFill>
+                  <a:srgbClr val="657422"/>
+                </a:solidFill>
+                <a:latin typeface="Courier"/>
+              </a:rPr>
+              <a:t>alpha =</a:t>
+            </a:r>
+            <a:r>
+              <a:rPr>
+                <a:solidFill>
+                  <a:srgbClr val="003B4F"/>
+                </a:solidFill>
+                <a:latin typeface="Courier"/>
+              </a:rPr>
+              <a:t> </a:t>
+            </a:r>
+            <a:r>
+              <a:rPr>
+                <a:solidFill>
+                  <a:srgbClr val="AD0000"/>
+                </a:solidFill>
+                <a:latin typeface="Courier"/>
+              </a:rPr>
+              <a:t>0.8</a:t>
+            </a:r>
+            <a:r>
+              <a:rPr>
+                <a:solidFill>
+                  <a:srgbClr val="003B4F"/>
+                </a:solidFill>
+                <a:latin typeface="Courier"/>
+              </a:rPr>
+              <a:t>) </a:t>
+            </a:r>
+            <a:r>
+              <a:rPr>
+                <a:solidFill>
+                  <a:srgbClr val="5E5E5E"/>
+                </a:solidFill>
+                <a:latin typeface="Courier"/>
+              </a:rPr>
+              <a:t>+</a:t>
+            </a:r>
+            <a:br/>
+            <a:r>
+              <a:rPr>
+                <a:solidFill>
+                  <a:srgbClr val="003B4F"/>
+                </a:solidFill>
+                <a:latin typeface="Courier"/>
+              </a:rPr>
+              <a:t>  </a:t>
+            </a:r>
+            <a:r>
+              <a:rPr>
+                <a:solidFill>
+                  <a:srgbClr val="4758AB"/>
+                </a:solidFill>
+                <a:latin typeface="Courier"/>
+              </a:rPr>
+              <a:t>labs</a:t>
+            </a:r>
+            <a:r>
+              <a:rPr>
+                <a:solidFill>
+                  <a:srgbClr val="003B4F"/>
+                </a:solidFill>
+                <a:latin typeface="Courier"/>
+              </a:rPr>
+              <a:t>(</a:t>
+            </a:r>
+            <a:r>
+              <a:rPr>
+                <a:solidFill>
+                  <a:srgbClr val="657422"/>
+                </a:solidFill>
+                <a:latin typeface="Courier"/>
+              </a:rPr>
+              <a:t>title =</a:t>
+            </a:r>
+            <a:r>
+              <a:rPr>
+                <a:solidFill>
+                  <a:srgbClr val="003B4F"/>
+                </a:solidFill>
+                <a:latin typeface="Courier"/>
+              </a:rPr>
+              <a:t> </a:t>
+            </a:r>
+            <a:r>
+              <a:rPr>
+                <a:solidFill>
+                  <a:srgbClr val="20794D"/>
+                </a:solidFill>
+                <a:latin typeface="Courier"/>
+              </a:rPr>
+              <a:t>"NMDS Ordination of Iris Data"</a:t>
+            </a:r>
+            <a:r>
+              <a:rPr>
+                <a:solidFill>
+                  <a:srgbClr val="003B4F"/>
+                </a:solidFill>
+                <a:latin typeface="Courier"/>
+              </a:rPr>
+              <a:t>,</a:t>
+            </a:r>
+            <a:br/>
+            <a:r>
+              <a:rPr>
+                <a:solidFill>
+                  <a:srgbClr val="003B4F"/>
+                </a:solidFill>
+                <a:latin typeface="Courier"/>
+              </a:rPr>
+              <a:t>       </a:t>
+            </a:r>
+            <a:r>
+              <a:rPr>
+                <a:solidFill>
+                  <a:srgbClr val="657422"/>
+                </a:solidFill>
+                <a:latin typeface="Courier"/>
+              </a:rPr>
+              <a:t>subtitle =</a:t>
+            </a:r>
+            <a:r>
+              <a:rPr>
+                <a:solidFill>
+                  <a:srgbClr val="003B4F"/>
+                </a:solidFill>
+                <a:latin typeface="Courier"/>
+              </a:rPr>
+              <a:t> </a:t>
+            </a:r>
+            <a:r>
+              <a:rPr>
+                <a:solidFill>
+                  <a:srgbClr val="4758AB"/>
+                </a:solidFill>
+                <a:latin typeface="Courier"/>
+              </a:rPr>
+              <a:t>paste</a:t>
+            </a:r>
+            <a:r>
+              <a:rPr>
+                <a:solidFill>
+                  <a:srgbClr val="003B4F"/>
+                </a:solidFill>
+                <a:latin typeface="Courier"/>
+              </a:rPr>
+              <a:t>(</a:t>
+            </a:r>
+            <a:r>
+              <a:rPr>
+                <a:solidFill>
+                  <a:srgbClr val="20794D"/>
+                </a:solidFill>
+                <a:latin typeface="Courier"/>
+              </a:rPr>
+              <a:t>"Stress ="</a:t>
+            </a:r>
+            <a:r>
+              <a:rPr>
+                <a:solidFill>
+                  <a:srgbClr val="003B4F"/>
+                </a:solidFill>
+                <a:latin typeface="Courier"/>
+              </a:rPr>
+              <a:t>, </a:t>
+            </a:r>
+            <a:r>
+              <a:rPr>
+                <a:solidFill>
+                  <a:srgbClr val="4758AB"/>
+                </a:solidFill>
+                <a:latin typeface="Courier"/>
+              </a:rPr>
+              <a:t>round</a:t>
+            </a:r>
+            <a:r>
+              <a:rPr>
+                <a:solidFill>
+                  <a:srgbClr val="003B4F"/>
+                </a:solidFill>
+                <a:latin typeface="Courier"/>
+              </a:rPr>
+              <a:t>(iris_nmds_model</a:t>
+            </a:r>
+            <a:r>
+              <a:rPr>
+                <a:solidFill>
+                  <a:srgbClr val="5E5E5E"/>
+                </a:solidFill>
+                <a:latin typeface="Courier"/>
+              </a:rPr>
+              <a:t>$</a:t>
+            </a:r>
+            <a:r>
+              <a:rPr>
+                <a:solidFill>
+                  <a:srgbClr val="003B4F"/>
+                </a:solidFill>
+                <a:latin typeface="Courier"/>
+              </a:rPr>
+              <a:t>stress, </a:t>
+            </a:r>
+            <a:r>
+              <a:rPr>
+                <a:solidFill>
+                  <a:srgbClr val="AD0000"/>
+                </a:solidFill>
+                <a:latin typeface="Courier"/>
+              </a:rPr>
+              <a:t>3</a:t>
+            </a:r>
+            <a:r>
+              <a:rPr>
+                <a:solidFill>
+                  <a:srgbClr val="003B4F"/>
+                </a:solidFill>
+                <a:latin typeface="Courier"/>
+              </a:rPr>
+              <a:t>)),</a:t>
+            </a:r>
+            <a:br/>
+            <a:r>
+              <a:rPr>
+                <a:solidFill>
+                  <a:srgbClr val="003B4F"/>
+                </a:solidFill>
+                <a:latin typeface="Courier"/>
+              </a:rPr>
+              <a:t>       </a:t>
+            </a:r>
+            <a:r>
+              <a:rPr>
+                <a:solidFill>
+                  <a:srgbClr val="657422"/>
+                </a:solidFill>
+                <a:latin typeface="Courier"/>
+              </a:rPr>
+              <a:t>x =</a:t>
+            </a:r>
+            <a:r>
+              <a:rPr>
+                <a:solidFill>
+                  <a:srgbClr val="003B4F"/>
+                </a:solidFill>
+                <a:latin typeface="Courier"/>
+              </a:rPr>
+              <a:t> </a:t>
+            </a:r>
+            <a:r>
+              <a:rPr>
+                <a:solidFill>
+                  <a:srgbClr val="20794D"/>
+                </a:solidFill>
+                <a:latin typeface="Courier"/>
+              </a:rPr>
+              <a:t>"NMDS1"</a:t>
+            </a:r>
+            <a:r>
+              <a:rPr>
+                <a:solidFill>
+                  <a:srgbClr val="003B4F"/>
+                </a:solidFill>
+                <a:latin typeface="Courier"/>
+              </a:rPr>
+              <a:t>,</a:t>
+            </a:r>
+            <a:br/>
+            <a:r>
+              <a:rPr>
+                <a:solidFill>
+                  <a:srgbClr val="003B4F"/>
+                </a:solidFill>
+                <a:latin typeface="Courier"/>
+              </a:rPr>
+              <a:t>       </a:t>
+            </a:r>
+            <a:r>
+              <a:rPr>
+                <a:solidFill>
+                  <a:srgbClr val="657422"/>
+                </a:solidFill>
+                <a:latin typeface="Courier"/>
+              </a:rPr>
+              <a:t>y =</a:t>
+            </a:r>
+            <a:r>
+              <a:rPr>
+                <a:solidFill>
+                  <a:srgbClr val="003B4F"/>
+                </a:solidFill>
+                <a:latin typeface="Courier"/>
+              </a:rPr>
+              <a:t> </a:t>
+            </a:r>
+            <a:r>
+              <a:rPr>
+                <a:solidFill>
+                  <a:srgbClr val="20794D"/>
+                </a:solidFill>
+                <a:latin typeface="Courier"/>
+              </a:rPr>
+              <a:t>"NMDS2"</a:t>
+            </a:r>
+            <a:r>
+              <a:rPr>
+                <a:solidFill>
+                  <a:srgbClr val="003B4F"/>
+                </a:solidFill>
+                <a:latin typeface="Courier"/>
+              </a:rPr>
+              <a:t>,</a:t>
+            </a:r>
+            <a:br/>
+            <a:r>
+              <a:rPr>
+                <a:solidFill>
+                  <a:srgbClr val="003B4F"/>
+                </a:solidFill>
+                <a:latin typeface="Courier"/>
+              </a:rPr>
+              <a:t>       </a:t>
+            </a:r>
+            <a:r>
+              <a:rPr>
+                <a:solidFill>
+                  <a:srgbClr val="657422"/>
+                </a:solidFill>
+                <a:latin typeface="Courier"/>
+              </a:rPr>
+              <a:t>color =</a:t>
+            </a:r>
+            <a:r>
+              <a:rPr>
+                <a:solidFill>
+                  <a:srgbClr val="003B4F"/>
+                </a:solidFill>
+                <a:latin typeface="Courier"/>
+              </a:rPr>
+              <a:t> </a:t>
+            </a:r>
+            <a:r>
+              <a:rPr>
+                <a:solidFill>
+                  <a:srgbClr val="20794D"/>
+                </a:solidFill>
+                <a:latin typeface="Courier"/>
+              </a:rPr>
+              <a:t>"Species"</a:t>
+            </a:r>
+            <a:r>
+              <a:rPr>
+                <a:solidFill>
+                  <a:srgbClr val="003B4F"/>
+                </a:solidFill>
+                <a:latin typeface="Courier"/>
+              </a:rPr>
+              <a:t>) </a:t>
+            </a:r>
+            <a:r>
+              <a:rPr>
+                <a:solidFill>
+                  <a:srgbClr val="5E5E5E"/>
+                </a:solidFill>
+                <a:latin typeface="Courier"/>
+              </a:rPr>
+              <a:t>+</a:t>
+            </a:r>
+            <a:br/>
+            <a:r>
+              <a:rPr>
+                <a:solidFill>
+                  <a:srgbClr val="003B4F"/>
+                </a:solidFill>
+                <a:latin typeface="Courier"/>
+              </a:rPr>
+              <a:t>  </a:t>
+            </a:r>
+            <a:r>
+              <a:rPr>
+                <a:solidFill>
+                  <a:srgbClr val="4758AB"/>
+                </a:solidFill>
+                <a:latin typeface="Courier"/>
+              </a:rPr>
+              <a:t>theme_minimal</a:t>
+            </a:r>
+            <a:r>
+              <a:rPr>
+                <a:solidFill>
+                  <a:srgbClr val="003B4F"/>
+                </a:solidFill>
+                <a:latin typeface="Courier"/>
+              </a:rPr>
+              <a:t>()</a:t>
+            </a:r>
+            <a:br/>
+            <a:br/>
+            <a:r>
+              <a:rPr>
+                <a:solidFill>
+                  <a:srgbClr val="003B4F"/>
+                </a:solidFill>
+                <a:latin typeface="Courier"/>
+              </a:rPr>
+              <a:t>nmds_basic_plot</a:t>
+            </a:r>
+          </a:p>
+          <a:p>
+            <a:pPr lvl="0" indent="0" marL="0">
+              <a:spcBef>
+                <a:spcPts val="3000"/>
+              </a:spcBef>
+              <a:buNone/>
+            </a:pPr>
+            <a:r>
+              <a:rPr b="1"/>
+              <a:t>Step 5: Add confidence ellipses</a:t>
+            </a:r>
+          </a:p>
+          <a:p>
+            <a:pPr lvl="0" indent="0">
+              <a:buNone/>
+            </a:pPr>
+            <a:r>
+              <a:rPr>
+                <a:solidFill>
+                  <a:srgbClr val="003B4F"/>
+                </a:solidFill>
+                <a:latin typeface="Courier"/>
+              </a:rPr>
+              <a:t>nmds_ellipse_plot &lt;- </a:t>
+            </a:r>
+            <a:r>
+              <a:rPr>
+                <a:solidFill>
+                  <a:srgbClr val="4758AB"/>
+                </a:solidFill>
+                <a:latin typeface="Courier"/>
+              </a:rPr>
+              <a:t>ggplot</a:t>
+            </a:r>
+            <a:r>
+              <a:rPr>
+                <a:solidFill>
+                  <a:srgbClr val="003B4F"/>
+                </a:solidFill>
+                <a:latin typeface="Courier"/>
+              </a:rPr>
+              <a:t>(nmds_scores_df, </a:t>
+            </a:r>
+            <a:r>
+              <a:rPr>
+                <a:solidFill>
+                  <a:srgbClr val="4758AB"/>
+                </a:solidFill>
+                <a:latin typeface="Courier"/>
+              </a:rPr>
+              <a:t>aes</a:t>
+            </a:r>
+            <a:r>
+              <a:rPr>
+                <a:solidFill>
+                  <a:srgbClr val="003B4F"/>
+                </a:solidFill>
+                <a:latin typeface="Courier"/>
+              </a:rPr>
+              <a:t>(</a:t>
+            </a:r>
+            <a:r>
+              <a:rPr>
+                <a:solidFill>
+                  <a:srgbClr val="657422"/>
+                </a:solidFill>
+                <a:latin typeface="Courier"/>
+              </a:rPr>
+              <a:t>x =</a:t>
+            </a:r>
+            <a:r>
+              <a:rPr>
+                <a:solidFill>
+                  <a:srgbClr val="003B4F"/>
+                </a:solidFill>
+                <a:latin typeface="Courier"/>
+              </a:rPr>
+              <a:t> nmds1, </a:t>
+            </a:r>
+            <a:r>
+              <a:rPr>
+                <a:solidFill>
+                  <a:srgbClr val="657422"/>
+                </a:solidFill>
+                <a:latin typeface="Courier"/>
+              </a:rPr>
+              <a:t>y =</a:t>
+            </a:r>
+            <a:r>
+              <a:rPr>
+                <a:solidFill>
+                  <a:srgbClr val="003B4F"/>
+                </a:solidFill>
+                <a:latin typeface="Courier"/>
+              </a:rPr>
+              <a:t> nmds2, </a:t>
+            </a:r>
+            <a:r>
+              <a:rPr>
+                <a:solidFill>
+                  <a:srgbClr val="657422"/>
+                </a:solidFill>
+                <a:latin typeface="Courier"/>
+              </a:rPr>
+              <a:t>color =</a:t>
+            </a:r>
+            <a:r>
+              <a:rPr>
+                <a:solidFill>
+                  <a:srgbClr val="003B4F"/>
+                </a:solidFill>
+                <a:latin typeface="Courier"/>
+              </a:rPr>
+              <a:t> species)) </a:t>
+            </a:r>
+            <a:r>
+              <a:rPr>
+                <a:solidFill>
+                  <a:srgbClr val="5E5E5E"/>
+                </a:solidFill>
+                <a:latin typeface="Courier"/>
+              </a:rPr>
+              <a:t>+</a:t>
+            </a:r>
+            <a:br/>
+            <a:r>
+              <a:rPr>
+                <a:solidFill>
+                  <a:srgbClr val="003B4F"/>
+                </a:solidFill>
+                <a:latin typeface="Courier"/>
+              </a:rPr>
+              <a:t>  </a:t>
+            </a:r>
+            <a:r>
+              <a:rPr>
+                <a:solidFill>
+                  <a:srgbClr val="4758AB"/>
+                </a:solidFill>
+                <a:latin typeface="Courier"/>
+              </a:rPr>
+              <a:t>geom_point</a:t>
+            </a:r>
+            <a:r>
+              <a:rPr>
+                <a:solidFill>
+                  <a:srgbClr val="003B4F"/>
+                </a:solidFill>
+                <a:latin typeface="Courier"/>
+              </a:rPr>
+              <a:t>(</a:t>
+            </a:r>
+            <a:r>
+              <a:rPr>
+                <a:solidFill>
+                  <a:srgbClr val="657422"/>
+                </a:solidFill>
+                <a:latin typeface="Courier"/>
+              </a:rPr>
+              <a:t>size =</a:t>
+            </a:r>
+            <a:r>
+              <a:rPr>
+                <a:solidFill>
+                  <a:srgbClr val="003B4F"/>
+                </a:solidFill>
+                <a:latin typeface="Courier"/>
+              </a:rPr>
+              <a:t> </a:t>
+            </a:r>
+            <a:r>
+              <a:rPr>
+                <a:solidFill>
+                  <a:srgbClr val="AD0000"/>
+                </a:solidFill>
+                <a:latin typeface="Courier"/>
+              </a:rPr>
+              <a:t>3</a:t>
+            </a:r>
+            <a:r>
+              <a:rPr>
+                <a:solidFill>
+                  <a:srgbClr val="003B4F"/>
+                </a:solidFill>
+                <a:latin typeface="Courier"/>
+              </a:rPr>
+              <a:t>, </a:t>
+            </a:r>
+            <a:r>
+              <a:rPr>
+                <a:solidFill>
+                  <a:srgbClr val="657422"/>
+                </a:solidFill>
+                <a:latin typeface="Courier"/>
+              </a:rPr>
+              <a:t>alpha =</a:t>
+            </a:r>
+            <a:r>
+              <a:rPr>
+                <a:solidFill>
+                  <a:srgbClr val="003B4F"/>
+                </a:solidFill>
+                <a:latin typeface="Courier"/>
+              </a:rPr>
+              <a:t> </a:t>
+            </a:r>
+            <a:r>
+              <a:rPr>
+                <a:solidFill>
+                  <a:srgbClr val="AD0000"/>
+                </a:solidFill>
+                <a:latin typeface="Courier"/>
+              </a:rPr>
+              <a:t>0.8</a:t>
+            </a:r>
+            <a:r>
+              <a:rPr>
+                <a:solidFill>
+                  <a:srgbClr val="003B4F"/>
+                </a:solidFill>
+                <a:latin typeface="Courier"/>
+              </a:rPr>
+              <a:t>) </a:t>
+            </a:r>
+            <a:r>
+              <a:rPr>
+                <a:solidFill>
+                  <a:srgbClr val="5E5E5E"/>
+                </a:solidFill>
+                <a:latin typeface="Courier"/>
+              </a:rPr>
+              <a:t>+</a:t>
+            </a:r>
+            <a:br/>
+            <a:r>
+              <a:rPr>
+                <a:solidFill>
+                  <a:srgbClr val="003B4F"/>
+                </a:solidFill>
+                <a:latin typeface="Courier"/>
+              </a:rPr>
+              <a:t>  </a:t>
+            </a:r>
+            <a:r>
+              <a:rPr>
+                <a:solidFill>
+                  <a:srgbClr val="4758AB"/>
+                </a:solidFill>
+                <a:latin typeface="Courier"/>
+              </a:rPr>
+              <a:t>stat_ellipse</a:t>
+            </a:r>
+            <a:r>
+              <a:rPr>
+                <a:solidFill>
+                  <a:srgbClr val="003B4F"/>
+                </a:solidFill>
+                <a:latin typeface="Courier"/>
+              </a:rPr>
+              <a:t>(</a:t>
+            </a:r>
+            <a:r>
+              <a:rPr>
+                <a:solidFill>
+                  <a:srgbClr val="657422"/>
+                </a:solidFill>
+                <a:latin typeface="Courier"/>
+              </a:rPr>
+              <a:t>level =</a:t>
+            </a:r>
+            <a:r>
+              <a:rPr>
+                <a:solidFill>
+                  <a:srgbClr val="003B4F"/>
+                </a:solidFill>
+                <a:latin typeface="Courier"/>
+              </a:rPr>
+              <a:t> </a:t>
+            </a:r>
+            <a:r>
+              <a:rPr>
+                <a:solidFill>
+                  <a:srgbClr val="AD0000"/>
+                </a:solidFill>
+                <a:latin typeface="Courier"/>
+              </a:rPr>
+              <a:t>0.95</a:t>
+            </a:r>
+            <a:r>
+              <a:rPr>
+                <a:solidFill>
+                  <a:srgbClr val="003B4F"/>
+                </a:solidFill>
+                <a:latin typeface="Courier"/>
+              </a:rPr>
+              <a:t>, </a:t>
+            </a:r>
+            <a:r>
+              <a:rPr>
+                <a:solidFill>
+                  <a:srgbClr val="657422"/>
+                </a:solidFill>
+                <a:latin typeface="Courier"/>
+              </a:rPr>
+              <a:t>linewidth =</a:t>
+            </a:r>
+            <a:r>
+              <a:rPr>
+                <a:solidFill>
+                  <a:srgbClr val="003B4F"/>
+                </a:solidFill>
+                <a:latin typeface="Courier"/>
+              </a:rPr>
+              <a:t> </a:t>
+            </a:r>
+            <a:r>
+              <a:rPr>
+                <a:solidFill>
+                  <a:srgbClr val="AD0000"/>
+                </a:solidFill>
+                <a:latin typeface="Courier"/>
+              </a:rPr>
+              <a:t>1</a:t>
+            </a:r>
+            <a:r>
+              <a:rPr>
+                <a:solidFill>
+                  <a:srgbClr val="003B4F"/>
+                </a:solidFill>
+                <a:latin typeface="Courier"/>
+              </a:rPr>
+              <a:t>) </a:t>
+            </a:r>
+            <a:r>
+              <a:rPr>
+                <a:solidFill>
+                  <a:srgbClr val="5E5E5E"/>
+                </a:solidFill>
+                <a:latin typeface="Courier"/>
+              </a:rPr>
+              <a:t>+</a:t>
+            </a:r>
+            <a:br/>
+            <a:r>
+              <a:rPr>
+                <a:solidFill>
+                  <a:srgbClr val="003B4F"/>
+                </a:solidFill>
+                <a:latin typeface="Courier"/>
+              </a:rPr>
+              <a:t>  </a:t>
+            </a:r>
+            <a:r>
+              <a:rPr>
+                <a:solidFill>
+                  <a:srgbClr val="4758AB"/>
+                </a:solidFill>
+                <a:latin typeface="Courier"/>
+              </a:rPr>
+              <a:t>labs</a:t>
+            </a:r>
+            <a:r>
+              <a:rPr>
+                <a:solidFill>
+                  <a:srgbClr val="003B4F"/>
+                </a:solidFill>
+                <a:latin typeface="Courier"/>
+              </a:rPr>
+              <a:t>(</a:t>
+            </a:r>
+            <a:r>
+              <a:rPr>
+                <a:solidFill>
+                  <a:srgbClr val="657422"/>
+                </a:solidFill>
+                <a:latin typeface="Courier"/>
+              </a:rPr>
+              <a:t>title =</a:t>
+            </a:r>
+            <a:r>
+              <a:rPr>
+                <a:solidFill>
+                  <a:srgbClr val="003B4F"/>
+                </a:solidFill>
+                <a:latin typeface="Courier"/>
+              </a:rPr>
+              <a:t> </a:t>
+            </a:r>
+            <a:r>
+              <a:rPr>
+                <a:solidFill>
+                  <a:srgbClr val="20794D"/>
+                </a:solidFill>
+                <a:latin typeface="Courier"/>
+              </a:rPr>
+              <a:t>"NMDS Ordination with 95% Confidence Ellipses"</a:t>
+            </a:r>
+            <a:r>
+              <a:rPr>
+                <a:solidFill>
+                  <a:srgbClr val="003B4F"/>
+                </a:solidFill>
+                <a:latin typeface="Courier"/>
+              </a:rPr>
+              <a:t>,</a:t>
+            </a:r>
+            <a:br/>
+            <a:r>
+              <a:rPr>
+                <a:solidFill>
+                  <a:srgbClr val="003B4F"/>
+                </a:solidFill>
+                <a:latin typeface="Courier"/>
+              </a:rPr>
+              <a:t>       </a:t>
+            </a:r>
+            <a:r>
+              <a:rPr>
+                <a:solidFill>
+                  <a:srgbClr val="657422"/>
+                </a:solidFill>
+                <a:latin typeface="Courier"/>
+              </a:rPr>
+              <a:t>subtitle =</a:t>
+            </a:r>
+            <a:r>
+              <a:rPr>
+                <a:solidFill>
+                  <a:srgbClr val="003B4F"/>
+                </a:solidFill>
+                <a:latin typeface="Courier"/>
+              </a:rPr>
+              <a:t> </a:t>
+            </a:r>
+            <a:r>
+              <a:rPr>
+                <a:solidFill>
+                  <a:srgbClr val="4758AB"/>
+                </a:solidFill>
+                <a:latin typeface="Courier"/>
+              </a:rPr>
+              <a:t>paste</a:t>
+            </a:r>
+            <a:r>
+              <a:rPr>
+                <a:solidFill>
+                  <a:srgbClr val="003B4F"/>
+                </a:solidFill>
+                <a:latin typeface="Courier"/>
+              </a:rPr>
+              <a:t>(</a:t>
+            </a:r>
+            <a:r>
+              <a:rPr>
+                <a:solidFill>
+                  <a:srgbClr val="20794D"/>
+                </a:solidFill>
+                <a:latin typeface="Courier"/>
+              </a:rPr>
+              <a:t>"Stress ="</a:t>
+            </a:r>
+            <a:r>
+              <a:rPr>
+                <a:solidFill>
+                  <a:srgbClr val="003B4F"/>
+                </a:solidFill>
+                <a:latin typeface="Courier"/>
+              </a:rPr>
+              <a:t>, </a:t>
+            </a:r>
+            <a:r>
+              <a:rPr>
+                <a:solidFill>
+                  <a:srgbClr val="4758AB"/>
+                </a:solidFill>
+                <a:latin typeface="Courier"/>
+              </a:rPr>
+              <a:t>round</a:t>
+            </a:r>
+            <a:r>
+              <a:rPr>
+                <a:solidFill>
+                  <a:srgbClr val="003B4F"/>
+                </a:solidFill>
+                <a:latin typeface="Courier"/>
+              </a:rPr>
+              <a:t>(iris_nmds_model</a:t>
+            </a:r>
+            <a:r>
+              <a:rPr>
+                <a:solidFill>
+                  <a:srgbClr val="5E5E5E"/>
+                </a:solidFill>
+                <a:latin typeface="Courier"/>
+              </a:rPr>
+              <a:t>$</a:t>
+            </a:r>
+            <a:r>
+              <a:rPr>
+                <a:solidFill>
+                  <a:srgbClr val="003B4F"/>
+                </a:solidFill>
+                <a:latin typeface="Courier"/>
+              </a:rPr>
+              <a:t>stress, </a:t>
+            </a:r>
+            <a:r>
+              <a:rPr>
+                <a:solidFill>
+                  <a:srgbClr val="AD0000"/>
+                </a:solidFill>
+                <a:latin typeface="Courier"/>
+              </a:rPr>
+              <a:t>3</a:t>
+            </a:r>
+            <a:r>
+              <a:rPr>
+                <a:solidFill>
+                  <a:srgbClr val="003B4F"/>
+                </a:solidFill>
+                <a:latin typeface="Courier"/>
+              </a:rPr>
+              <a:t>)),</a:t>
+            </a:r>
+            <a:br/>
+            <a:r>
+              <a:rPr>
+                <a:solidFill>
+                  <a:srgbClr val="003B4F"/>
+                </a:solidFill>
+                <a:latin typeface="Courier"/>
+              </a:rPr>
+              <a:t>       </a:t>
+            </a:r>
+            <a:r>
+              <a:rPr>
+                <a:solidFill>
+                  <a:srgbClr val="657422"/>
+                </a:solidFill>
+                <a:latin typeface="Courier"/>
+              </a:rPr>
+              <a:t>x =</a:t>
+            </a:r>
+            <a:r>
+              <a:rPr>
+                <a:solidFill>
+                  <a:srgbClr val="003B4F"/>
+                </a:solidFill>
+                <a:latin typeface="Courier"/>
+              </a:rPr>
+              <a:t> </a:t>
+            </a:r>
+            <a:r>
+              <a:rPr>
+                <a:solidFill>
+                  <a:srgbClr val="20794D"/>
+                </a:solidFill>
+                <a:latin typeface="Courier"/>
+              </a:rPr>
+              <a:t>"NMDS1"</a:t>
+            </a:r>
+            <a:r>
+              <a:rPr>
+                <a:solidFill>
+                  <a:srgbClr val="003B4F"/>
+                </a:solidFill>
+                <a:latin typeface="Courier"/>
+              </a:rPr>
+              <a:t>,</a:t>
+            </a:r>
+            <a:br/>
+            <a:r>
+              <a:rPr>
+                <a:solidFill>
+                  <a:srgbClr val="003B4F"/>
+                </a:solidFill>
+                <a:latin typeface="Courier"/>
+              </a:rPr>
+              <a:t>       </a:t>
+            </a:r>
+            <a:r>
+              <a:rPr>
+                <a:solidFill>
+                  <a:srgbClr val="657422"/>
+                </a:solidFill>
+                <a:latin typeface="Courier"/>
+              </a:rPr>
+              <a:t>y =</a:t>
+            </a:r>
+            <a:r>
+              <a:rPr>
+                <a:solidFill>
+                  <a:srgbClr val="003B4F"/>
+                </a:solidFill>
+                <a:latin typeface="Courier"/>
+              </a:rPr>
+              <a:t> </a:t>
+            </a:r>
+            <a:r>
+              <a:rPr>
+                <a:solidFill>
+                  <a:srgbClr val="20794D"/>
+                </a:solidFill>
+                <a:latin typeface="Courier"/>
+              </a:rPr>
+              <a:t>"NMDS2"</a:t>
+            </a:r>
+            <a:r>
+              <a:rPr>
+                <a:solidFill>
+                  <a:srgbClr val="003B4F"/>
+                </a:solidFill>
+                <a:latin typeface="Courier"/>
+              </a:rPr>
+              <a:t>,</a:t>
+            </a:r>
+            <a:br/>
+            <a:r>
+              <a:rPr>
+                <a:solidFill>
+                  <a:srgbClr val="003B4F"/>
+                </a:solidFill>
+                <a:latin typeface="Courier"/>
+              </a:rPr>
+              <a:t>       </a:t>
+            </a:r>
+            <a:r>
+              <a:rPr>
+                <a:solidFill>
+                  <a:srgbClr val="657422"/>
+                </a:solidFill>
+                <a:latin typeface="Courier"/>
+              </a:rPr>
+              <a:t>color =</a:t>
+            </a:r>
+            <a:r>
+              <a:rPr>
+                <a:solidFill>
+                  <a:srgbClr val="003B4F"/>
+                </a:solidFill>
+                <a:latin typeface="Courier"/>
+              </a:rPr>
+              <a:t> </a:t>
+            </a:r>
+            <a:r>
+              <a:rPr>
+                <a:solidFill>
+                  <a:srgbClr val="20794D"/>
+                </a:solidFill>
+                <a:latin typeface="Courier"/>
+              </a:rPr>
+              <a:t>"Species"</a:t>
+            </a:r>
+            <a:r>
+              <a:rPr>
+                <a:solidFill>
+                  <a:srgbClr val="003B4F"/>
+                </a:solidFill>
+                <a:latin typeface="Courier"/>
+              </a:rPr>
+              <a:t>) </a:t>
+            </a:r>
+            <a:r>
+              <a:rPr>
+                <a:solidFill>
+                  <a:srgbClr val="5E5E5E"/>
+                </a:solidFill>
+                <a:latin typeface="Courier"/>
+              </a:rPr>
+              <a:t>+</a:t>
+            </a:r>
+            <a:br/>
+            <a:r>
+              <a:rPr>
+                <a:solidFill>
+                  <a:srgbClr val="003B4F"/>
+                </a:solidFill>
+                <a:latin typeface="Courier"/>
+              </a:rPr>
+              <a:t>  </a:t>
+            </a:r>
+            <a:r>
+              <a:rPr>
+                <a:solidFill>
+                  <a:srgbClr val="4758AB"/>
+                </a:solidFill>
+                <a:latin typeface="Courier"/>
+              </a:rPr>
+              <a:t>theme_minimal</a:t>
+            </a:r>
+            <a:r>
+              <a:rPr>
+                <a:solidFill>
+                  <a:srgbClr val="003B4F"/>
+                </a:solidFill>
+                <a:latin typeface="Courier"/>
+              </a:rPr>
+              <a:t>()</a:t>
+            </a:r>
+            <a:br/>
+            <a:br/>
+            <a:r>
+              <a:rPr>
+                <a:solidFill>
+                  <a:srgbClr val="003B4F"/>
+                </a:solidFill>
+                <a:latin typeface="Courier"/>
+              </a:rPr>
+              <a:t>nmds_ellipse_plot</a:t>
+            </a:r>
+          </a:p>
+          <a:p>
+            <a:pPr lvl="0" indent="0" marL="0">
+              <a:spcBef>
+                <a:spcPts val="3000"/>
+              </a:spcBef>
+              <a:buNone/>
+            </a:pPr>
+            <a:r>
+              <a:rPr b="1"/>
+              <a:t>Step 6: Stress plot (Shepard diagram)</a:t>
+            </a:r>
+          </a:p>
+          <a:p>
+            <a:pPr lvl="0" indent="0">
+              <a:buNone/>
+            </a:pPr>
+            <a:r>
+              <a:rPr>
+                <a:solidFill>
+                  <a:srgbClr val="4758AB"/>
+                </a:solidFill>
+                <a:latin typeface="Courier"/>
+              </a:rPr>
+              <a:t>stressplot</a:t>
+            </a:r>
+            <a:r>
+              <a:rPr>
+                <a:solidFill>
+                  <a:srgbClr val="003B4F"/>
+                </a:solidFill>
+                <a:latin typeface="Courier"/>
+              </a:rPr>
+              <a:t>(iris_nmds_model, </a:t>
+            </a:r>
+            <a:r>
+              <a:rPr>
+                <a:solidFill>
+                  <a:srgbClr val="657422"/>
+                </a:solidFill>
+                <a:latin typeface="Courier"/>
+              </a:rPr>
+              <a:t>main =</a:t>
+            </a:r>
+            <a:r>
+              <a:rPr>
+                <a:solidFill>
+                  <a:srgbClr val="003B4F"/>
+                </a:solidFill>
+                <a:latin typeface="Courier"/>
+              </a:rPr>
+              <a:t> </a:t>
+            </a:r>
+            <a:r>
+              <a:rPr>
+                <a:solidFill>
+                  <a:srgbClr val="20794D"/>
+                </a:solidFill>
+                <a:latin typeface="Courier"/>
+              </a:rPr>
+              <a:t>"Shepard Diagram: Ordination vs Original Distances"</a:t>
+            </a:r>
+            <a:r>
+              <a:rPr>
+                <a:solidFill>
+                  <a:srgbClr val="003B4F"/>
+                </a:solidFill>
+                <a:latin typeface="Courier"/>
+              </a:rPr>
+              <a:t>)</a:t>
+            </a:r>
+          </a:p>
+          <a:p>
+            <a:pPr lvl="0" indent="0" marL="0">
+              <a:buNone/>
+            </a:pPr>
+            <a:r>
+              <a:rPr/>
+              <a:t>✏️ </a:t>
+            </a:r>
+            <a:r>
+              <a:rPr b="1"/>
+              <a:t>Your turn:</a:t>
+            </a:r>
+            <a:r>
+              <a:rPr/>
+              <a:t> Do the three species separate cleanly on the NMDS plot, or do any overlap? </a:t>
+            </a:r>
+            <a:r>
+              <a:rPr>
+                <a:latin typeface="Courier"/>
+              </a:rPr>
+              <a:t>________________________</a:t>
             </a:r>
           </a:p>
         </p:txBody>
       </p:sp>
-      <p:pic>
-        <p:nvPicPr>
-          <p:cNvPr descr="nmds_cluster_analysis_activity_files/figure-pptx/nmds_plot-1.png" id="0" name="Picture 1"/>
-          <p:cNvPicPr>
-            <a:picLocks noGrp="1" noChangeAspect="1"/>
-          </p:cNvPicPr>
-          <p:nvPr/>
-        </p:nvPicPr>
-        <p:blipFill>
-          <a:blip r:embed="rId2"/>
-          <a:stretch>
-            <a:fillRect/>
-          </a:stretch>
-        </p:blipFill>
-        <p:spPr bwMode="auto">
-          <a:xfrm>
-            <a:off x="3657600" y="1244600"/>
-            <a:ext cx="5232400" cy="3225800"/>
-          </a:xfrm>
-          <a:prstGeom prst="rect">
-            <a:avLst/>
-          </a:prstGeom>
-          <a:noFill/>
-          <a:ln w="9525">
-            <a:noFill/>
-            <a:headEnd/>
-            <a:tailEnd/>
-          </a:ln>
-        </p:spPr>
-      </p:pic>
     </p:spTree>
   </p:cSld>
 </p:sld>
@@ -4550,12 +6598,42 @@
       </p:grpSpPr>
       <p:sp>
         <p:nvSpPr>
-          <p:cNvPr id="4" name="Text Placeholder 3"/>
+          <p:cNvPr id="2" name="Title 1"/>
           <p:cNvSpPr>
             <a:spLocks noGrp="1"/>
           </p:cNvSpPr>
           <p:nvPr>
-            <p:ph idx="2" sz="half" type="body"/>
+            <p:ph type="title"/>
+          </p:nvPr>
+        </p:nvSpPr>
+        <p:spPr>
+          <a:xfrm>
+            <a:off x="0" y="0"/>
+            <a:ext cx="9144000" cy="582780"/>
+          </a:xfrm>
+        </p:spPr>
+        <p:txBody>
+          <a:bodyPr/>
+          <a:lstStyle/>
+          <a:p>
+            <a:pPr lvl="0" indent="0" marL="0">
+              <a:buNone/>
+            </a:pPr>
+            <a:r>
+              <a:rPr/>
+              <a:t>Part 3 · PERMANOVA Analysis</a:t>
+            </a:r>
+          </a:p>
+        </p:txBody>
+      </p:sp>
+      <p:sp>
+        <p:nvSpPr>
+          <p:cNvPr id="3" name="Content Placeholder 2"/>
+          <p:cNvSpPr>
+            <a:spLocks noGrp="1"/>
+          </p:cNvSpPr>
+          <p:nvPr>
+            <p:ph idx="1"/>
           </p:nvPr>
         </p:nvSpPr>
         <p:spPr/>
@@ -4564,6 +6642,15 @@
           <a:lstStyle/>
           <a:p>
             <a:pPr lvl="0" indent="0" marL="0">
+              <a:buNone/>
+            </a:pPr>
+            <a:r>
+              <a:rPr/>
+              <a:t>PERMANOVA (Permutational Multivariate Analysis of Variance) tests whether groups have different multivariate centroids using permutation tests.</a:t>
+            </a:r>
+          </a:p>
+          <a:p>
+            <a:pPr lvl="0" indent="0" marL="0">
               <a:spcBef>
                 <a:spcPts val="3000"/>
               </a:spcBef>
@@ -4571,41 +6658,1833 @@
             </a:pPr>
             <a:r>
               <a:rPr b="1"/>
-              <a:t>Step 5: Add Confidence Ellipses</a:t>
+              <a:t>Step 1: Run PERMANOVA</a:t>
+            </a:r>
+          </a:p>
+          <a:p>
+            <a:pPr lvl="0" indent="0">
+              <a:buNone/>
+            </a:pPr>
+            <a:r>
+              <a:rPr>
+                <a:solidFill>
+                  <a:srgbClr val="4758AB"/>
+                </a:solidFill>
+                <a:latin typeface="Courier"/>
+              </a:rPr>
+              <a:t>set.seed</a:t>
+            </a:r>
+            <a:r>
+              <a:rPr>
+                <a:solidFill>
+                  <a:srgbClr val="003B4F"/>
+                </a:solidFill>
+                <a:latin typeface="Courier"/>
+              </a:rPr>
+              <a:t>(</a:t>
+            </a:r>
+            <a:r>
+              <a:rPr>
+                <a:solidFill>
+                  <a:srgbClr val="AD0000"/>
+                </a:solidFill>
+                <a:latin typeface="Courier"/>
+              </a:rPr>
+              <a:t>456</a:t>
+            </a:r>
+            <a:r>
+              <a:rPr>
+                <a:solidFill>
+                  <a:srgbClr val="003B4F"/>
+                </a:solidFill>
+                <a:latin typeface="Courier"/>
+              </a:rPr>
+              <a:t>)</a:t>
+            </a:r>
+            <a:br/>
+            <a:r>
+              <a:rPr>
+                <a:solidFill>
+                  <a:srgbClr val="003B4F"/>
+                </a:solidFill>
+                <a:latin typeface="Courier"/>
+              </a:rPr>
+              <a:t>iris_permanova_model &lt;- </a:t>
+            </a:r>
+            <a:r>
+              <a:rPr>
+                <a:solidFill>
+                  <a:srgbClr val="4758AB"/>
+                </a:solidFill>
+                <a:latin typeface="Courier"/>
+              </a:rPr>
+              <a:t>adonis2</a:t>
+            </a:r>
+            <a:r>
+              <a:rPr>
+                <a:solidFill>
+                  <a:srgbClr val="003B4F"/>
+                </a:solidFill>
+                <a:latin typeface="Courier"/>
+              </a:rPr>
+              <a:t>(iris_numeric_df </a:t>
+            </a:r>
+            <a:r>
+              <a:rPr>
+                <a:solidFill>
+                  <a:srgbClr val="5E5E5E"/>
+                </a:solidFill>
+                <a:latin typeface="Courier"/>
+              </a:rPr>
+              <a:t>~</a:t>
+            </a:r>
+            <a:r>
+              <a:rPr>
+                <a:solidFill>
+                  <a:srgbClr val="003B4F"/>
+                </a:solidFill>
+                <a:latin typeface="Courier"/>
+              </a:rPr>
+              <a:t> species,</a:t>
+            </a:r>
+            <a:br/>
+            <a:r>
+              <a:rPr>
+                <a:solidFill>
+                  <a:srgbClr val="003B4F"/>
+                </a:solidFill>
+                <a:latin typeface="Courier"/>
+              </a:rPr>
+              <a:t>                                </a:t>
+            </a:r>
+            <a:r>
+              <a:rPr>
+                <a:solidFill>
+                  <a:srgbClr val="657422"/>
+                </a:solidFill>
+                <a:latin typeface="Courier"/>
+              </a:rPr>
+              <a:t>data =</a:t>
+            </a:r>
+            <a:r>
+              <a:rPr>
+                <a:solidFill>
+                  <a:srgbClr val="003B4F"/>
+                </a:solidFill>
+                <a:latin typeface="Courier"/>
+              </a:rPr>
+              <a:t> iris_df,</a:t>
+            </a:r>
+            <a:br/>
+            <a:r>
+              <a:rPr>
+                <a:solidFill>
+                  <a:srgbClr val="003B4F"/>
+                </a:solidFill>
+                <a:latin typeface="Courier"/>
+              </a:rPr>
+              <a:t>                                </a:t>
+            </a:r>
+            <a:r>
+              <a:rPr>
+                <a:solidFill>
+                  <a:srgbClr val="657422"/>
+                </a:solidFill>
+                <a:latin typeface="Courier"/>
+              </a:rPr>
+              <a:t>method =</a:t>
+            </a:r>
+            <a:r>
+              <a:rPr>
+                <a:solidFill>
+                  <a:srgbClr val="003B4F"/>
+                </a:solidFill>
+                <a:latin typeface="Courier"/>
+              </a:rPr>
+              <a:t> </a:t>
+            </a:r>
+            <a:r>
+              <a:rPr>
+                <a:solidFill>
+                  <a:srgbClr val="20794D"/>
+                </a:solidFill>
+                <a:latin typeface="Courier"/>
+              </a:rPr>
+              <a:t>"euclidean"</a:t>
+            </a:r>
+            <a:r>
+              <a:rPr>
+                <a:solidFill>
+                  <a:srgbClr val="003B4F"/>
+                </a:solidFill>
+                <a:latin typeface="Courier"/>
+              </a:rPr>
+              <a:t>,</a:t>
+            </a:r>
+            <a:br/>
+            <a:r>
+              <a:rPr>
+                <a:solidFill>
+                  <a:srgbClr val="003B4F"/>
+                </a:solidFill>
+                <a:latin typeface="Courier"/>
+              </a:rPr>
+              <a:t>                                </a:t>
+            </a:r>
+            <a:r>
+              <a:rPr>
+                <a:solidFill>
+                  <a:srgbClr val="657422"/>
+                </a:solidFill>
+                <a:latin typeface="Courier"/>
+              </a:rPr>
+              <a:t>permutations =</a:t>
+            </a:r>
+            <a:r>
+              <a:rPr>
+                <a:solidFill>
+                  <a:srgbClr val="003B4F"/>
+                </a:solidFill>
+                <a:latin typeface="Courier"/>
+              </a:rPr>
+              <a:t> </a:t>
+            </a:r>
+            <a:r>
+              <a:rPr>
+                <a:solidFill>
+                  <a:srgbClr val="AD0000"/>
+                </a:solidFill>
+                <a:latin typeface="Courier"/>
+              </a:rPr>
+              <a:t>999</a:t>
+            </a:r>
+            <a:r>
+              <a:rPr>
+                <a:solidFill>
+                  <a:srgbClr val="003B4F"/>
+                </a:solidFill>
+                <a:latin typeface="Courier"/>
+              </a:rPr>
+              <a:t>)</a:t>
+            </a:r>
+            <a:br/>
+            <a:br/>
+            <a:r>
+              <a:rPr>
+                <a:solidFill>
+                  <a:srgbClr val="003B4F"/>
+                </a:solidFill>
+                <a:latin typeface="Courier"/>
+              </a:rPr>
+              <a:t>iris_permanova_model</a:t>
+            </a:r>
+          </a:p>
+          <a:p>
+            <a:pPr lvl="0" indent="0" marL="0">
+              <a:buNone/>
+            </a:pPr>
+            <a:r>
+              <a:rPr/>
+              <a:t>✏️ </a:t>
+            </a:r>
+            <a:r>
+              <a:rPr b="1"/>
+              <a:t>Your turn:</a:t>
+            </a:r>
+            <a:r>
+              <a:rPr/>
+              <a:t> Fill in from your own output — F-statistic: </a:t>
+            </a:r>
+            <a:r>
+              <a:rPr>
+                <a:latin typeface="Courier"/>
+              </a:rPr>
+              <a:t>______</a:t>
+            </a:r>
+            <a:r>
+              <a:rPr/>
+              <a:t>, R² (variance explained): </a:t>
+            </a:r>
+            <a:r>
+              <a:rPr>
+                <a:latin typeface="Courier"/>
+              </a:rPr>
+              <a:t>______</a:t>
+            </a:r>
+            <a:r>
+              <a:rPr/>
+              <a:t>, p-value: </a:t>
+            </a:r>
+            <a:r>
+              <a:rPr>
+                <a:latin typeface="Courier"/>
+              </a:rPr>
+              <a:t>______</a:t>
+            </a:r>
+            <a:r>
+              <a:rPr/>
+              <a:t>. Do species differ significantly in multivariate space?</a:t>
+            </a:r>
+          </a:p>
+          <a:p>
+            <a:pPr lvl="0" indent="0" marL="0">
+              <a:spcBef>
+                <a:spcPts val="3000"/>
+              </a:spcBef>
+              <a:buNone/>
+            </a:pPr>
+            <a:r>
+              <a:rPr b="1"/>
+              <a:t>Step 2: Check homogeneity of dispersions</a:t>
+            </a:r>
+          </a:p>
+          <a:p>
+            <a:pPr lvl="0" indent="0" marL="0">
+              <a:buNone/>
+            </a:pPr>
+            <a:r>
+              <a:rPr/>
+              <a:t>Before interpreting PERMANOVA, we need to check if groups have similar multivariate spread.</a:t>
+            </a:r>
+          </a:p>
+          <a:p>
+            <a:pPr lvl="0" indent="0">
+              <a:buNone/>
+            </a:pPr>
+            <a:r>
+              <a:rPr>
+                <a:solidFill>
+                  <a:srgbClr val="003B4F"/>
+                </a:solidFill>
+                <a:latin typeface="Courier"/>
+              </a:rPr>
+              <a:t>iris_dist_full &lt;- </a:t>
+            </a:r>
+            <a:r>
+              <a:rPr>
+                <a:solidFill>
+                  <a:srgbClr val="4758AB"/>
+                </a:solidFill>
+                <a:latin typeface="Courier"/>
+              </a:rPr>
+              <a:t>dist</a:t>
+            </a:r>
+            <a:r>
+              <a:rPr>
+                <a:solidFill>
+                  <a:srgbClr val="003B4F"/>
+                </a:solidFill>
+                <a:latin typeface="Courier"/>
+              </a:rPr>
+              <a:t>(iris_numeric_df)</a:t>
+            </a:r>
+            <a:br/>
+            <a:r>
+              <a:rPr>
+                <a:solidFill>
+                  <a:srgbClr val="003B4F"/>
+                </a:solidFill>
+                <a:latin typeface="Courier"/>
+              </a:rPr>
+              <a:t>dispersion_model &lt;- </a:t>
+            </a:r>
+            <a:r>
+              <a:rPr>
+                <a:solidFill>
+                  <a:srgbClr val="4758AB"/>
+                </a:solidFill>
+                <a:latin typeface="Courier"/>
+              </a:rPr>
+              <a:t>betadisper</a:t>
+            </a:r>
+            <a:r>
+              <a:rPr>
+                <a:solidFill>
+                  <a:srgbClr val="003B4F"/>
+                </a:solidFill>
+                <a:latin typeface="Courier"/>
+              </a:rPr>
+              <a:t>(iris_dist_full, iris_df</a:t>
+            </a:r>
+            <a:r>
+              <a:rPr>
+                <a:solidFill>
+                  <a:srgbClr val="5E5E5E"/>
+                </a:solidFill>
+                <a:latin typeface="Courier"/>
+              </a:rPr>
+              <a:t>$</a:t>
+            </a:r>
+            <a:r>
+              <a:rPr>
+                <a:solidFill>
+                  <a:srgbClr val="003B4F"/>
+                </a:solidFill>
+                <a:latin typeface="Courier"/>
+              </a:rPr>
+              <a:t>species)</a:t>
+            </a:r>
+            <a:br/>
+            <a:br/>
+            <a:r>
+              <a:rPr>
+                <a:solidFill>
+                  <a:srgbClr val="003B4F"/>
+                </a:solidFill>
+                <a:latin typeface="Courier"/>
+              </a:rPr>
+              <a:t>dispersion_test &lt;- </a:t>
+            </a:r>
+            <a:r>
+              <a:rPr>
+                <a:solidFill>
+                  <a:srgbClr val="4758AB"/>
+                </a:solidFill>
+                <a:latin typeface="Courier"/>
+              </a:rPr>
+              <a:t>anova</a:t>
+            </a:r>
+            <a:r>
+              <a:rPr>
+                <a:solidFill>
+                  <a:srgbClr val="003B4F"/>
+                </a:solidFill>
+                <a:latin typeface="Courier"/>
+              </a:rPr>
+              <a:t>(dispersion_model)</a:t>
+            </a:r>
+            <a:br/>
+            <a:r>
+              <a:rPr>
+                <a:solidFill>
+                  <a:srgbClr val="003B4F"/>
+                </a:solidFill>
+                <a:latin typeface="Courier"/>
+              </a:rPr>
+              <a:t>dispersion_test</a:t>
+            </a:r>
+          </a:p>
+          <a:p>
+            <a:pPr lvl="0" indent="0" marL="0">
+              <a:spcBef>
+                <a:spcPts val="3000"/>
+              </a:spcBef>
+              <a:buNone/>
+            </a:pPr>
+            <a:r>
+              <a:rPr b="1"/>
+              <a:t>Step 3: Visualize dispersions</a:t>
+            </a:r>
+          </a:p>
+          <a:p>
+            <a:pPr lvl="0" indent="0">
+              <a:buNone/>
+            </a:pPr>
+            <a:r>
+              <a:rPr>
+                <a:solidFill>
+                  <a:srgbClr val="4758AB"/>
+                </a:solidFill>
+                <a:latin typeface="Courier"/>
+              </a:rPr>
+              <a:t>plot</a:t>
+            </a:r>
+            <a:r>
+              <a:rPr>
+                <a:solidFill>
+                  <a:srgbClr val="003B4F"/>
+                </a:solidFill>
+                <a:latin typeface="Courier"/>
+              </a:rPr>
+              <a:t>(dispersion_model, </a:t>
+            </a:r>
+            <a:r>
+              <a:rPr>
+                <a:solidFill>
+                  <a:srgbClr val="657422"/>
+                </a:solidFill>
+                <a:latin typeface="Courier"/>
+              </a:rPr>
+              <a:t>main =</a:t>
+            </a:r>
+            <a:r>
+              <a:rPr>
+                <a:solidFill>
+                  <a:srgbClr val="003B4F"/>
+                </a:solidFill>
+                <a:latin typeface="Courier"/>
+              </a:rPr>
+              <a:t> </a:t>
+            </a:r>
+            <a:r>
+              <a:rPr>
+                <a:solidFill>
+                  <a:srgbClr val="20794D"/>
+                </a:solidFill>
+                <a:latin typeface="Courier"/>
+              </a:rPr>
+              <a:t>"Multivariate Dispersion by Species"</a:t>
+            </a:r>
+            <a:r>
+              <a:rPr>
+                <a:solidFill>
+                  <a:srgbClr val="003B4F"/>
+                </a:solidFill>
+                <a:latin typeface="Courier"/>
+              </a:rPr>
+              <a:t>)</a:t>
+            </a:r>
+          </a:p>
+          <a:p>
+            <a:pPr lvl="0" indent="0" marL="0">
+              <a:spcBef>
+                <a:spcPts val="3000"/>
+              </a:spcBef>
+              <a:buNone/>
+            </a:pPr>
+            <a:r>
+              <a:rPr b="1"/>
+              <a:t>Step 4: Pairwise PERMANOVA</a:t>
+            </a:r>
+          </a:p>
+          <a:p>
+            <a:pPr lvl="0" indent="0">
+              <a:buNone/>
+            </a:pPr>
+            <a:r>
+              <a:rPr>
+                <a:solidFill>
+                  <a:srgbClr val="003B4F"/>
+                </a:solidFill>
+                <a:latin typeface="Courier"/>
+              </a:rPr>
+              <a:t>pairwise_permanova &lt;- </a:t>
+            </a:r>
+            <a:r>
+              <a:rPr b="1">
+                <a:solidFill>
+                  <a:srgbClr val="003B4F"/>
+                </a:solidFill>
+                <a:latin typeface="Courier"/>
+              </a:rPr>
+              <a:t>function</a:t>
+            </a:r>
+            <a:r>
+              <a:rPr>
+                <a:solidFill>
+                  <a:srgbClr val="003B4F"/>
+                </a:solidFill>
+                <a:latin typeface="Courier"/>
+              </a:rPr>
+              <a:t>(data_matrix, groups, </a:t>
+            </a:r>
+            <a:r>
+              <a:rPr>
+                <a:solidFill>
+                  <a:srgbClr val="657422"/>
+                </a:solidFill>
+                <a:latin typeface="Courier"/>
+              </a:rPr>
+              <a:t>distance_method =</a:t>
+            </a:r>
+            <a:r>
+              <a:rPr>
+                <a:solidFill>
+                  <a:srgbClr val="003B4F"/>
+                </a:solidFill>
+                <a:latin typeface="Courier"/>
+              </a:rPr>
+              <a:t> </a:t>
+            </a:r>
+            <a:r>
+              <a:rPr>
+                <a:solidFill>
+                  <a:srgbClr val="20794D"/>
+                </a:solidFill>
+                <a:latin typeface="Courier"/>
+              </a:rPr>
+              <a:t>"euclidean"</a:t>
+            </a:r>
+            <a:r>
+              <a:rPr>
+                <a:solidFill>
+                  <a:srgbClr val="003B4F"/>
+                </a:solidFill>
+                <a:latin typeface="Courier"/>
+              </a:rPr>
+              <a:t>) {</a:t>
+            </a:r>
+            <a:br/>
+            <a:r>
+              <a:rPr>
+                <a:solidFill>
+                  <a:srgbClr val="003B4F"/>
+                </a:solidFill>
+                <a:latin typeface="Courier"/>
+              </a:rPr>
+              <a:t>  group_levels &lt;- </a:t>
+            </a:r>
+            <a:r>
+              <a:rPr>
+                <a:solidFill>
+                  <a:srgbClr val="4758AB"/>
+                </a:solidFill>
+                <a:latin typeface="Courier"/>
+              </a:rPr>
+              <a:t>unique</a:t>
+            </a:r>
+            <a:r>
+              <a:rPr>
+                <a:solidFill>
+                  <a:srgbClr val="003B4F"/>
+                </a:solidFill>
+                <a:latin typeface="Courier"/>
+              </a:rPr>
+              <a:t>(groups)</a:t>
+            </a:r>
+            <a:br/>
+            <a:r>
+              <a:rPr>
+                <a:solidFill>
+                  <a:srgbClr val="003B4F"/>
+                </a:solidFill>
+                <a:latin typeface="Courier"/>
+              </a:rPr>
+              <a:t>  comparisons &lt;- </a:t>
+            </a:r>
+            <a:r>
+              <a:rPr>
+                <a:solidFill>
+                  <a:srgbClr val="4758AB"/>
+                </a:solidFill>
+                <a:latin typeface="Courier"/>
+              </a:rPr>
+              <a:t>combn</a:t>
+            </a:r>
+            <a:r>
+              <a:rPr>
+                <a:solidFill>
+                  <a:srgbClr val="003B4F"/>
+                </a:solidFill>
+                <a:latin typeface="Courier"/>
+              </a:rPr>
+              <a:t>(group_levels, </a:t>
+            </a:r>
+            <a:r>
+              <a:rPr>
+                <a:solidFill>
+                  <a:srgbClr val="AD0000"/>
+                </a:solidFill>
+                <a:latin typeface="Courier"/>
+              </a:rPr>
+              <a:t>2</a:t>
+            </a:r>
+            <a:r>
+              <a:rPr>
+                <a:solidFill>
+                  <a:srgbClr val="003B4F"/>
+                </a:solidFill>
+                <a:latin typeface="Courier"/>
+              </a:rPr>
+              <a:t>)</a:t>
+            </a:r>
+            <a:br/>
+            <a:br/>
+            <a:r>
+              <a:rPr>
+                <a:solidFill>
+                  <a:srgbClr val="003B4F"/>
+                </a:solidFill>
+                <a:latin typeface="Courier"/>
+              </a:rPr>
+              <a:t>  results_df &lt;- </a:t>
+            </a:r>
+            <a:r>
+              <a:rPr>
+                <a:solidFill>
+                  <a:srgbClr val="4758AB"/>
+                </a:solidFill>
+                <a:latin typeface="Courier"/>
+              </a:rPr>
+              <a:t>data.frame</a:t>
+            </a:r>
+            <a:r>
+              <a:rPr>
+                <a:solidFill>
+                  <a:srgbClr val="003B4F"/>
+                </a:solidFill>
+                <a:latin typeface="Courier"/>
+              </a:rPr>
+              <a:t>(</a:t>
+            </a:r>
+            <a:br/>
+            <a:r>
+              <a:rPr>
+                <a:solidFill>
+                  <a:srgbClr val="003B4F"/>
+                </a:solidFill>
+                <a:latin typeface="Courier"/>
+              </a:rPr>
+              <a:t>    </a:t>
+            </a:r>
+            <a:r>
+              <a:rPr>
+                <a:solidFill>
+                  <a:srgbClr val="657422"/>
+                </a:solidFill>
+                <a:latin typeface="Courier"/>
+              </a:rPr>
+              <a:t>group1 =</a:t>
+            </a:r>
+            <a:r>
+              <a:rPr>
+                <a:solidFill>
+                  <a:srgbClr val="003B4F"/>
+                </a:solidFill>
+                <a:latin typeface="Courier"/>
+              </a:rPr>
+              <a:t> </a:t>
+            </a:r>
+            <a:r>
+              <a:rPr>
+                <a:solidFill>
+                  <a:srgbClr val="4758AB"/>
+                </a:solidFill>
+                <a:latin typeface="Courier"/>
+              </a:rPr>
+              <a:t>character</a:t>
+            </a:r>
+            <a:r>
+              <a:rPr>
+                <a:solidFill>
+                  <a:srgbClr val="003B4F"/>
+                </a:solidFill>
+                <a:latin typeface="Courier"/>
+              </a:rPr>
+              <a:t>(),</a:t>
+            </a:r>
+            <a:br/>
+            <a:r>
+              <a:rPr>
+                <a:solidFill>
+                  <a:srgbClr val="003B4F"/>
+                </a:solidFill>
+                <a:latin typeface="Courier"/>
+              </a:rPr>
+              <a:t>    </a:t>
+            </a:r>
+            <a:r>
+              <a:rPr>
+                <a:solidFill>
+                  <a:srgbClr val="657422"/>
+                </a:solidFill>
+                <a:latin typeface="Courier"/>
+              </a:rPr>
+              <a:t>group2 =</a:t>
+            </a:r>
+            <a:r>
+              <a:rPr>
+                <a:solidFill>
+                  <a:srgbClr val="003B4F"/>
+                </a:solidFill>
+                <a:latin typeface="Courier"/>
+              </a:rPr>
+              <a:t> </a:t>
+            </a:r>
+            <a:r>
+              <a:rPr>
+                <a:solidFill>
+                  <a:srgbClr val="4758AB"/>
+                </a:solidFill>
+                <a:latin typeface="Courier"/>
+              </a:rPr>
+              <a:t>character</a:t>
+            </a:r>
+            <a:r>
+              <a:rPr>
+                <a:solidFill>
+                  <a:srgbClr val="003B4F"/>
+                </a:solidFill>
+                <a:latin typeface="Courier"/>
+              </a:rPr>
+              <a:t>(),</a:t>
+            </a:r>
+            <a:br/>
+            <a:r>
+              <a:rPr>
+                <a:solidFill>
+                  <a:srgbClr val="003B4F"/>
+                </a:solidFill>
+                <a:latin typeface="Courier"/>
+              </a:rPr>
+              <a:t>    </a:t>
+            </a:r>
+            <a:r>
+              <a:rPr>
+                <a:solidFill>
+                  <a:srgbClr val="657422"/>
+                </a:solidFill>
+                <a:latin typeface="Courier"/>
+              </a:rPr>
+              <a:t>f_statistic =</a:t>
+            </a:r>
+            <a:r>
+              <a:rPr>
+                <a:solidFill>
+                  <a:srgbClr val="003B4F"/>
+                </a:solidFill>
+                <a:latin typeface="Courier"/>
+              </a:rPr>
+              <a:t> </a:t>
+            </a:r>
+            <a:r>
+              <a:rPr>
+                <a:solidFill>
+                  <a:srgbClr val="4758AB"/>
+                </a:solidFill>
+                <a:latin typeface="Courier"/>
+              </a:rPr>
+              <a:t>numeric</a:t>
+            </a:r>
+            <a:r>
+              <a:rPr>
+                <a:solidFill>
+                  <a:srgbClr val="003B4F"/>
+                </a:solidFill>
+                <a:latin typeface="Courier"/>
+              </a:rPr>
+              <a:t>(),</a:t>
+            </a:r>
+            <a:br/>
+            <a:r>
+              <a:rPr>
+                <a:solidFill>
+                  <a:srgbClr val="003B4F"/>
+                </a:solidFill>
+                <a:latin typeface="Courier"/>
+              </a:rPr>
+              <a:t>    </a:t>
+            </a:r>
+            <a:r>
+              <a:rPr>
+                <a:solidFill>
+                  <a:srgbClr val="657422"/>
+                </a:solidFill>
+                <a:latin typeface="Courier"/>
+              </a:rPr>
+              <a:t>r_squared =</a:t>
+            </a:r>
+            <a:r>
+              <a:rPr>
+                <a:solidFill>
+                  <a:srgbClr val="003B4F"/>
+                </a:solidFill>
+                <a:latin typeface="Courier"/>
+              </a:rPr>
+              <a:t> </a:t>
+            </a:r>
+            <a:r>
+              <a:rPr>
+                <a:solidFill>
+                  <a:srgbClr val="4758AB"/>
+                </a:solidFill>
+                <a:latin typeface="Courier"/>
+              </a:rPr>
+              <a:t>numeric</a:t>
+            </a:r>
+            <a:r>
+              <a:rPr>
+                <a:solidFill>
+                  <a:srgbClr val="003B4F"/>
+                </a:solidFill>
+                <a:latin typeface="Courier"/>
+              </a:rPr>
+              <a:t>(),</a:t>
+            </a:r>
+            <a:br/>
+            <a:r>
+              <a:rPr>
+                <a:solidFill>
+                  <a:srgbClr val="003B4F"/>
+                </a:solidFill>
+                <a:latin typeface="Courier"/>
+              </a:rPr>
+              <a:t>    </a:t>
+            </a:r>
+            <a:r>
+              <a:rPr>
+                <a:solidFill>
+                  <a:srgbClr val="657422"/>
+                </a:solidFill>
+                <a:latin typeface="Courier"/>
+              </a:rPr>
+              <a:t>p_value =</a:t>
+            </a:r>
+            <a:r>
+              <a:rPr>
+                <a:solidFill>
+                  <a:srgbClr val="003B4F"/>
+                </a:solidFill>
+                <a:latin typeface="Courier"/>
+              </a:rPr>
+              <a:t> </a:t>
+            </a:r>
+            <a:r>
+              <a:rPr>
+                <a:solidFill>
+                  <a:srgbClr val="4758AB"/>
+                </a:solidFill>
+                <a:latin typeface="Courier"/>
+              </a:rPr>
+              <a:t>numeric</a:t>
+            </a:r>
+            <a:r>
+              <a:rPr>
+                <a:solidFill>
+                  <a:srgbClr val="003B4F"/>
+                </a:solidFill>
+                <a:latin typeface="Courier"/>
+              </a:rPr>
+              <a:t>()</a:t>
+            </a:r>
+            <a:br/>
+            <a:r>
+              <a:rPr>
+                <a:solidFill>
+                  <a:srgbClr val="003B4F"/>
+                </a:solidFill>
+                <a:latin typeface="Courier"/>
+              </a:rPr>
+              <a:t>  )</a:t>
+            </a:r>
+            <a:br/>
+            <a:br/>
+            <a:r>
+              <a:rPr>
+                <a:solidFill>
+                  <a:srgbClr val="003B4F"/>
+                </a:solidFill>
+                <a:latin typeface="Courier"/>
+              </a:rPr>
+              <a:t>  </a:t>
+            </a:r>
+            <a:r>
+              <a:rPr b="1">
+                <a:solidFill>
+                  <a:srgbClr val="003B4F"/>
+                </a:solidFill>
+                <a:latin typeface="Courier"/>
+              </a:rPr>
+              <a:t>for</a:t>
+            </a:r>
+            <a:r>
+              <a:rPr>
+                <a:solidFill>
+                  <a:srgbClr val="003B4F"/>
+                </a:solidFill>
+                <a:latin typeface="Courier"/>
+              </a:rPr>
+              <a:t>(i </a:t>
+            </a:r>
+            <a:r>
+              <a:rPr b="1">
+                <a:solidFill>
+                  <a:srgbClr val="003B4F"/>
+                </a:solidFill>
+                <a:latin typeface="Courier"/>
+              </a:rPr>
+              <a:t>in</a:t>
+            </a:r>
+            <a:r>
+              <a:rPr>
+                <a:solidFill>
+                  <a:srgbClr val="003B4F"/>
+                </a:solidFill>
+                <a:latin typeface="Courier"/>
+              </a:rPr>
+              <a:t> </a:t>
+            </a:r>
+            <a:r>
+              <a:rPr>
+                <a:solidFill>
+                  <a:srgbClr val="AD0000"/>
+                </a:solidFill>
+                <a:latin typeface="Courier"/>
+              </a:rPr>
+              <a:t>1</a:t>
+            </a:r>
+            <a:r>
+              <a:rPr>
+                <a:solidFill>
+                  <a:srgbClr val="5E5E5E"/>
+                </a:solidFill>
+                <a:latin typeface="Courier"/>
+              </a:rPr>
+              <a:t>:</a:t>
+            </a:r>
+            <a:r>
+              <a:rPr>
+                <a:solidFill>
+                  <a:srgbClr val="4758AB"/>
+                </a:solidFill>
+                <a:latin typeface="Courier"/>
+              </a:rPr>
+              <a:t>ncol</a:t>
+            </a:r>
+            <a:r>
+              <a:rPr>
+                <a:solidFill>
+                  <a:srgbClr val="003B4F"/>
+                </a:solidFill>
+                <a:latin typeface="Courier"/>
+              </a:rPr>
+              <a:t>(comparisons)) {</a:t>
+            </a:r>
+            <a:br/>
+            <a:r>
+              <a:rPr>
+                <a:solidFill>
+                  <a:srgbClr val="003B4F"/>
+                </a:solidFill>
+                <a:latin typeface="Courier"/>
+              </a:rPr>
+              <a:t>    group1 &lt;- comparisons[</a:t>
+            </a:r>
+            <a:r>
+              <a:rPr>
+                <a:solidFill>
+                  <a:srgbClr val="AD0000"/>
+                </a:solidFill>
+                <a:latin typeface="Courier"/>
+              </a:rPr>
+              <a:t>1</a:t>
+            </a:r>
+            <a:r>
+              <a:rPr>
+                <a:solidFill>
+                  <a:srgbClr val="003B4F"/>
+                </a:solidFill>
+                <a:latin typeface="Courier"/>
+              </a:rPr>
+              <a:t>, i]</a:t>
+            </a:r>
+            <a:br/>
+            <a:r>
+              <a:rPr>
+                <a:solidFill>
+                  <a:srgbClr val="003B4F"/>
+                </a:solidFill>
+                <a:latin typeface="Courier"/>
+              </a:rPr>
+              <a:t>    group2 &lt;- comparisons[</a:t>
+            </a:r>
+            <a:r>
+              <a:rPr>
+                <a:solidFill>
+                  <a:srgbClr val="AD0000"/>
+                </a:solidFill>
+                <a:latin typeface="Courier"/>
+              </a:rPr>
+              <a:t>2</a:t>
+            </a:r>
+            <a:r>
+              <a:rPr>
+                <a:solidFill>
+                  <a:srgbClr val="003B4F"/>
+                </a:solidFill>
+                <a:latin typeface="Courier"/>
+              </a:rPr>
+              <a:t>, i]</a:t>
+            </a:r>
+            <a:br/>
+            <a:r>
+              <a:rPr>
+                <a:solidFill>
+                  <a:srgbClr val="003B4F"/>
+                </a:solidFill>
+                <a:latin typeface="Courier"/>
+              </a:rPr>
+              <a:t>    subset_indices &lt;- </a:t>
+            </a:r>
+            <a:r>
+              <a:rPr>
+                <a:solidFill>
+                  <a:srgbClr val="4758AB"/>
+                </a:solidFill>
+                <a:latin typeface="Courier"/>
+              </a:rPr>
+              <a:t>which</a:t>
+            </a:r>
+            <a:r>
+              <a:rPr>
+                <a:solidFill>
+                  <a:srgbClr val="003B4F"/>
+                </a:solidFill>
+                <a:latin typeface="Courier"/>
+              </a:rPr>
+              <a:t>(groups </a:t>
+            </a:r>
+            <a:r>
+              <a:rPr>
+                <a:solidFill>
+                  <a:srgbClr val="5E5E5E"/>
+                </a:solidFill>
+                <a:latin typeface="Courier"/>
+              </a:rPr>
+              <a:t>%in%</a:t>
+            </a:r>
+            <a:r>
+              <a:rPr>
+                <a:solidFill>
+                  <a:srgbClr val="003B4F"/>
+                </a:solidFill>
+                <a:latin typeface="Courier"/>
+              </a:rPr>
+              <a:t> </a:t>
+            </a:r>
+            <a:r>
+              <a:rPr>
+                <a:solidFill>
+                  <a:srgbClr val="4758AB"/>
+                </a:solidFill>
+                <a:latin typeface="Courier"/>
+              </a:rPr>
+              <a:t>c</a:t>
+            </a:r>
+            <a:r>
+              <a:rPr>
+                <a:solidFill>
+                  <a:srgbClr val="003B4F"/>
+                </a:solidFill>
+                <a:latin typeface="Courier"/>
+              </a:rPr>
+              <a:t>(group1, group2))</a:t>
+            </a:r>
+            <a:br/>
+            <a:br/>
+            <a:r>
+              <a:rPr>
+                <a:solidFill>
+                  <a:srgbClr val="003B4F"/>
+                </a:solidFill>
+                <a:latin typeface="Courier"/>
+              </a:rPr>
+              <a:t>    subset_data &lt;- data_matrix[subset_indices, ]</a:t>
+            </a:r>
+            <a:br/>
+            <a:r>
+              <a:rPr>
+                <a:solidFill>
+                  <a:srgbClr val="003B4F"/>
+                </a:solidFill>
+                <a:latin typeface="Courier"/>
+              </a:rPr>
+              <a:t>    subset_groups &lt;- groups[subset_indices]</a:t>
+            </a:r>
+            <a:br/>
+            <a:br/>
+            <a:r>
+              <a:rPr>
+                <a:solidFill>
+                  <a:srgbClr val="003B4F"/>
+                </a:solidFill>
+                <a:latin typeface="Courier"/>
+              </a:rPr>
+              <a:t>    temp_result &lt;- </a:t>
+            </a:r>
+            <a:r>
+              <a:rPr>
+                <a:solidFill>
+                  <a:srgbClr val="4758AB"/>
+                </a:solidFill>
+                <a:latin typeface="Courier"/>
+              </a:rPr>
+              <a:t>adonis2</a:t>
+            </a:r>
+            <a:r>
+              <a:rPr>
+                <a:solidFill>
+                  <a:srgbClr val="003B4F"/>
+                </a:solidFill>
+                <a:latin typeface="Courier"/>
+              </a:rPr>
+              <a:t>(subset_data </a:t>
+            </a:r>
+            <a:r>
+              <a:rPr>
+                <a:solidFill>
+                  <a:srgbClr val="5E5E5E"/>
+                </a:solidFill>
+                <a:latin typeface="Courier"/>
+              </a:rPr>
+              <a:t>~</a:t>
+            </a:r>
+            <a:r>
+              <a:rPr>
+                <a:solidFill>
+                  <a:srgbClr val="003B4F"/>
+                </a:solidFill>
+                <a:latin typeface="Courier"/>
+              </a:rPr>
+              <a:t> subset_groups,</a:t>
+            </a:r>
+            <a:br/>
+            <a:r>
+              <a:rPr>
+                <a:solidFill>
+                  <a:srgbClr val="003B4F"/>
+                </a:solidFill>
+                <a:latin typeface="Courier"/>
+              </a:rPr>
+              <a:t>                          </a:t>
+            </a:r>
+            <a:r>
+              <a:rPr>
+                <a:solidFill>
+                  <a:srgbClr val="657422"/>
+                </a:solidFill>
+                <a:latin typeface="Courier"/>
+              </a:rPr>
+              <a:t>method =</a:t>
+            </a:r>
+            <a:r>
+              <a:rPr>
+                <a:solidFill>
+                  <a:srgbClr val="003B4F"/>
+                </a:solidFill>
+                <a:latin typeface="Courier"/>
+              </a:rPr>
+              <a:t> distance_method,</a:t>
+            </a:r>
+            <a:br/>
+            <a:r>
+              <a:rPr>
+                <a:solidFill>
+                  <a:srgbClr val="003B4F"/>
+                </a:solidFill>
+                <a:latin typeface="Courier"/>
+              </a:rPr>
+              <a:t>                          </a:t>
+            </a:r>
+            <a:r>
+              <a:rPr>
+                <a:solidFill>
+                  <a:srgbClr val="657422"/>
+                </a:solidFill>
+                <a:latin typeface="Courier"/>
+              </a:rPr>
+              <a:t>permutations =</a:t>
+            </a:r>
+            <a:r>
+              <a:rPr>
+                <a:solidFill>
+                  <a:srgbClr val="003B4F"/>
+                </a:solidFill>
+                <a:latin typeface="Courier"/>
+              </a:rPr>
+              <a:t> </a:t>
+            </a:r>
+            <a:r>
+              <a:rPr>
+                <a:solidFill>
+                  <a:srgbClr val="AD0000"/>
+                </a:solidFill>
+                <a:latin typeface="Courier"/>
+              </a:rPr>
+              <a:t>999</a:t>
+            </a:r>
+            <a:r>
+              <a:rPr>
+                <a:solidFill>
+                  <a:srgbClr val="003B4F"/>
+                </a:solidFill>
+                <a:latin typeface="Courier"/>
+              </a:rPr>
+              <a:t>)</a:t>
+            </a:r>
+            <a:br/>
+            <a:br/>
+            <a:r>
+              <a:rPr>
+                <a:solidFill>
+                  <a:srgbClr val="003B4F"/>
+                </a:solidFill>
+                <a:latin typeface="Courier"/>
+              </a:rPr>
+              <a:t>    results_df &lt;- </a:t>
+            </a:r>
+            <a:r>
+              <a:rPr>
+                <a:solidFill>
+                  <a:srgbClr val="4758AB"/>
+                </a:solidFill>
+                <a:latin typeface="Courier"/>
+              </a:rPr>
+              <a:t>rbind</a:t>
+            </a:r>
+            <a:r>
+              <a:rPr>
+                <a:solidFill>
+                  <a:srgbClr val="003B4F"/>
+                </a:solidFill>
+                <a:latin typeface="Courier"/>
+              </a:rPr>
+              <a:t>(results_df, </a:t>
+            </a:r>
+            <a:r>
+              <a:rPr>
+                <a:solidFill>
+                  <a:srgbClr val="4758AB"/>
+                </a:solidFill>
+                <a:latin typeface="Courier"/>
+              </a:rPr>
+              <a:t>data.frame</a:t>
+            </a:r>
+            <a:r>
+              <a:rPr>
+                <a:solidFill>
+                  <a:srgbClr val="003B4F"/>
+                </a:solidFill>
+                <a:latin typeface="Courier"/>
+              </a:rPr>
+              <a:t>(</a:t>
+            </a:r>
+            <a:br/>
+            <a:r>
+              <a:rPr>
+                <a:solidFill>
+                  <a:srgbClr val="003B4F"/>
+                </a:solidFill>
+                <a:latin typeface="Courier"/>
+              </a:rPr>
+              <a:t>      </a:t>
+            </a:r>
+            <a:r>
+              <a:rPr>
+                <a:solidFill>
+                  <a:srgbClr val="657422"/>
+                </a:solidFill>
+                <a:latin typeface="Courier"/>
+              </a:rPr>
+              <a:t>group1 =</a:t>
+            </a:r>
+            <a:r>
+              <a:rPr>
+                <a:solidFill>
+                  <a:srgbClr val="003B4F"/>
+                </a:solidFill>
+                <a:latin typeface="Courier"/>
+              </a:rPr>
+              <a:t> group1,</a:t>
+            </a:r>
+            <a:br/>
+            <a:r>
+              <a:rPr>
+                <a:solidFill>
+                  <a:srgbClr val="003B4F"/>
+                </a:solidFill>
+                <a:latin typeface="Courier"/>
+              </a:rPr>
+              <a:t>      </a:t>
+            </a:r>
+            <a:r>
+              <a:rPr>
+                <a:solidFill>
+                  <a:srgbClr val="657422"/>
+                </a:solidFill>
+                <a:latin typeface="Courier"/>
+              </a:rPr>
+              <a:t>group2 =</a:t>
+            </a:r>
+            <a:r>
+              <a:rPr>
+                <a:solidFill>
+                  <a:srgbClr val="003B4F"/>
+                </a:solidFill>
+                <a:latin typeface="Courier"/>
+              </a:rPr>
+              <a:t> group2,</a:t>
+            </a:r>
+            <a:br/>
+            <a:r>
+              <a:rPr>
+                <a:solidFill>
+                  <a:srgbClr val="003B4F"/>
+                </a:solidFill>
+                <a:latin typeface="Courier"/>
+              </a:rPr>
+              <a:t>      </a:t>
+            </a:r>
+            <a:r>
+              <a:rPr>
+                <a:solidFill>
+                  <a:srgbClr val="657422"/>
+                </a:solidFill>
+                <a:latin typeface="Courier"/>
+              </a:rPr>
+              <a:t>f_statistic =</a:t>
+            </a:r>
+            <a:r>
+              <a:rPr>
+                <a:solidFill>
+                  <a:srgbClr val="003B4F"/>
+                </a:solidFill>
+                <a:latin typeface="Courier"/>
+              </a:rPr>
+              <a:t> temp_result</a:t>
+            </a:r>
+            <a:r>
+              <a:rPr>
+                <a:solidFill>
+                  <a:srgbClr val="5E5E5E"/>
+                </a:solidFill>
+                <a:latin typeface="Courier"/>
+              </a:rPr>
+              <a:t>$</a:t>
+            </a:r>
+            <a:r>
+              <a:rPr>
+                <a:solidFill>
+                  <a:srgbClr val="003B4F"/>
+                </a:solidFill>
+                <a:latin typeface="Courier"/>
+              </a:rPr>
+              <a:t>F[</a:t>
+            </a:r>
+            <a:r>
+              <a:rPr>
+                <a:solidFill>
+                  <a:srgbClr val="AD0000"/>
+                </a:solidFill>
+                <a:latin typeface="Courier"/>
+              </a:rPr>
+              <a:t>1</a:t>
+            </a:r>
+            <a:r>
+              <a:rPr>
+                <a:solidFill>
+                  <a:srgbClr val="003B4F"/>
+                </a:solidFill>
+                <a:latin typeface="Courier"/>
+              </a:rPr>
+              <a:t>],</a:t>
+            </a:r>
+            <a:br/>
+            <a:r>
+              <a:rPr>
+                <a:solidFill>
+                  <a:srgbClr val="003B4F"/>
+                </a:solidFill>
+                <a:latin typeface="Courier"/>
+              </a:rPr>
+              <a:t>      </a:t>
+            </a:r>
+            <a:r>
+              <a:rPr>
+                <a:solidFill>
+                  <a:srgbClr val="657422"/>
+                </a:solidFill>
+                <a:latin typeface="Courier"/>
+              </a:rPr>
+              <a:t>r_squared =</a:t>
+            </a:r>
+            <a:r>
+              <a:rPr>
+                <a:solidFill>
+                  <a:srgbClr val="003B4F"/>
+                </a:solidFill>
+                <a:latin typeface="Courier"/>
+              </a:rPr>
+              <a:t> temp_result</a:t>
+            </a:r>
+            <a:r>
+              <a:rPr>
+                <a:solidFill>
+                  <a:srgbClr val="5E5E5E"/>
+                </a:solidFill>
+                <a:latin typeface="Courier"/>
+              </a:rPr>
+              <a:t>$</a:t>
+            </a:r>
+            <a:r>
+              <a:rPr>
+                <a:solidFill>
+                  <a:srgbClr val="003B4F"/>
+                </a:solidFill>
+                <a:latin typeface="Courier"/>
+              </a:rPr>
+              <a:t>R2[</a:t>
+            </a:r>
+            <a:r>
+              <a:rPr>
+                <a:solidFill>
+                  <a:srgbClr val="AD0000"/>
+                </a:solidFill>
+                <a:latin typeface="Courier"/>
+              </a:rPr>
+              <a:t>1</a:t>
+            </a:r>
+            <a:r>
+              <a:rPr>
+                <a:solidFill>
+                  <a:srgbClr val="003B4F"/>
+                </a:solidFill>
+                <a:latin typeface="Courier"/>
+              </a:rPr>
+              <a:t>],</a:t>
+            </a:r>
+            <a:br/>
+            <a:r>
+              <a:rPr>
+                <a:solidFill>
+                  <a:srgbClr val="003B4F"/>
+                </a:solidFill>
+                <a:latin typeface="Courier"/>
+              </a:rPr>
+              <a:t>      </a:t>
+            </a:r>
+            <a:r>
+              <a:rPr>
+                <a:solidFill>
+                  <a:srgbClr val="657422"/>
+                </a:solidFill>
+                <a:latin typeface="Courier"/>
+              </a:rPr>
+              <a:t>p_value =</a:t>
+            </a:r>
+            <a:r>
+              <a:rPr>
+                <a:solidFill>
+                  <a:srgbClr val="003B4F"/>
+                </a:solidFill>
+                <a:latin typeface="Courier"/>
+              </a:rPr>
+              <a:t> temp_result</a:t>
+            </a:r>
+            <a:r>
+              <a:rPr>
+                <a:solidFill>
+                  <a:srgbClr val="5E5E5E"/>
+                </a:solidFill>
+                <a:latin typeface="Courier"/>
+              </a:rPr>
+              <a:t>$</a:t>
+            </a:r>
+            <a:r>
+              <a:rPr>
+                <a:solidFill>
+                  <a:srgbClr val="20794D"/>
+                </a:solidFill>
+                <a:latin typeface="Courier"/>
+              </a:rPr>
+              <a:t>"Pr(&gt;F)"</a:t>
+            </a:r>
+            <a:r>
+              <a:rPr>
+                <a:solidFill>
+                  <a:srgbClr val="003B4F"/>
+                </a:solidFill>
+                <a:latin typeface="Courier"/>
+              </a:rPr>
+              <a:t>[</a:t>
+            </a:r>
+            <a:r>
+              <a:rPr>
+                <a:solidFill>
+                  <a:srgbClr val="AD0000"/>
+                </a:solidFill>
+                <a:latin typeface="Courier"/>
+              </a:rPr>
+              <a:t>1</a:t>
+            </a:r>
+            <a:r>
+              <a:rPr>
+                <a:solidFill>
+                  <a:srgbClr val="003B4F"/>
+                </a:solidFill>
+                <a:latin typeface="Courier"/>
+              </a:rPr>
+              <a:t>]</a:t>
+            </a:r>
+            <a:br/>
+            <a:r>
+              <a:rPr>
+                <a:solidFill>
+                  <a:srgbClr val="003B4F"/>
+                </a:solidFill>
+                <a:latin typeface="Courier"/>
+              </a:rPr>
+              <a:t>    ))</a:t>
+            </a:r>
+            <a:br/>
+            <a:r>
+              <a:rPr>
+                <a:solidFill>
+                  <a:srgbClr val="003B4F"/>
+                </a:solidFill>
+                <a:latin typeface="Courier"/>
+              </a:rPr>
+              <a:t>  }</a:t>
+            </a:r>
+            <a:br/>
+            <a:br/>
+            <a:r>
+              <a:rPr>
+                <a:solidFill>
+                  <a:srgbClr val="003B4F"/>
+                </a:solidFill>
+                <a:latin typeface="Courier"/>
+              </a:rPr>
+              <a:t>  results_df</a:t>
+            </a:r>
+            <a:r>
+              <a:rPr>
+                <a:solidFill>
+                  <a:srgbClr val="5E5E5E"/>
+                </a:solidFill>
+                <a:latin typeface="Courier"/>
+              </a:rPr>
+              <a:t>$</a:t>
+            </a:r>
+            <a:r>
+              <a:rPr>
+                <a:solidFill>
+                  <a:srgbClr val="003B4F"/>
+                </a:solidFill>
+                <a:latin typeface="Courier"/>
+              </a:rPr>
+              <a:t>p_adjusted &lt;- </a:t>
+            </a:r>
+            <a:r>
+              <a:rPr>
+                <a:solidFill>
+                  <a:srgbClr val="4758AB"/>
+                </a:solidFill>
+                <a:latin typeface="Courier"/>
+              </a:rPr>
+              <a:t>p.adjust</a:t>
+            </a:r>
+            <a:r>
+              <a:rPr>
+                <a:solidFill>
+                  <a:srgbClr val="003B4F"/>
+                </a:solidFill>
+                <a:latin typeface="Courier"/>
+              </a:rPr>
+              <a:t>(results_df</a:t>
+            </a:r>
+            <a:r>
+              <a:rPr>
+                <a:solidFill>
+                  <a:srgbClr val="5E5E5E"/>
+                </a:solidFill>
+                <a:latin typeface="Courier"/>
+              </a:rPr>
+              <a:t>$</a:t>
+            </a:r>
+            <a:r>
+              <a:rPr>
+                <a:solidFill>
+                  <a:srgbClr val="003B4F"/>
+                </a:solidFill>
+                <a:latin typeface="Courier"/>
+              </a:rPr>
+              <a:t>p_value, </a:t>
+            </a:r>
+            <a:r>
+              <a:rPr>
+                <a:solidFill>
+                  <a:srgbClr val="657422"/>
+                </a:solidFill>
+                <a:latin typeface="Courier"/>
+              </a:rPr>
+              <a:t>method =</a:t>
+            </a:r>
+            <a:r>
+              <a:rPr>
+                <a:solidFill>
+                  <a:srgbClr val="003B4F"/>
+                </a:solidFill>
+                <a:latin typeface="Courier"/>
+              </a:rPr>
+              <a:t> </a:t>
+            </a:r>
+            <a:r>
+              <a:rPr>
+                <a:solidFill>
+                  <a:srgbClr val="20794D"/>
+                </a:solidFill>
+                <a:latin typeface="Courier"/>
+              </a:rPr>
+              <a:t>"bonferroni"</a:t>
+            </a:r>
+            <a:r>
+              <a:rPr>
+                <a:solidFill>
+                  <a:srgbClr val="003B4F"/>
+                </a:solidFill>
+                <a:latin typeface="Courier"/>
+              </a:rPr>
+              <a:t>)</a:t>
+            </a:r>
+            <a:br/>
+            <a:br/>
+            <a:r>
+              <a:rPr>
+                <a:solidFill>
+                  <a:srgbClr val="003B4F"/>
+                </a:solidFill>
+                <a:latin typeface="Courier"/>
+              </a:rPr>
+              <a:t>  </a:t>
+            </a:r>
+            <a:r>
+              <a:rPr>
+                <a:solidFill>
+                  <a:srgbClr val="4758AB"/>
+                </a:solidFill>
+                <a:latin typeface="Courier"/>
+              </a:rPr>
+              <a:t>return</a:t>
+            </a:r>
+            <a:r>
+              <a:rPr>
+                <a:solidFill>
+                  <a:srgbClr val="003B4F"/>
+                </a:solidFill>
+                <a:latin typeface="Courier"/>
+              </a:rPr>
+              <a:t>(results_df)</a:t>
+            </a:r>
+            <a:br/>
+            <a:r>
+              <a:rPr>
+                <a:solidFill>
+                  <a:srgbClr val="003B4F"/>
+                </a:solidFill>
+                <a:latin typeface="Courier"/>
+              </a:rPr>
+              <a:t>}</a:t>
+            </a:r>
+            <a:br/>
+            <a:br/>
+            <a:r>
+              <a:rPr>
+                <a:solidFill>
+                  <a:srgbClr val="003B4F"/>
+                </a:solidFill>
+                <a:latin typeface="Courier"/>
+              </a:rPr>
+              <a:t>pairwise_results_df &lt;- </a:t>
+            </a:r>
+            <a:r>
+              <a:rPr>
+                <a:solidFill>
+                  <a:srgbClr val="4758AB"/>
+                </a:solidFill>
+                <a:latin typeface="Courier"/>
+              </a:rPr>
+              <a:t>pairwise_permanova</a:t>
+            </a:r>
+            <a:r>
+              <a:rPr>
+                <a:solidFill>
+                  <a:srgbClr val="003B4F"/>
+                </a:solidFill>
+                <a:latin typeface="Courier"/>
+              </a:rPr>
+              <a:t>(iris_numeric_df, iris_df</a:t>
+            </a:r>
+            <a:r>
+              <a:rPr>
+                <a:solidFill>
+                  <a:srgbClr val="5E5E5E"/>
+                </a:solidFill>
+                <a:latin typeface="Courier"/>
+              </a:rPr>
+              <a:t>$</a:t>
+            </a:r>
+            <a:r>
+              <a:rPr>
+                <a:solidFill>
+                  <a:srgbClr val="003B4F"/>
+                </a:solidFill>
+                <a:latin typeface="Courier"/>
+              </a:rPr>
+              <a:t>species)</a:t>
+            </a:r>
+            <a:br/>
+            <a:r>
+              <a:rPr>
+                <a:solidFill>
+                  <a:srgbClr val="003B4F"/>
+                </a:solidFill>
+                <a:latin typeface="Courier"/>
+              </a:rPr>
+              <a:t>pairwise_results_df</a:t>
+            </a:r>
+          </a:p>
+          <a:p>
+            <a:pPr lvl="0" indent="0" marL="0">
+              <a:buNone/>
+            </a:pPr>
+            <a:r>
+              <a:rPr/>
+              <a:t>✏️ </a:t>
+            </a:r>
+            <a:r>
+              <a:rPr b="1"/>
+              <a:t>Your turn:</a:t>
+            </a:r>
+            <a:r>
+              <a:rPr/>
+              <a:t> Which pair of species is the most different (largest F-statistic)? Which pair is the least different? </a:t>
+            </a:r>
+            <a:r>
+              <a:rPr>
+                <a:latin typeface="Courier"/>
+              </a:rPr>
+              <a:t>________________________</a:t>
+            </a:r>
+          </a:p>
+          <a:p>
+            <a:pPr lvl="0" indent="0" marL="1270000">
+              <a:buNone/>
+            </a:pPr>
+            <a:r>
+              <a:rPr sz="2000" b="1"/>
+              <a:t>Tip</a:t>
+            </a:r>
+          </a:p>
+          <a:p>
+            <a:pPr lvl="0" indent="0" marL="1270000">
+              <a:buNone/>
+            </a:pPr>
+            <a:r>
+              <a:rPr sz="2000" b="1"/>
+              <a:t>🚀 If you finish early:</a:t>
+            </a:r>
+            <a:r>
+              <a:rPr sz="2000"/>
+              <a:t> Does the dispersion test in Step 2 suggest the three species have similar multivariate spread? If not, how would that affect how you interpret the PERMANOVA result from Step 1?</a:t>
+            </a:r>
+          </a:p>
+          <a:p>
+            <a:pPr lvl="0" indent="0">
+              <a:buNone/>
+            </a:pPr>
+            <a:r>
+              <a:rPr>
+                <a:solidFill>
+                  <a:srgbClr val="5E5E5E"/>
+                </a:solidFill>
+                <a:latin typeface="Courier"/>
+              </a:rPr>
+              <a:t># Write your notes/code here:</a:t>
             </a:r>
           </a:p>
         </p:txBody>
       </p:sp>
-      <p:pic>
-        <p:nvPicPr>
-          <p:cNvPr descr="nmds_cluster_analysis_activity_files/figure-pptx/nmds_ellipse_plot-1.png" id="0" name="Picture 1"/>
-          <p:cNvPicPr>
-            <a:picLocks noGrp="1" noChangeAspect="1"/>
-          </p:cNvPicPr>
-          <p:nvPr/>
-        </p:nvPicPr>
-        <p:blipFill>
-          <a:blip r:embed="rId2"/>
-          <a:stretch>
-            <a:fillRect/>
-          </a:stretch>
-        </p:blipFill>
-        <p:spPr bwMode="auto">
-          <a:xfrm>
-            <a:off x="3657600" y="1244600"/>
-            <a:ext cx="5232400" cy="3225800"/>
-          </a:xfrm>
-          <a:prstGeom prst="rect">
-            <a:avLst/>
-          </a:prstGeom>
-          <a:noFill/>
-          <a:ln w="9525">
-            <a:noFill/>
-            <a:headEnd/>
-            <a:tailEnd/>
-          </a:ln>
-        </p:spPr>
-      </p:pic>
     </p:spTree>
   </p:cSld>
 </p:sld>
@@ -4630,12 +8509,42 @@
       </p:grpSpPr>
       <p:sp>
         <p:nvSpPr>
-          <p:cNvPr id="4" name="Text Placeholder 3"/>
+          <p:cNvPr id="2" name="Title 1"/>
           <p:cNvSpPr>
             <a:spLocks noGrp="1"/>
           </p:cNvSpPr>
           <p:nvPr>
-            <p:ph idx="2" sz="half" type="body"/>
+            <p:ph type="title"/>
+          </p:nvPr>
+        </p:nvSpPr>
+        <p:spPr>
+          <a:xfrm>
+            <a:off x="0" y="0"/>
+            <a:ext cx="9144000" cy="582780"/>
+          </a:xfrm>
+        </p:spPr>
+        <p:txBody>
+          <a:bodyPr/>
+          <a:lstStyle/>
+          <a:p>
+            <a:pPr lvl="0" indent="0" marL="0">
+              <a:buNone/>
+            </a:pPr>
+            <a:r>
+              <a:rPr/>
+              <a:t>Part 4 · ANOSIM Analysis</a:t>
+            </a:r>
+          </a:p>
+        </p:txBody>
+      </p:sp>
+      <p:sp>
+        <p:nvSpPr>
+          <p:cNvPr id="3" name="Content Placeholder 2"/>
+          <p:cNvSpPr>
+            <a:spLocks noGrp="1"/>
+          </p:cNvSpPr>
+          <p:nvPr>
+            <p:ph idx="1"/>
           </p:nvPr>
         </p:nvSpPr>
         <p:spPr/>
@@ -4644,6 +8553,15 @@
           <a:lstStyle/>
           <a:p>
             <a:pPr lvl="0" indent="0" marL="0">
+              <a:buNone/>
+            </a:pPr>
+            <a:r>
+              <a:rPr/>
+              <a:t>ANOSIM (Analysis of Similarities) tests whether there is a significant difference between groups using rank dissimilarities.</a:t>
+            </a:r>
+          </a:p>
+          <a:p>
+            <a:pPr lvl="0" indent="0" marL="0">
               <a:spcBef>
                 <a:spcPts val="3000"/>
               </a:spcBef>
@@ -4651,41 +8569,253 @@
             </a:pPr>
             <a:r>
               <a:rPr b="1"/>
-              <a:t>Step 6: Stress Plot (Shepard Diagram)</a:t>
+              <a:t>Step 1: Run ANOSIM</a:t>
+            </a:r>
+          </a:p>
+          <a:p>
+            <a:pPr lvl="0" indent="0">
+              <a:buNone/>
+            </a:pPr>
+            <a:r>
+              <a:rPr>
+                <a:solidFill>
+                  <a:srgbClr val="4758AB"/>
+                </a:solidFill>
+                <a:latin typeface="Courier"/>
+              </a:rPr>
+              <a:t>set.seed</a:t>
+            </a:r>
+            <a:r>
+              <a:rPr>
+                <a:solidFill>
+                  <a:srgbClr val="003B4F"/>
+                </a:solidFill>
+                <a:latin typeface="Courier"/>
+              </a:rPr>
+              <a:t>(</a:t>
+            </a:r>
+            <a:r>
+              <a:rPr>
+                <a:solidFill>
+                  <a:srgbClr val="AD0000"/>
+                </a:solidFill>
+                <a:latin typeface="Courier"/>
+              </a:rPr>
+              <a:t>789</a:t>
+            </a:r>
+            <a:r>
+              <a:rPr>
+                <a:solidFill>
+                  <a:srgbClr val="003B4F"/>
+                </a:solidFill>
+                <a:latin typeface="Courier"/>
+              </a:rPr>
+              <a:t>)</a:t>
+            </a:r>
+            <a:br/>
+            <a:r>
+              <a:rPr>
+                <a:solidFill>
+                  <a:srgbClr val="003B4F"/>
+                </a:solidFill>
+                <a:latin typeface="Courier"/>
+              </a:rPr>
+              <a:t>iris_anosim_model &lt;- </a:t>
+            </a:r>
+            <a:r>
+              <a:rPr>
+                <a:solidFill>
+                  <a:srgbClr val="4758AB"/>
+                </a:solidFill>
+                <a:latin typeface="Courier"/>
+              </a:rPr>
+              <a:t>anosim</a:t>
+            </a:r>
+            <a:r>
+              <a:rPr>
+                <a:solidFill>
+                  <a:srgbClr val="003B4F"/>
+                </a:solidFill>
+                <a:latin typeface="Courier"/>
+              </a:rPr>
+              <a:t>(iris_dist_full, iris_df</a:t>
+            </a:r>
+            <a:r>
+              <a:rPr>
+                <a:solidFill>
+                  <a:srgbClr val="5E5E5E"/>
+                </a:solidFill>
+                <a:latin typeface="Courier"/>
+              </a:rPr>
+              <a:t>$</a:t>
+            </a:r>
+            <a:r>
+              <a:rPr>
+                <a:solidFill>
+                  <a:srgbClr val="003B4F"/>
+                </a:solidFill>
+                <a:latin typeface="Courier"/>
+              </a:rPr>
+              <a:t>species, </a:t>
+            </a:r>
+            <a:r>
+              <a:rPr>
+                <a:solidFill>
+                  <a:srgbClr val="657422"/>
+                </a:solidFill>
+                <a:latin typeface="Courier"/>
+              </a:rPr>
+              <a:t>permutations =</a:t>
+            </a:r>
+            <a:r>
+              <a:rPr>
+                <a:solidFill>
+                  <a:srgbClr val="003B4F"/>
+                </a:solidFill>
+                <a:latin typeface="Courier"/>
+              </a:rPr>
+              <a:t> </a:t>
+            </a:r>
+            <a:r>
+              <a:rPr>
+                <a:solidFill>
+                  <a:srgbClr val="AD0000"/>
+                </a:solidFill>
+                <a:latin typeface="Courier"/>
+              </a:rPr>
+              <a:t>999</a:t>
+            </a:r>
+            <a:r>
+              <a:rPr>
+                <a:solidFill>
+                  <a:srgbClr val="003B4F"/>
+                </a:solidFill>
+                <a:latin typeface="Courier"/>
+              </a:rPr>
+              <a:t>)</a:t>
+            </a:r>
+            <a:br/>
+            <a:br/>
+            <a:r>
+              <a:rPr>
+                <a:solidFill>
+                  <a:srgbClr val="003B4F"/>
+                </a:solidFill>
+                <a:latin typeface="Courier"/>
+              </a:rPr>
+              <a:t>iris_anosim_model</a:t>
+            </a:r>
+          </a:p>
+          <a:p>
+            <a:pPr lvl="0" indent="0" marL="0">
+              <a:buNone/>
+            </a:pPr>
+            <a:r>
+              <a:rPr/>
+              <a:t>✏️ </a:t>
+            </a:r>
+            <a:r>
+              <a:rPr b="1"/>
+              <a:t>Your turn:</a:t>
+            </a:r>
+            <a:r>
+              <a:rPr/>
+              <a:t> Fill in from your own output — R statistic: </a:t>
+            </a:r>
+            <a:r>
+              <a:rPr>
+                <a:latin typeface="Courier"/>
+              </a:rPr>
+              <a:t>______</a:t>
+            </a:r>
+            <a:r>
+              <a:rPr/>
+              <a:t>, p-value: </a:t>
+            </a:r>
+            <a:r>
+              <a:rPr>
+                <a:latin typeface="Courier"/>
+              </a:rPr>
+              <a:t>______</a:t>
+            </a:r>
+            <a:r>
+              <a:rPr/>
+              <a:t>. R close to 1 indicates strong separation between groups; how strong is the separation here?</a:t>
+            </a:r>
+          </a:p>
+          <a:p>
+            <a:pPr lvl="0" indent="0" marL="0">
+              <a:spcBef>
+                <a:spcPts val="3000"/>
+              </a:spcBef>
+              <a:buNone/>
+            </a:pPr>
+            <a:r>
+              <a:rPr b="1"/>
+              <a:t>Step 2: Plot ANOSIM results</a:t>
+            </a:r>
+          </a:p>
+          <a:p>
+            <a:pPr lvl="0" indent="0">
+              <a:buNone/>
+            </a:pPr>
+            <a:r>
+              <a:rPr>
+                <a:solidFill>
+                  <a:srgbClr val="4758AB"/>
+                </a:solidFill>
+                <a:latin typeface="Courier"/>
+              </a:rPr>
+              <a:t>plot</a:t>
+            </a:r>
+            <a:r>
+              <a:rPr>
+                <a:solidFill>
+                  <a:srgbClr val="003B4F"/>
+                </a:solidFill>
+                <a:latin typeface="Courier"/>
+              </a:rPr>
+              <a:t>(iris_anosim_model, </a:t>
+            </a:r>
+            <a:r>
+              <a:rPr>
+                <a:solidFill>
+                  <a:srgbClr val="657422"/>
+                </a:solidFill>
+                <a:latin typeface="Courier"/>
+              </a:rPr>
+              <a:t>main =</a:t>
+            </a:r>
+            <a:r>
+              <a:rPr>
+                <a:solidFill>
+                  <a:srgbClr val="003B4F"/>
+                </a:solidFill>
+                <a:latin typeface="Courier"/>
+              </a:rPr>
+              <a:t> </a:t>
+            </a:r>
+            <a:r>
+              <a:rPr>
+                <a:solidFill>
+                  <a:srgbClr val="20794D"/>
+                </a:solidFill>
+                <a:latin typeface="Courier"/>
+              </a:rPr>
+              <a:t>"ANOSIM Results: Distribution of Permuted R Statistics"</a:t>
+            </a:r>
+            <a:r>
+              <a:rPr>
+                <a:solidFill>
+                  <a:srgbClr val="003B4F"/>
+                </a:solidFill>
+                <a:latin typeface="Courier"/>
+              </a:rPr>
+              <a:t>)</a:t>
             </a:r>
           </a:p>
         </p:txBody>
       </p:sp>
-      <p:pic>
-        <p:nvPicPr>
-          <p:cNvPr descr="nmds_cluster_analysis_activity_files/figure-pptx/stress_plot-1.png" id="0" name="Picture 1"/>
-          <p:cNvPicPr>
-            <a:picLocks noGrp="1" noChangeAspect="1"/>
-          </p:cNvPicPr>
-          <p:nvPr/>
-        </p:nvPicPr>
-        <p:blipFill>
-          <a:blip r:embed="rId2"/>
-          <a:stretch>
-            <a:fillRect/>
-          </a:stretch>
-        </p:blipFill>
-        <p:spPr bwMode="auto">
-          <a:xfrm>
-            <a:off x="3657600" y="1244600"/>
-            <a:ext cx="5232400" cy="3225800"/>
-          </a:xfrm>
-          <a:prstGeom prst="rect">
-            <a:avLst/>
-          </a:prstGeom>
-          <a:noFill/>
-          <a:ln w="9525">
-            <a:noFill/>
-            <a:headEnd/>
-            <a:tailEnd/>
-          </a:ln>
-        </p:spPr>
-      </p:pic>
     </p:spTree>
   </p:cSld>
 </p:sld>
@@ -4721,7 +8851,7 @@
         <p:spPr>
           <a:xfrm>
             <a:off x="0" y="0"/>
-            <a:ext cx="9144000" cy="871538"/>
+            <a:ext cx="9144000" cy="582780"/>
           </a:xfrm>
         </p:spPr>
         <p:txBody>
@@ -4733,19 +8863,19 @@
             </a:pPr>
             <a:r>
               <a:rPr/>
-              <a:t>Part 3: PERMANOVA Analysis</a:t>
+              <a:t>Part 5 · Environmental Fitting (Optional)</a:t>
             </a:r>
           </a:p>
         </p:txBody>
       </p:sp>
       <p:sp>
         <p:nvSpPr>
-          <p:cNvPr id="4" name="Text Placeholder 3"/>
+          <p:cNvPr id="3" name="Content Placeholder 2"/>
           <p:cNvSpPr>
             <a:spLocks noGrp="1"/>
           </p:cNvSpPr>
           <p:nvPr>
-            <p:ph idx="2" sz="half" type="body"/>
+            <p:ph idx="1"/>
           </p:nvPr>
         </p:nvSpPr>
         <p:spPr/>
@@ -4754,14 +8884,173 @@
           <a:lstStyle/>
           <a:p>
             <a:pPr lvl="0" indent="0" marL="0">
-              <a:spcBef>
-                <a:spcPts val="3000"/>
-              </a:spcBef>
               <a:buNone/>
             </a:pPr>
             <a:r>
+              <a:rPr/>
+              <a:t>If we had environmental variables, we could fit them to the ordination. For demonstration, let’s use </a:t>
+            </a:r>
+            <a:r>
+              <a:rPr>
+                <a:latin typeface="Courier"/>
+              </a:rPr>
+              <a:t>petal_length</a:t>
+            </a:r>
+            <a:r>
+              <a:rPr/>
+              <a:t> as a stand-in “environmental” variable.</a:t>
+            </a:r>
+          </a:p>
+          <a:p>
+            <a:pPr lvl="0" indent="0" marL="0">
+              <a:buNone/>
+            </a:pPr>
+            <a:r>
               <a:rPr b="1"/>
-              <a:t>What is PERMANOVA?</a:t>
+              <a:t>▶ Run this:</a:t>
+            </a:r>
+          </a:p>
+          <a:p>
+            <a:pPr lvl="0" indent="0">
+              <a:buNone/>
+            </a:pPr>
+            <a:r>
+              <a:rPr>
+                <a:solidFill>
+                  <a:srgbClr val="003B4F"/>
+                </a:solidFill>
+                <a:latin typeface="Courier"/>
+              </a:rPr>
+              <a:t>env_data_df &lt;- </a:t>
+            </a:r>
+            <a:r>
+              <a:rPr>
+                <a:solidFill>
+                  <a:srgbClr val="4758AB"/>
+                </a:solidFill>
+                <a:latin typeface="Courier"/>
+              </a:rPr>
+              <a:t>data.frame</a:t>
+            </a:r>
+            <a:r>
+              <a:rPr>
+                <a:solidFill>
+                  <a:srgbClr val="003B4F"/>
+                </a:solidFill>
+                <a:latin typeface="Courier"/>
+              </a:rPr>
+              <a:t>(</a:t>
+            </a:r>
+            <a:r>
+              <a:rPr>
+                <a:solidFill>
+                  <a:srgbClr val="657422"/>
+                </a:solidFill>
+                <a:latin typeface="Courier"/>
+              </a:rPr>
+              <a:t>petal_length =</a:t>
+            </a:r>
+            <a:r>
+              <a:rPr>
+                <a:solidFill>
+                  <a:srgbClr val="003B4F"/>
+                </a:solidFill>
+                <a:latin typeface="Courier"/>
+              </a:rPr>
+              <a:t> iris_df</a:t>
+            </a:r>
+            <a:r>
+              <a:rPr>
+                <a:solidFill>
+                  <a:srgbClr val="5E5E5E"/>
+                </a:solidFill>
+                <a:latin typeface="Courier"/>
+              </a:rPr>
+              <a:t>$</a:t>
+            </a:r>
+            <a:r>
+              <a:rPr>
+                <a:solidFill>
+                  <a:srgbClr val="003B4F"/>
+                </a:solidFill>
+                <a:latin typeface="Courier"/>
+              </a:rPr>
+              <a:t>petal_length)</a:t>
+            </a:r>
+            <a:br/>
+            <a:br/>
+            <a:r>
+              <a:rPr>
+                <a:solidFill>
+                  <a:srgbClr val="003B4F"/>
+                </a:solidFill>
+                <a:latin typeface="Courier"/>
+              </a:rPr>
+              <a:t>env_fit_model &lt;- </a:t>
+            </a:r>
+            <a:r>
+              <a:rPr>
+                <a:solidFill>
+                  <a:srgbClr val="4758AB"/>
+                </a:solidFill>
+                <a:latin typeface="Courier"/>
+              </a:rPr>
+              <a:t>envfit</a:t>
+            </a:r>
+            <a:r>
+              <a:rPr>
+                <a:solidFill>
+                  <a:srgbClr val="003B4F"/>
+                </a:solidFill>
+                <a:latin typeface="Courier"/>
+              </a:rPr>
+              <a:t>(iris_nmds_model, env_data_df, </a:t>
+            </a:r>
+            <a:r>
+              <a:rPr>
+                <a:solidFill>
+                  <a:srgbClr val="657422"/>
+                </a:solidFill>
+                <a:latin typeface="Courier"/>
+              </a:rPr>
+              <a:t>permutations =</a:t>
+            </a:r>
+            <a:r>
+              <a:rPr>
+                <a:solidFill>
+                  <a:srgbClr val="003B4F"/>
+                </a:solidFill>
+                <a:latin typeface="Courier"/>
+              </a:rPr>
+              <a:t> </a:t>
+            </a:r>
+            <a:r>
+              <a:rPr>
+                <a:solidFill>
+                  <a:srgbClr val="AD0000"/>
+                </a:solidFill>
+                <a:latin typeface="Courier"/>
+              </a:rPr>
+              <a:t>999</a:t>
+            </a:r>
+            <a:r>
+              <a:rPr>
+                <a:solidFill>
+                  <a:srgbClr val="003B4F"/>
+                </a:solidFill>
+                <a:latin typeface="Courier"/>
+              </a:rPr>
+              <a:t>)</a:t>
+            </a:r>
+            <a:br/>
+            <a:r>
+              <a:rPr>
+                <a:solidFill>
+                  <a:srgbClr val="003B4F"/>
+                </a:solidFill>
+                <a:latin typeface="Courier"/>
+              </a:rPr>
+              <a:t>env_fit_model</a:t>
             </a:r>
           </a:p>
           <a:p>
@@ -4769,20 +9058,1627 @@
               <a:buNone/>
             </a:pPr>
             <a:r>
+              <a:rPr b="1"/>
+              <a:t>▶ Run this</a:t>
+            </a:r>
+            <a:r>
               <a:rPr/>
-              <a:t>PERMANOVA (Permutational Multivariate Analysis of Variance) tests whether groups have different multivariate centroids using permutation tests.</a:t>
-            </a:r>
-          </a:p>
-          <a:p>
-            <a:pPr lvl="0" indent="0" marL="0">
-              <a:spcBef>
-                <a:spcPts val="3000"/>
-              </a:spcBef>
+              <a:t> — visualize the environmental vector on the ordination:</a:t>
+            </a:r>
+          </a:p>
+          <a:p>
+            <a:pPr lvl="0" indent="0">
               <a:buNone/>
             </a:pPr>
             <a:r>
-              <a:rPr b="1"/>
-              <a:t>Step 1: Run PERMANOVA</a:t>
+              <a:rPr>
+                <a:solidFill>
+                  <a:srgbClr val="003B4F"/>
+                </a:solidFill>
+                <a:latin typeface="Courier"/>
+              </a:rPr>
+              <a:t>env_coords_df &lt;- </a:t>
+            </a:r>
+            <a:r>
+              <a:rPr>
+                <a:solidFill>
+                  <a:srgbClr val="4758AB"/>
+                </a:solidFill>
+                <a:latin typeface="Courier"/>
+              </a:rPr>
+              <a:t>as.data.frame</a:t>
+            </a:r>
+            <a:r>
+              <a:rPr>
+                <a:solidFill>
+                  <a:srgbClr val="003B4F"/>
+                </a:solidFill>
+                <a:latin typeface="Courier"/>
+              </a:rPr>
+              <a:t>(env_fit_model</a:t>
+            </a:r>
+            <a:r>
+              <a:rPr>
+                <a:solidFill>
+                  <a:srgbClr val="5E5E5E"/>
+                </a:solidFill>
+                <a:latin typeface="Courier"/>
+              </a:rPr>
+              <a:t>$</a:t>
+            </a:r>
+            <a:r>
+              <a:rPr>
+                <a:solidFill>
+                  <a:srgbClr val="003B4F"/>
+                </a:solidFill>
+                <a:latin typeface="Courier"/>
+              </a:rPr>
+              <a:t>vectors</a:t>
+            </a:r>
+            <a:r>
+              <a:rPr>
+                <a:solidFill>
+                  <a:srgbClr val="5E5E5E"/>
+                </a:solidFill>
+                <a:latin typeface="Courier"/>
+              </a:rPr>
+              <a:t>$</a:t>
+            </a:r>
+            <a:r>
+              <a:rPr>
+                <a:solidFill>
+                  <a:srgbClr val="003B4F"/>
+                </a:solidFill>
+                <a:latin typeface="Courier"/>
+              </a:rPr>
+              <a:t>arrows </a:t>
+            </a:r>
+            <a:r>
+              <a:rPr>
+                <a:solidFill>
+                  <a:srgbClr val="5E5E5E"/>
+                </a:solidFill>
+                <a:latin typeface="Courier"/>
+              </a:rPr>
+              <a:t>*</a:t>
+            </a:r>
+            <a:r>
+              <a:rPr>
+                <a:solidFill>
+                  <a:srgbClr val="003B4F"/>
+                </a:solidFill>
+                <a:latin typeface="Courier"/>
+              </a:rPr>
+              <a:t> </a:t>
+            </a:r>
+            <a:r>
+              <a:rPr>
+                <a:solidFill>
+                  <a:srgbClr val="AD0000"/>
+                </a:solidFill>
+                <a:latin typeface="Courier"/>
+              </a:rPr>
+              <a:t>2</a:t>
+            </a:r>
+            <a:r>
+              <a:rPr>
+                <a:solidFill>
+                  <a:srgbClr val="003B4F"/>
+                </a:solidFill>
+                <a:latin typeface="Courier"/>
+              </a:rPr>
+              <a:t>)  </a:t>
+            </a:r>
+            <a:r>
+              <a:rPr>
+                <a:solidFill>
+                  <a:srgbClr val="5E5E5E"/>
+                </a:solidFill>
+                <a:latin typeface="Courier"/>
+              </a:rPr>
+              <a:t># Scale for visibility</a:t>
+            </a:r>
+            <a:br/>
+            <a:r>
+              <a:rPr>
+                <a:solidFill>
+                  <a:srgbClr val="003B4F"/>
+                </a:solidFill>
+                <a:latin typeface="Courier"/>
+              </a:rPr>
+              <a:t>env_coords_df</a:t>
+            </a:r>
+            <a:r>
+              <a:rPr>
+                <a:solidFill>
+                  <a:srgbClr val="5E5E5E"/>
+                </a:solidFill>
+                <a:latin typeface="Courier"/>
+              </a:rPr>
+              <a:t>$</a:t>
+            </a:r>
+            <a:r>
+              <a:rPr>
+                <a:solidFill>
+                  <a:srgbClr val="003B4F"/>
+                </a:solidFill>
+                <a:latin typeface="Courier"/>
+              </a:rPr>
+              <a:t>variable &lt;- </a:t>
+            </a:r>
+            <a:r>
+              <a:rPr>
+                <a:solidFill>
+                  <a:srgbClr val="4758AB"/>
+                </a:solidFill>
+                <a:latin typeface="Courier"/>
+              </a:rPr>
+              <a:t>rownames</a:t>
+            </a:r>
+            <a:r>
+              <a:rPr>
+                <a:solidFill>
+                  <a:srgbClr val="003B4F"/>
+                </a:solidFill>
+                <a:latin typeface="Courier"/>
+              </a:rPr>
+              <a:t>(env_coords_df)</a:t>
+            </a:r>
+            <a:br/>
+            <a:br/>
+            <a:r>
+              <a:rPr>
+                <a:solidFill>
+                  <a:srgbClr val="003B4F"/>
+                </a:solidFill>
+                <a:latin typeface="Courier"/>
+              </a:rPr>
+              <a:t>nmds_env_plot &lt;- </a:t>
+            </a:r>
+            <a:r>
+              <a:rPr>
+                <a:solidFill>
+                  <a:srgbClr val="4758AB"/>
+                </a:solidFill>
+                <a:latin typeface="Courier"/>
+              </a:rPr>
+              <a:t>ggplot</a:t>
+            </a:r>
+            <a:r>
+              <a:rPr>
+                <a:solidFill>
+                  <a:srgbClr val="003B4F"/>
+                </a:solidFill>
+                <a:latin typeface="Courier"/>
+              </a:rPr>
+              <a:t>(nmds_scores_df, </a:t>
+            </a:r>
+            <a:r>
+              <a:rPr>
+                <a:solidFill>
+                  <a:srgbClr val="4758AB"/>
+                </a:solidFill>
+                <a:latin typeface="Courier"/>
+              </a:rPr>
+              <a:t>aes</a:t>
+            </a:r>
+            <a:r>
+              <a:rPr>
+                <a:solidFill>
+                  <a:srgbClr val="003B4F"/>
+                </a:solidFill>
+                <a:latin typeface="Courier"/>
+              </a:rPr>
+              <a:t>(</a:t>
+            </a:r>
+            <a:r>
+              <a:rPr>
+                <a:solidFill>
+                  <a:srgbClr val="657422"/>
+                </a:solidFill>
+                <a:latin typeface="Courier"/>
+              </a:rPr>
+              <a:t>x =</a:t>
+            </a:r>
+            <a:r>
+              <a:rPr>
+                <a:solidFill>
+                  <a:srgbClr val="003B4F"/>
+                </a:solidFill>
+                <a:latin typeface="Courier"/>
+              </a:rPr>
+              <a:t> nmds1, </a:t>
+            </a:r>
+            <a:r>
+              <a:rPr>
+                <a:solidFill>
+                  <a:srgbClr val="657422"/>
+                </a:solidFill>
+                <a:latin typeface="Courier"/>
+              </a:rPr>
+              <a:t>y =</a:t>
+            </a:r>
+            <a:r>
+              <a:rPr>
+                <a:solidFill>
+                  <a:srgbClr val="003B4F"/>
+                </a:solidFill>
+                <a:latin typeface="Courier"/>
+              </a:rPr>
+              <a:t> nmds2, </a:t>
+            </a:r>
+            <a:r>
+              <a:rPr>
+                <a:solidFill>
+                  <a:srgbClr val="657422"/>
+                </a:solidFill>
+                <a:latin typeface="Courier"/>
+              </a:rPr>
+              <a:t>color =</a:t>
+            </a:r>
+            <a:r>
+              <a:rPr>
+                <a:solidFill>
+                  <a:srgbClr val="003B4F"/>
+                </a:solidFill>
+                <a:latin typeface="Courier"/>
+              </a:rPr>
+              <a:t> species)) </a:t>
+            </a:r>
+            <a:r>
+              <a:rPr>
+                <a:solidFill>
+                  <a:srgbClr val="5E5E5E"/>
+                </a:solidFill>
+                <a:latin typeface="Courier"/>
+              </a:rPr>
+              <a:t>+</a:t>
+            </a:r>
+            <a:br/>
+            <a:r>
+              <a:rPr>
+                <a:solidFill>
+                  <a:srgbClr val="003B4F"/>
+                </a:solidFill>
+                <a:latin typeface="Courier"/>
+              </a:rPr>
+              <a:t>  </a:t>
+            </a:r>
+            <a:r>
+              <a:rPr>
+                <a:solidFill>
+                  <a:srgbClr val="4758AB"/>
+                </a:solidFill>
+                <a:latin typeface="Courier"/>
+              </a:rPr>
+              <a:t>geom_point</a:t>
+            </a:r>
+            <a:r>
+              <a:rPr>
+                <a:solidFill>
+                  <a:srgbClr val="003B4F"/>
+                </a:solidFill>
+                <a:latin typeface="Courier"/>
+              </a:rPr>
+              <a:t>(</a:t>
+            </a:r>
+            <a:r>
+              <a:rPr>
+                <a:solidFill>
+                  <a:srgbClr val="657422"/>
+                </a:solidFill>
+                <a:latin typeface="Courier"/>
+              </a:rPr>
+              <a:t>size =</a:t>
+            </a:r>
+            <a:r>
+              <a:rPr>
+                <a:solidFill>
+                  <a:srgbClr val="003B4F"/>
+                </a:solidFill>
+                <a:latin typeface="Courier"/>
+              </a:rPr>
+              <a:t> </a:t>
+            </a:r>
+            <a:r>
+              <a:rPr>
+                <a:solidFill>
+                  <a:srgbClr val="AD0000"/>
+                </a:solidFill>
+                <a:latin typeface="Courier"/>
+              </a:rPr>
+              <a:t>3</a:t>
+            </a:r>
+            <a:r>
+              <a:rPr>
+                <a:solidFill>
+                  <a:srgbClr val="003B4F"/>
+                </a:solidFill>
+                <a:latin typeface="Courier"/>
+              </a:rPr>
+              <a:t>, </a:t>
+            </a:r>
+            <a:r>
+              <a:rPr>
+                <a:solidFill>
+                  <a:srgbClr val="657422"/>
+                </a:solidFill>
+                <a:latin typeface="Courier"/>
+              </a:rPr>
+              <a:t>alpha =</a:t>
+            </a:r>
+            <a:r>
+              <a:rPr>
+                <a:solidFill>
+                  <a:srgbClr val="003B4F"/>
+                </a:solidFill>
+                <a:latin typeface="Courier"/>
+              </a:rPr>
+              <a:t> </a:t>
+            </a:r>
+            <a:r>
+              <a:rPr>
+                <a:solidFill>
+                  <a:srgbClr val="AD0000"/>
+                </a:solidFill>
+                <a:latin typeface="Courier"/>
+              </a:rPr>
+              <a:t>0.8</a:t>
+            </a:r>
+            <a:r>
+              <a:rPr>
+                <a:solidFill>
+                  <a:srgbClr val="003B4F"/>
+                </a:solidFill>
+                <a:latin typeface="Courier"/>
+              </a:rPr>
+              <a:t>) </a:t>
+            </a:r>
+            <a:r>
+              <a:rPr>
+                <a:solidFill>
+                  <a:srgbClr val="5E5E5E"/>
+                </a:solidFill>
+                <a:latin typeface="Courier"/>
+              </a:rPr>
+              <a:t>+</a:t>
+            </a:r>
+            <a:br/>
+            <a:r>
+              <a:rPr>
+                <a:solidFill>
+                  <a:srgbClr val="003B4F"/>
+                </a:solidFill>
+                <a:latin typeface="Courier"/>
+              </a:rPr>
+              <a:t>  </a:t>
+            </a:r>
+            <a:r>
+              <a:rPr>
+                <a:solidFill>
+                  <a:srgbClr val="4758AB"/>
+                </a:solidFill>
+                <a:latin typeface="Courier"/>
+              </a:rPr>
+              <a:t>stat_ellipse</a:t>
+            </a:r>
+            <a:r>
+              <a:rPr>
+                <a:solidFill>
+                  <a:srgbClr val="003B4F"/>
+                </a:solidFill>
+                <a:latin typeface="Courier"/>
+              </a:rPr>
+              <a:t>(</a:t>
+            </a:r>
+            <a:r>
+              <a:rPr>
+                <a:solidFill>
+                  <a:srgbClr val="657422"/>
+                </a:solidFill>
+                <a:latin typeface="Courier"/>
+              </a:rPr>
+              <a:t>level =</a:t>
+            </a:r>
+            <a:r>
+              <a:rPr>
+                <a:solidFill>
+                  <a:srgbClr val="003B4F"/>
+                </a:solidFill>
+                <a:latin typeface="Courier"/>
+              </a:rPr>
+              <a:t> </a:t>
+            </a:r>
+            <a:r>
+              <a:rPr>
+                <a:solidFill>
+                  <a:srgbClr val="AD0000"/>
+                </a:solidFill>
+                <a:latin typeface="Courier"/>
+              </a:rPr>
+              <a:t>0.95</a:t>
+            </a:r>
+            <a:r>
+              <a:rPr>
+                <a:solidFill>
+                  <a:srgbClr val="003B4F"/>
+                </a:solidFill>
+                <a:latin typeface="Courier"/>
+              </a:rPr>
+              <a:t>, </a:t>
+            </a:r>
+            <a:r>
+              <a:rPr>
+                <a:solidFill>
+                  <a:srgbClr val="657422"/>
+                </a:solidFill>
+                <a:latin typeface="Courier"/>
+              </a:rPr>
+              <a:t>linewidth =</a:t>
+            </a:r>
+            <a:r>
+              <a:rPr>
+                <a:solidFill>
+                  <a:srgbClr val="003B4F"/>
+                </a:solidFill>
+                <a:latin typeface="Courier"/>
+              </a:rPr>
+              <a:t> </a:t>
+            </a:r>
+            <a:r>
+              <a:rPr>
+                <a:solidFill>
+                  <a:srgbClr val="AD0000"/>
+                </a:solidFill>
+                <a:latin typeface="Courier"/>
+              </a:rPr>
+              <a:t>1</a:t>
+            </a:r>
+            <a:r>
+              <a:rPr>
+                <a:solidFill>
+                  <a:srgbClr val="003B4F"/>
+                </a:solidFill>
+                <a:latin typeface="Courier"/>
+              </a:rPr>
+              <a:t>, </a:t>
+            </a:r>
+            <a:r>
+              <a:rPr>
+                <a:solidFill>
+                  <a:srgbClr val="657422"/>
+                </a:solidFill>
+                <a:latin typeface="Courier"/>
+              </a:rPr>
+              <a:t>alpha =</a:t>
+            </a:r>
+            <a:r>
+              <a:rPr>
+                <a:solidFill>
+                  <a:srgbClr val="003B4F"/>
+                </a:solidFill>
+                <a:latin typeface="Courier"/>
+              </a:rPr>
+              <a:t> </a:t>
+            </a:r>
+            <a:r>
+              <a:rPr>
+                <a:solidFill>
+                  <a:srgbClr val="AD0000"/>
+                </a:solidFill>
+                <a:latin typeface="Courier"/>
+              </a:rPr>
+              <a:t>0.3</a:t>
+            </a:r>
+            <a:r>
+              <a:rPr>
+                <a:solidFill>
+                  <a:srgbClr val="003B4F"/>
+                </a:solidFill>
+                <a:latin typeface="Courier"/>
+              </a:rPr>
+              <a:t>) </a:t>
+            </a:r>
+            <a:r>
+              <a:rPr>
+                <a:solidFill>
+                  <a:srgbClr val="5E5E5E"/>
+                </a:solidFill>
+                <a:latin typeface="Courier"/>
+              </a:rPr>
+              <a:t>+</a:t>
+            </a:r>
+            <a:br/>
+            <a:r>
+              <a:rPr>
+                <a:solidFill>
+                  <a:srgbClr val="003B4F"/>
+                </a:solidFill>
+                <a:latin typeface="Courier"/>
+              </a:rPr>
+              <a:t>  </a:t>
+            </a:r>
+            <a:r>
+              <a:rPr>
+                <a:solidFill>
+                  <a:srgbClr val="4758AB"/>
+                </a:solidFill>
+                <a:latin typeface="Courier"/>
+              </a:rPr>
+              <a:t>geom_segment</a:t>
+            </a:r>
+            <a:r>
+              <a:rPr>
+                <a:solidFill>
+                  <a:srgbClr val="003B4F"/>
+                </a:solidFill>
+                <a:latin typeface="Courier"/>
+              </a:rPr>
+              <a:t>(</a:t>
+            </a:r>
+            <a:r>
+              <a:rPr>
+                <a:solidFill>
+                  <a:srgbClr val="657422"/>
+                </a:solidFill>
+                <a:latin typeface="Courier"/>
+              </a:rPr>
+              <a:t>data =</a:t>
+            </a:r>
+            <a:r>
+              <a:rPr>
+                <a:solidFill>
+                  <a:srgbClr val="003B4F"/>
+                </a:solidFill>
+                <a:latin typeface="Courier"/>
+              </a:rPr>
+              <a:t> env_coords_df,</a:t>
+            </a:r>
+            <a:br/>
+            <a:r>
+              <a:rPr>
+                <a:solidFill>
+                  <a:srgbClr val="003B4F"/>
+                </a:solidFill>
+                <a:latin typeface="Courier"/>
+              </a:rPr>
+              <a:t>               </a:t>
+            </a:r>
+            <a:r>
+              <a:rPr>
+                <a:solidFill>
+                  <a:srgbClr val="4758AB"/>
+                </a:solidFill>
+                <a:latin typeface="Courier"/>
+              </a:rPr>
+              <a:t>aes</a:t>
+            </a:r>
+            <a:r>
+              <a:rPr>
+                <a:solidFill>
+                  <a:srgbClr val="003B4F"/>
+                </a:solidFill>
+                <a:latin typeface="Courier"/>
+              </a:rPr>
+              <a:t>(</a:t>
+            </a:r>
+            <a:r>
+              <a:rPr>
+                <a:solidFill>
+                  <a:srgbClr val="657422"/>
+                </a:solidFill>
+                <a:latin typeface="Courier"/>
+              </a:rPr>
+              <a:t>x =</a:t>
+            </a:r>
+            <a:r>
+              <a:rPr>
+                <a:solidFill>
+                  <a:srgbClr val="003B4F"/>
+                </a:solidFill>
+                <a:latin typeface="Courier"/>
+              </a:rPr>
+              <a:t> </a:t>
+            </a:r>
+            <a:r>
+              <a:rPr>
+                <a:solidFill>
+                  <a:srgbClr val="AD0000"/>
+                </a:solidFill>
+                <a:latin typeface="Courier"/>
+              </a:rPr>
+              <a:t>0</a:t>
+            </a:r>
+            <a:r>
+              <a:rPr>
+                <a:solidFill>
+                  <a:srgbClr val="003B4F"/>
+                </a:solidFill>
+                <a:latin typeface="Courier"/>
+              </a:rPr>
+              <a:t>, </a:t>
+            </a:r>
+            <a:r>
+              <a:rPr>
+                <a:solidFill>
+                  <a:srgbClr val="657422"/>
+                </a:solidFill>
+                <a:latin typeface="Courier"/>
+              </a:rPr>
+              <a:t>y =</a:t>
+            </a:r>
+            <a:r>
+              <a:rPr>
+                <a:solidFill>
+                  <a:srgbClr val="003B4F"/>
+                </a:solidFill>
+                <a:latin typeface="Courier"/>
+              </a:rPr>
+              <a:t> </a:t>
+            </a:r>
+            <a:r>
+              <a:rPr>
+                <a:solidFill>
+                  <a:srgbClr val="AD0000"/>
+                </a:solidFill>
+                <a:latin typeface="Courier"/>
+              </a:rPr>
+              <a:t>0</a:t>
+            </a:r>
+            <a:r>
+              <a:rPr>
+                <a:solidFill>
+                  <a:srgbClr val="003B4F"/>
+                </a:solidFill>
+                <a:latin typeface="Courier"/>
+              </a:rPr>
+              <a:t>, </a:t>
+            </a:r>
+            <a:r>
+              <a:rPr>
+                <a:solidFill>
+                  <a:srgbClr val="657422"/>
+                </a:solidFill>
+                <a:latin typeface="Courier"/>
+              </a:rPr>
+              <a:t>xend =</a:t>
+            </a:r>
+            <a:r>
+              <a:rPr>
+                <a:solidFill>
+                  <a:srgbClr val="003B4F"/>
+                </a:solidFill>
+                <a:latin typeface="Courier"/>
+              </a:rPr>
+              <a:t> NMDS1, </a:t>
+            </a:r>
+            <a:r>
+              <a:rPr>
+                <a:solidFill>
+                  <a:srgbClr val="657422"/>
+                </a:solidFill>
+                <a:latin typeface="Courier"/>
+              </a:rPr>
+              <a:t>yend =</a:t>
+            </a:r>
+            <a:r>
+              <a:rPr>
+                <a:solidFill>
+                  <a:srgbClr val="003B4F"/>
+                </a:solidFill>
+                <a:latin typeface="Courier"/>
+              </a:rPr>
+              <a:t> NMDS2),</a:t>
+            </a:r>
+            <a:br/>
+            <a:r>
+              <a:rPr>
+                <a:solidFill>
+                  <a:srgbClr val="003B4F"/>
+                </a:solidFill>
+                <a:latin typeface="Courier"/>
+              </a:rPr>
+              <a:t>               </a:t>
+            </a:r>
+            <a:r>
+              <a:rPr>
+                <a:solidFill>
+                  <a:srgbClr val="657422"/>
+                </a:solidFill>
+                <a:latin typeface="Courier"/>
+              </a:rPr>
+              <a:t>arrow =</a:t>
+            </a:r>
+            <a:r>
+              <a:rPr>
+                <a:solidFill>
+                  <a:srgbClr val="003B4F"/>
+                </a:solidFill>
+                <a:latin typeface="Courier"/>
+              </a:rPr>
+              <a:t> </a:t>
+            </a:r>
+            <a:r>
+              <a:rPr>
+                <a:solidFill>
+                  <a:srgbClr val="4758AB"/>
+                </a:solidFill>
+                <a:latin typeface="Courier"/>
+              </a:rPr>
+              <a:t>arrow</a:t>
+            </a:r>
+            <a:r>
+              <a:rPr>
+                <a:solidFill>
+                  <a:srgbClr val="003B4F"/>
+                </a:solidFill>
+                <a:latin typeface="Courier"/>
+              </a:rPr>
+              <a:t>(</a:t>
+            </a:r>
+            <a:r>
+              <a:rPr>
+                <a:solidFill>
+                  <a:srgbClr val="657422"/>
+                </a:solidFill>
+                <a:latin typeface="Courier"/>
+              </a:rPr>
+              <a:t>length =</a:t>
+            </a:r>
+            <a:r>
+              <a:rPr>
+                <a:solidFill>
+                  <a:srgbClr val="003B4F"/>
+                </a:solidFill>
+                <a:latin typeface="Courier"/>
+              </a:rPr>
+              <a:t> </a:t>
+            </a:r>
+            <a:r>
+              <a:rPr>
+                <a:solidFill>
+                  <a:srgbClr val="4758AB"/>
+                </a:solidFill>
+                <a:latin typeface="Courier"/>
+              </a:rPr>
+              <a:t>unit</a:t>
+            </a:r>
+            <a:r>
+              <a:rPr>
+                <a:solidFill>
+                  <a:srgbClr val="003B4F"/>
+                </a:solidFill>
+                <a:latin typeface="Courier"/>
+              </a:rPr>
+              <a:t>(</a:t>
+            </a:r>
+            <a:r>
+              <a:rPr>
+                <a:solidFill>
+                  <a:srgbClr val="AD0000"/>
+                </a:solidFill>
+                <a:latin typeface="Courier"/>
+              </a:rPr>
+              <a:t>0.3</a:t>
+            </a:r>
+            <a:r>
+              <a:rPr>
+                <a:solidFill>
+                  <a:srgbClr val="003B4F"/>
+                </a:solidFill>
+                <a:latin typeface="Courier"/>
+              </a:rPr>
+              <a:t>, </a:t>
+            </a:r>
+            <a:r>
+              <a:rPr>
+                <a:solidFill>
+                  <a:srgbClr val="20794D"/>
+                </a:solidFill>
+                <a:latin typeface="Courier"/>
+              </a:rPr>
+              <a:t>"cm"</a:t>
+            </a:r>
+            <a:r>
+              <a:rPr>
+                <a:solidFill>
+                  <a:srgbClr val="003B4F"/>
+                </a:solidFill>
+                <a:latin typeface="Courier"/>
+              </a:rPr>
+              <a:t>)),</a:t>
+            </a:r>
+            <a:br/>
+            <a:r>
+              <a:rPr>
+                <a:solidFill>
+                  <a:srgbClr val="003B4F"/>
+                </a:solidFill>
+                <a:latin typeface="Courier"/>
+              </a:rPr>
+              <a:t>               </a:t>
+            </a:r>
+            <a:r>
+              <a:rPr>
+                <a:solidFill>
+                  <a:srgbClr val="657422"/>
+                </a:solidFill>
+                <a:latin typeface="Courier"/>
+              </a:rPr>
+              <a:t>color =</a:t>
+            </a:r>
+            <a:r>
+              <a:rPr>
+                <a:solidFill>
+                  <a:srgbClr val="003B4F"/>
+                </a:solidFill>
+                <a:latin typeface="Courier"/>
+              </a:rPr>
+              <a:t> </a:t>
+            </a:r>
+            <a:r>
+              <a:rPr>
+                <a:solidFill>
+                  <a:srgbClr val="20794D"/>
+                </a:solidFill>
+                <a:latin typeface="Courier"/>
+              </a:rPr>
+              <a:t>"black"</a:t>
+            </a:r>
+            <a:r>
+              <a:rPr>
+                <a:solidFill>
+                  <a:srgbClr val="003B4F"/>
+                </a:solidFill>
+                <a:latin typeface="Courier"/>
+              </a:rPr>
+              <a:t>, </a:t>
+            </a:r>
+            <a:r>
+              <a:rPr>
+                <a:solidFill>
+                  <a:srgbClr val="657422"/>
+                </a:solidFill>
+                <a:latin typeface="Courier"/>
+              </a:rPr>
+              <a:t>linewidth =</a:t>
+            </a:r>
+            <a:r>
+              <a:rPr>
+                <a:solidFill>
+                  <a:srgbClr val="003B4F"/>
+                </a:solidFill>
+                <a:latin typeface="Courier"/>
+              </a:rPr>
+              <a:t> </a:t>
+            </a:r>
+            <a:r>
+              <a:rPr>
+                <a:solidFill>
+                  <a:srgbClr val="AD0000"/>
+                </a:solidFill>
+                <a:latin typeface="Courier"/>
+              </a:rPr>
+              <a:t>1</a:t>
+            </a:r>
+            <a:r>
+              <a:rPr>
+                <a:solidFill>
+                  <a:srgbClr val="003B4F"/>
+                </a:solidFill>
+                <a:latin typeface="Courier"/>
+              </a:rPr>
+              <a:t>) </a:t>
+            </a:r>
+            <a:r>
+              <a:rPr>
+                <a:solidFill>
+                  <a:srgbClr val="5E5E5E"/>
+                </a:solidFill>
+                <a:latin typeface="Courier"/>
+              </a:rPr>
+              <a:t>+</a:t>
+            </a:r>
+            <a:br/>
+            <a:r>
+              <a:rPr>
+                <a:solidFill>
+                  <a:srgbClr val="003B4F"/>
+                </a:solidFill>
+                <a:latin typeface="Courier"/>
+              </a:rPr>
+              <a:t>  </a:t>
+            </a:r>
+            <a:r>
+              <a:rPr>
+                <a:solidFill>
+                  <a:srgbClr val="4758AB"/>
+                </a:solidFill>
+                <a:latin typeface="Courier"/>
+              </a:rPr>
+              <a:t>geom_text</a:t>
+            </a:r>
+            <a:r>
+              <a:rPr>
+                <a:solidFill>
+                  <a:srgbClr val="003B4F"/>
+                </a:solidFill>
+                <a:latin typeface="Courier"/>
+              </a:rPr>
+              <a:t>(</a:t>
+            </a:r>
+            <a:r>
+              <a:rPr>
+                <a:solidFill>
+                  <a:srgbClr val="657422"/>
+                </a:solidFill>
+                <a:latin typeface="Courier"/>
+              </a:rPr>
+              <a:t>data =</a:t>
+            </a:r>
+            <a:r>
+              <a:rPr>
+                <a:solidFill>
+                  <a:srgbClr val="003B4F"/>
+                </a:solidFill>
+                <a:latin typeface="Courier"/>
+              </a:rPr>
+              <a:t> env_coords_df,</a:t>
+            </a:r>
+            <a:br/>
+            <a:r>
+              <a:rPr>
+                <a:solidFill>
+                  <a:srgbClr val="003B4F"/>
+                </a:solidFill>
+                <a:latin typeface="Courier"/>
+              </a:rPr>
+              <a:t>            </a:t>
+            </a:r>
+            <a:r>
+              <a:rPr>
+                <a:solidFill>
+                  <a:srgbClr val="4758AB"/>
+                </a:solidFill>
+                <a:latin typeface="Courier"/>
+              </a:rPr>
+              <a:t>aes</a:t>
+            </a:r>
+            <a:r>
+              <a:rPr>
+                <a:solidFill>
+                  <a:srgbClr val="003B4F"/>
+                </a:solidFill>
+                <a:latin typeface="Courier"/>
+              </a:rPr>
+              <a:t>(</a:t>
+            </a:r>
+            <a:r>
+              <a:rPr>
+                <a:solidFill>
+                  <a:srgbClr val="657422"/>
+                </a:solidFill>
+                <a:latin typeface="Courier"/>
+              </a:rPr>
+              <a:t>x =</a:t>
+            </a:r>
+            <a:r>
+              <a:rPr>
+                <a:solidFill>
+                  <a:srgbClr val="003B4F"/>
+                </a:solidFill>
+                <a:latin typeface="Courier"/>
+              </a:rPr>
+              <a:t> NMDS1 </a:t>
+            </a:r>
+            <a:r>
+              <a:rPr>
+                <a:solidFill>
+                  <a:srgbClr val="5E5E5E"/>
+                </a:solidFill>
+                <a:latin typeface="Courier"/>
+              </a:rPr>
+              <a:t>*</a:t>
+            </a:r>
+            <a:r>
+              <a:rPr>
+                <a:solidFill>
+                  <a:srgbClr val="003B4F"/>
+                </a:solidFill>
+                <a:latin typeface="Courier"/>
+              </a:rPr>
+              <a:t> </a:t>
+            </a:r>
+            <a:r>
+              <a:rPr>
+                <a:solidFill>
+                  <a:srgbClr val="AD0000"/>
+                </a:solidFill>
+                <a:latin typeface="Courier"/>
+              </a:rPr>
+              <a:t>1.1</a:t>
+            </a:r>
+            <a:r>
+              <a:rPr>
+                <a:solidFill>
+                  <a:srgbClr val="003B4F"/>
+                </a:solidFill>
+                <a:latin typeface="Courier"/>
+              </a:rPr>
+              <a:t>, </a:t>
+            </a:r>
+            <a:r>
+              <a:rPr>
+                <a:solidFill>
+                  <a:srgbClr val="657422"/>
+                </a:solidFill>
+                <a:latin typeface="Courier"/>
+              </a:rPr>
+              <a:t>y =</a:t>
+            </a:r>
+            <a:r>
+              <a:rPr>
+                <a:solidFill>
+                  <a:srgbClr val="003B4F"/>
+                </a:solidFill>
+                <a:latin typeface="Courier"/>
+              </a:rPr>
+              <a:t> NMDS2 </a:t>
+            </a:r>
+            <a:r>
+              <a:rPr>
+                <a:solidFill>
+                  <a:srgbClr val="5E5E5E"/>
+                </a:solidFill>
+                <a:latin typeface="Courier"/>
+              </a:rPr>
+              <a:t>*</a:t>
+            </a:r>
+            <a:r>
+              <a:rPr>
+                <a:solidFill>
+                  <a:srgbClr val="003B4F"/>
+                </a:solidFill>
+                <a:latin typeface="Courier"/>
+              </a:rPr>
+              <a:t> </a:t>
+            </a:r>
+            <a:r>
+              <a:rPr>
+                <a:solidFill>
+                  <a:srgbClr val="AD0000"/>
+                </a:solidFill>
+                <a:latin typeface="Courier"/>
+              </a:rPr>
+              <a:t>1.1</a:t>
+            </a:r>
+            <a:r>
+              <a:rPr>
+                <a:solidFill>
+                  <a:srgbClr val="003B4F"/>
+                </a:solidFill>
+                <a:latin typeface="Courier"/>
+              </a:rPr>
+              <a:t>, </a:t>
+            </a:r>
+            <a:r>
+              <a:rPr>
+                <a:solidFill>
+                  <a:srgbClr val="657422"/>
+                </a:solidFill>
+                <a:latin typeface="Courier"/>
+              </a:rPr>
+              <a:t>label =</a:t>
+            </a:r>
+            <a:r>
+              <a:rPr>
+                <a:solidFill>
+                  <a:srgbClr val="003B4F"/>
+                </a:solidFill>
+                <a:latin typeface="Courier"/>
+              </a:rPr>
+              <a:t> variable),</a:t>
+            </a:r>
+            <a:br/>
+            <a:r>
+              <a:rPr>
+                <a:solidFill>
+                  <a:srgbClr val="003B4F"/>
+                </a:solidFill>
+                <a:latin typeface="Courier"/>
+              </a:rPr>
+              <a:t>            </a:t>
+            </a:r>
+            <a:r>
+              <a:rPr>
+                <a:solidFill>
+                  <a:srgbClr val="657422"/>
+                </a:solidFill>
+                <a:latin typeface="Courier"/>
+              </a:rPr>
+              <a:t>color =</a:t>
+            </a:r>
+            <a:r>
+              <a:rPr>
+                <a:solidFill>
+                  <a:srgbClr val="003B4F"/>
+                </a:solidFill>
+                <a:latin typeface="Courier"/>
+              </a:rPr>
+              <a:t> </a:t>
+            </a:r>
+            <a:r>
+              <a:rPr>
+                <a:solidFill>
+                  <a:srgbClr val="20794D"/>
+                </a:solidFill>
+                <a:latin typeface="Courier"/>
+              </a:rPr>
+              <a:t>"black"</a:t>
+            </a:r>
+            <a:r>
+              <a:rPr>
+                <a:solidFill>
+                  <a:srgbClr val="003B4F"/>
+                </a:solidFill>
+                <a:latin typeface="Courier"/>
+              </a:rPr>
+              <a:t>, </a:t>
+            </a:r>
+            <a:r>
+              <a:rPr>
+                <a:solidFill>
+                  <a:srgbClr val="657422"/>
+                </a:solidFill>
+                <a:latin typeface="Courier"/>
+              </a:rPr>
+              <a:t>size =</a:t>
+            </a:r>
+            <a:r>
+              <a:rPr>
+                <a:solidFill>
+                  <a:srgbClr val="003B4F"/>
+                </a:solidFill>
+                <a:latin typeface="Courier"/>
+              </a:rPr>
+              <a:t> </a:t>
+            </a:r>
+            <a:r>
+              <a:rPr>
+                <a:solidFill>
+                  <a:srgbClr val="AD0000"/>
+                </a:solidFill>
+                <a:latin typeface="Courier"/>
+              </a:rPr>
+              <a:t>4</a:t>
+            </a:r>
+            <a:r>
+              <a:rPr>
+                <a:solidFill>
+                  <a:srgbClr val="003B4F"/>
+                </a:solidFill>
+                <a:latin typeface="Courier"/>
+              </a:rPr>
+              <a:t>) </a:t>
+            </a:r>
+            <a:r>
+              <a:rPr>
+                <a:solidFill>
+                  <a:srgbClr val="5E5E5E"/>
+                </a:solidFill>
+                <a:latin typeface="Courier"/>
+              </a:rPr>
+              <a:t>+</a:t>
+            </a:r>
+            <a:br/>
+            <a:r>
+              <a:rPr>
+                <a:solidFill>
+                  <a:srgbClr val="003B4F"/>
+                </a:solidFill>
+                <a:latin typeface="Courier"/>
+              </a:rPr>
+              <a:t>  </a:t>
+            </a:r>
+            <a:r>
+              <a:rPr>
+                <a:solidFill>
+                  <a:srgbClr val="4758AB"/>
+                </a:solidFill>
+                <a:latin typeface="Courier"/>
+              </a:rPr>
+              <a:t>labs</a:t>
+            </a:r>
+            <a:r>
+              <a:rPr>
+                <a:solidFill>
+                  <a:srgbClr val="003B4F"/>
+                </a:solidFill>
+                <a:latin typeface="Courier"/>
+              </a:rPr>
+              <a:t>(</a:t>
+            </a:r>
+            <a:r>
+              <a:rPr>
+                <a:solidFill>
+                  <a:srgbClr val="657422"/>
+                </a:solidFill>
+                <a:latin typeface="Courier"/>
+              </a:rPr>
+              <a:t>title =</a:t>
+            </a:r>
+            <a:r>
+              <a:rPr>
+                <a:solidFill>
+                  <a:srgbClr val="003B4F"/>
+                </a:solidFill>
+                <a:latin typeface="Courier"/>
+              </a:rPr>
+              <a:t> </a:t>
+            </a:r>
+            <a:r>
+              <a:rPr>
+                <a:solidFill>
+                  <a:srgbClr val="20794D"/>
+                </a:solidFill>
+                <a:latin typeface="Courier"/>
+              </a:rPr>
+              <a:t>"NMDS with Environmental Vector"</a:t>
+            </a:r>
+            <a:r>
+              <a:rPr>
+                <a:solidFill>
+                  <a:srgbClr val="003B4F"/>
+                </a:solidFill>
+                <a:latin typeface="Courier"/>
+              </a:rPr>
+              <a:t>,</a:t>
+            </a:r>
+            <a:br/>
+            <a:r>
+              <a:rPr>
+                <a:solidFill>
+                  <a:srgbClr val="003B4F"/>
+                </a:solidFill>
+                <a:latin typeface="Courier"/>
+              </a:rPr>
+              <a:t>       </a:t>
+            </a:r>
+            <a:r>
+              <a:rPr>
+                <a:solidFill>
+                  <a:srgbClr val="657422"/>
+                </a:solidFill>
+                <a:latin typeface="Courier"/>
+              </a:rPr>
+              <a:t>subtitle =</a:t>
+            </a:r>
+            <a:r>
+              <a:rPr>
+                <a:solidFill>
+                  <a:srgbClr val="003B4F"/>
+                </a:solidFill>
+                <a:latin typeface="Courier"/>
+              </a:rPr>
+              <a:t> </a:t>
+            </a:r>
+            <a:r>
+              <a:rPr>
+                <a:solidFill>
+                  <a:srgbClr val="4758AB"/>
+                </a:solidFill>
+                <a:latin typeface="Courier"/>
+              </a:rPr>
+              <a:t>paste</a:t>
+            </a:r>
+            <a:r>
+              <a:rPr>
+                <a:solidFill>
+                  <a:srgbClr val="003B4F"/>
+                </a:solidFill>
+                <a:latin typeface="Courier"/>
+              </a:rPr>
+              <a:t>(</a:t>
+            </a:r>
+            <a:r>
+              <a:rPr>
+                <a:solidFill>
+                  <a:srgbClr val="20794D"/>
+                </a:solidFill>
+                <a:latin typeface="Courier"/>
+              </a:rPr>
+              <a:t>"Stress ="</a:t>
+            </a:r>
+            <a:r>
+              <a:rPr>
+                <a:solidFill>
+                  <a:srgbClr val="003B4F"/>
+                </a:solidFill>
+                <a:latin typeface="Courier"/>
+              </a:rPr>
+              <a:t>, </a:t>
+            </a:r>
+            <a:r>
+              <a:rPr>
+                <a:solidFill>
+                  <a:srgbClr val="4758AB"/>
+                </a:solidFill>
+                <a:latin typeface="Courier"/>
+              </a:rPr>
+              <a:t>round</a:t>
+            </a:r>
+            <a:r>
+              <a:rPr>
+                <a:solidFill>
+                  <a:srgbClr val="003B4F"/>
+                </a:solidFill>
+                <a:latin typeface="Courier"/>
+              </a:rPr>
+              <a:t>(iris_nmds_model</a:t>
+            </a:r>
+            <a:r>
+              <a:rPr>
+                <a:solidFill>
+                  <a:srgbClr val="5E5E5E"/>
+                </a:solidFill>
+                <a:latin typeface="Courier"/>
+              </a:rPr>
+              <a:t>$</a:t>
+            </a:r>
+            <a:r>
+              <a:rPr>
+                <a:solidFill>
+                  <a:srgbClr val="003B4F"/>
+                </a:solidFill>
+                <a:latin typeface="Courier"/>
+              </a:rPr>
+              <a:t>stress, </a:t>
+            </a:r>
+            <a:r>
+              <a:rPr>
+                <a:solidFill>
+                  <a:srgbClr val="AD0000"/>
+                </a:solidFill>
+                <a:latin typeface="Courier"/>
+              </a:rPr>
+              <a:t>3</a:t>
+            </a:r>
+            <a:r>
+              <a:rPr>
+                <a:solidFill>
+                  <a:srgbClr val="003B4F"/>
+                </a:solidFill>
+                <a:latin typeface="Courier"/>
+              </a:rPr>
+              <a:t>)),</a:t>
+            </a:r>
+            <a:br/>
+            <a:r>
+              <a:rPr>
+                <a:solidFill>
+                  <a:srgbClr val="003B4F"/>
+                </a:solidFill>
+                <a:latin typeface="Courier"/>
+              </a:rPr>
+              <a:t>       </a:t>
+            </a:r>
+            <a:r>
+              <a:rPr>
+                <a:solidFill>
+                  <a:srgbClr val="657422"/>
+                </a:solidFill>
+                <a:latin typeface="Courier"/>
+              </a:rPr>
+              <a:t>x =</a:t>
+            </a:r>
+            <a:r>
+              <a:rPr>
+                <a:solidFill>
+                  <a:srgbClr val="003B4F"/>
+                </a:solidFill>
+                <a:latin typeface="Courier"/>
+              </a:rPr>
+              <a:t> </a:t>
+            </a:r>
+            <a:r>
+              <a:rPr>
+                <a:solidFill>
+                  <a:srgbClr val="20794D"/>
+                </a:solidFill>
+                <a:latin typeface="Courier"/>
+              </a:rPr>
+              <a:t>"NMDS1"</a:t>
+            </a:r>
+            <a:r>
+              <a:rPr>
+                <a:solidFill>
+                  <a:srgbClr val="003B4F"/>
+                </a:solidFill>
+                <a:latin typeface="Courier"/>
+              </a:rPr>
+              <a:t>,</a:t>
+            </a:r>
+            <a:br/>
+            <a:r>
+              <a:rPr>
+                <a:solidFill>
+                  <a:srgbClr val="003B4F"/>
+                </a:solidFill>
+                <a:latin typeface="Courier"/>
+              </a:rPr>
+              <a:t>       </a:t>
+            </a:r>
+            <a:r>
+              <a:rPr>
+                <a:solidFill>
+                  <a:srgbClr val="657422"/>
+                </a:solidFill>
+                <a:latin typeface="Courier"/>
+              </a:rPr>
+              <a:t>y =</a:t>
+            </a:r>
+            <a:r>
+              <a:rPr>
+                <a:solidFill>
+                  <a:srgbClr val="003B4F"/>
+                </a:solidFill>
+                <a:latin typeface="Courier"/>
+              </a:rPr>
+              <a:t> </a:t>
+            </a:r>
+            <a:r>
+              <a:rPr>
+                <a:solidFill>
+                  <a:srgbClr val="20794D"/>
+                </a:solidFill>
+                <a:latin typeface="Courier"/>
+              </a:rPr>
+              <a:t>"NMDS2"</a:t>
+            </a:r>
+            <a:r>
+              <a:rPr>
+                <a:solidFill>
+                  <a:srgbClr val="003B4F"/>
+                </a:solidFill>
+                <a:latin typeface="Courier"/>
+              </a:rPr>
+              <a:t>,</a:t>
+            </a:r>
+            <a:br/>
+            <a:r>
+              <a:rPr>
+                <a:solidFill>
+                  <a:srgbClr val="003B4F"/>
+                </a:solidFill>
+                <a:latin typeface="Courier"/>
+              </a:rPr>
+              <a:t>       </a:t>
+            </a:r>
+            <a:r>
+              <a:rPr>
+                <a:solidFill>
+                  <a:srgbClr val="657422"/>
+                </a:solidFill>
+                <a:latin typeface="Courier"/>
+              </a:rPr>
+              <a:t>color =</a:t>
+            </a:r>
+            <a:r>
+              <a:rPr>
+                <a:solidFill>
+                  <a:srgbClr val="003B4F"/>
+                </a:solidFill>
+                <a:latin typeface="Courier"/>
+              </a:rPr>
+              <a:t> </a:t>
+            </a:r>
+            <a:r>
+              <a:rPr>
+                <a:solidFill>
+                  <a:srgbClr val="20794D"/>
+                </a:solidFill>
+                <a:latin typeface="Courier"/>
+              </a:rPr>
+              <a:t>"Species"</a:t>
+            </a:r>
+            <a:r>
+              <a:rPr>
+                <a:solidFill>
+                  <a:srgbClr val="003B4F"/>
+                </a:solidFill>
+                <a:latin typeface="Courier"/>
+              </a:rPr>
+              <a:t>) </a:t>
+            </a:r>
+            <a:r>
+              <a:rPr>
+                <a:solidFill>
+                  <a:srgbClr val="5E5E5E"/>
+                </a:solidFill>
+                <a:latin typeface="Courier"/>
+              </a:rPr>
+              <a:t>+</a:t>
+            </a:r>
+            <a:br/>
+            <a:r>
+              <a:rPr>
+                <a:solidFill>
+                  <a:srgbClr val="003B4F"/>
+                </a:solidFill>
+                <a:latin typeface="Courier"/>
+              </a:rPr>
+              <a:t>  </a:t>
+            </a:r>
+            <a:r>
+              <a:rPr>
+                <a:solidFill>
+                  <a:srgbClr val="4758AB"/>
+                </a:solidFill>
+                <a:latin typeface="Courier"/>
+              </a:rPr>
+              <a:t>theme_minimal</a:t>
+            </a:r>
+            <a:r>
+              <a:rPr>
+                <a:solidFill>
+                  <a:srgbClr val="003B4F"/>
+                </a:solidFill>
+                <a:latin typeface="Courier"/>
+              </a:rPr>
+              <a:t>()</a:t>
+            </a:r>
+            <a:br/>
+            <a:br/>
+            <a:r>
+              <a:rPr>
+                <a:solidFill>
+                  <a:srgbClr val="003B4F"/>
+                </a:solidFill>
+                <a:latin typeface="Courier"/>
+              </a:rPr>
+              <a:t>nmds_env_plot</a:t>
+            </a:r>
+          </a:p>
+          <a:p>
+            <a:pPr lvl="0" indent="0" marL="1270000">
+              <a:buNone/>
+            </a:pPr>
+            <a:r>
+              <a:rPr sz="2000" b="1"/>
+              <a:t>Tip</a:t>
+            </a:r>
+          </a:p>
+          <a:p>
+            <a:pPr lvl="0" indent="0" marL="1270000">
+              <a:buNone/>
+            </a:pPr>
+            <a:r>
+              <a:rPr sz="2000" b="1"/>
+              <a:t>🚀 If you finish early:</a:t>
+            </a:r>
+            <a:r>
+              <a:rPr sz="2000"/>
+              <a:t> Repeat the environmental fitting with </a:t>
+            </a:r>
+            <a:r>
+              <a:rPr sz="2000">
+                <a:latin typeface="Courier"/>
+              </a:rPr>
+              <a:t>sepal_width</a:t>
+            </a:r>
+            <a:r>
+              <a:rPr sz="2000"/>
+              <a:t> instead of </a:t>
+            </a:r>
+            <a:r>
+              <a:rPr sz="2000">
+                <a:latin typeface="Courier"/>
+              </a:rPr>
+              <a:t>petal_length</a:t>
+            </a:r>
+            <a:r>
+              <a:rPr sz="2000"/>
+              <a:t>. Does it point in a similar direction, or a very different one?</a:t>
             </a:r>
           </a:p>
           <a:p>
@@ -4791,115 +10687,16 @@
             </a:pPr>
             <a:r>
               <a:rPr>
-                <a:latin typeface="Courier"/>
-              </a:rPr>
-              <a:t>Permutation test for adonis under reduced model
-Permutation: free
-Number of permutations: 999
-adonis2(formula = iris_numeric_df ~ species, data = iris_df, permutations = 999, method = "euclidean")
-          Df SumOfSqs      R2      F Pr(&gt;F)    
-Model      2   592.07 0.86894 487.33  0.001 ***
-Residual 147    89.30 0.13106                  
-Total    149   681.37 1.00000                  
----
-Signif. codes:  0 '***' 0.001 '**' 0.01 '*' 0.05 '.' 0.1 ' ' 1</a:t>
-            </a:r>
-          </a:p>
-          <a:p>
-            <a:pPr lvl="0" indent="0" marL="0">
-              <a:buNone/>
-            </a:pPr>
-            <a:r>
-              <a:rPr b="1"/>
-              <a:t>Interpretation</a:t>
-            </a:r>
-            <a:r>
-              <a:rPr/>
-              <a:t>: - F-statistic: 487.33 - R² (variance explained): 0.869 - p-value: 0.001</a:t>
-            </a:r>
-          </a:p>
-          <a:p>
-            <a:pPr lvl="0" indent="0" marL="0">
-              <a:spcBef>
-                <a:spcPts val="3000"/>
-              </a:spcBef>
-              <a:buNone/>
-            </a:pPr>
-            <a:r>
-              <a:rPr b="1"/>
-              <a:t>Step 2: Check Homogeneity of Dispersions</a:t>
-            </a:r>
-          </a:p>
-          <a:p>
-            <a:pPr lvl="0" indent="0" marL="0">
-              <a:buNone/>
-            </a:pPr>
-            <a:r>
-              <a:rPr/>
-              <a:t>Before interpreting PERMANOVA, we need to check if groups have similar multivariate spread.</a:t>
-            </a:r>
-          </a:p>
-          <a:p>
-            <a:pPr lvl="0" indent="0">
-              <a:buNone/>
-            </a:pPr>
-            <a:r>
-              <a:rPr>
-                <a:latin typeface="Courier"/>
-              </a:rPr>
-              <a:t>Analysis of Variance Table
-Response: Distances
-           Df  Sum Sq Mean Sq F value  Pr(&gt;F)    
-Groups      2  2.9092 1.45458  10.748 4.4e-05 ***
-Residuals 147 19.8941 0.13533                    
----
-Signif. codes:  0 '***' 0.001 '**' 0.01 '*' 0.05 '.' 0.1 ' ' 1</a:t>
-            </a:r>
-          </a:p>
-          <a:p>
-            <a:pPr lvl="0" indent="0" marL="0">
-              <a:spcBef>
-                <a:spcPts val="3000"/>
-              </a:spcBef>
-              <a:buNone/>
-            </a:pPr>
-            <a:r>
-              <a:rPr b="1"/>
-              <a:t>Step 3: Visualize Dispersions</a:t>
+                <a:solidFill>
+                  <a:srgbClr val="5E5E5E"/>
+                </a:solidFill>
+                <a:latin typeface="Courier"/>
+              </a:rPr>
+              <a:t># Write your code here:</a:t>
             </a:r>
           </a:p>
         </p:txBody>
       </p:sp>
-      <p:pic>
-        <p:nvPicPr>
-          <p:cNvPr descr="nmds_cluster_analysis_activity_files/figure-pptx/dispersion_plot-1.png" id="0" name="Picture 1"/>
-          <p:cNvPicPr>
-            <a:picLocks noGrp="1" noChangeAspect="1"/>
-          </p:cNvPicPr>
-          <p:nvPr/>
-        </p:nvPicPr>
-        <p:blipFill>
-          <a:blip r:embed="rId2"/>
-          <a:stretch>
-            <a:fillRect/>
-          </a:stretch>
-        </p:blipFill>
-        <p:spPr bwMode="auto">
-          <a:xfrm>
-            <a:off x="3657600" y="1244600"/>
-            <a:ext cx="5232400" cy="3225800"/>
-          </a:xfrm>
-          <a:prstGeom prst="rect">
-            <a:avLst/>
-          </a:prstGeom>
-          <a:noFill/>
-          <a:ln w="9525">
-            <a:noFill/>
-            <a:headEnd/>
-            <a:tailEnd/>
-          </a:ln>
-        </p:spPr>
-      </p:pic>
     </p:spTree>
   </p:cSld>
 </p:sld>
@@ -4924,6 +10721,36 @@
       </p:grpSpPr>
       <p:sp>
         <p:nvSpPr>
+          <p:cNvPr id="2" name="Title 1"/>
+          <p:cNvSpPr>
+            <a:spLocks noGrp="1"/>
+          </p:cNvSpPr>
+          <p:nvPr>
+            <p:ph type="title"/>
+          </p:nvPr>
+        </p:nvSpPr>
+        <p:spPr>
+          <a:xfrm>
+            <a:off x="0" y="0"/>
+            <a:ext cx="9144000" cy="582780"/>
+          </a:xfrm>
+        </p:spPr>
+        <p:txBody>
+          <a:bodyPr/>
+          <a:lstStyle/>
+          <a:p>
+            <a:pPr lvl="0" indent="0" marL="0">
+              <a:buNone/>
+            </a:pPr>
+            <a:r>
+              <a:rPr/>
+              <a:t>Summary checklist for NMDS and PERMANOVA</a:t>
+            </a:r>
+          </a:p>
+        </p:txBody>
+      </p:sp>
+      <p:sp>
+        <p:nvSpPr>
           <p:cNvPr id="3" name="Content Placeholder 2"/>
           <p:cNvSpPr>
             <a:spLocks noGrp="1"/>
@@ -4937,29 +10764,342 @@
           <a:bodyPr/>
           <a:lstStyle/>
           <a:p>
+            <a:pPr lvl="0" indent="0" marL="1270000">
+              <a:buNone/>
+            </a:pPr>
+            <a:r>
+              <a:rPr sz="2000" b="1"/>
+              <a:t>Tip</a:t>
+            </a:r>
+          </a:p>
+          <a:p>
+            <a:pPr lvl="0" indent="0" marL="1270000">
+              <a:buNone/>
+            </a:pPr>
+            <a:r>
+              <a:rPr sz="2000" b="1"/>
+              <a:t>Analysis checklist</a:t>
+            </a:r>
+          </a:p>
+          <a:p>
+            <a:pPr lvl="0" indent="-342900" marL="342900">
+              <a:buAutoNum type="arabicPeriod"/>
+            </a:pPr>
+            <a:r>
+              <a:rPr sz="2000" b="1"/>
+              <a:t>Prepare your data</a:t>
+            </a:r>
+            <a:r>
+              <a:rPr sz="2000"/>
+              <a:t> - ensure numeric matrix format.</a:t>
+            </a:r>
+          </a:p>
+          <a:p>
+            <a:pPr lvl="0" indent="-342900" marL="342900">
+              <a:buAutoNum type="arabicPeriod"/>
+            </a:pPr>
+            <a:r>
+              <a:rPr sz="2000" b="1"/>
+              <a:t>Choose appropriate distance measure</a:t>
+            </a:r>
+            <a:r>
+              <a:rPr sz="2000"/>
+              <a:t> - Bray-Curtis for abundance data, Euclidean for measurement data.</a:t>
+            </a:r>
+          </a:p>
+          <a:p>
+            <a:pPr lvl="0" indent="-342900" marL="342900">
+              <a:buAutoNum type="arabicPeriod"/>
+            </a:pPr>
+            <a:r>
+              <a:rPr sz="2000" b="1"/>
+              <a:t>Run NMDS</a:t>
+            </a:r>
+            <a:r>
+              <a:rPr sz="2000"/>
+              <a:t> with sufficient iterations.</a:t>
+            </a:r>
+          </a:p>
+          <a:p>
+            <a:pPr lvl="0" indent="-342900" marL="342900">
+              <a:buAutoNum type="arabicPeriod"/>
+            </a:pPr>
+            <a:r>
+              <a:rPr sz="2000" b="1"/>
+              <a:t>Check stress value</a:t>
+            </a:r>
+            <a:r>
+              <a:rPr sz="2000"/>
+              <a:t> - must be &lt; 0.2.</a:t>
+            </a:r>
+          </a:p>
+          <a:p>
+            <a:pPr lvl="0" indent="-342900" marL="342900">
+              <a:buAutoNum type="arabicPeriod"/>
+            </a:pPr>
+            <a:r>
+              <a:rPr sz="2000" b="1"/>
+              <a:t>Create ordination plots</a:t>
+            </a:r>
+            <a:r>
+              <a:rPr sz="2000"/>
+              <a:t> with groups identified.</a:t>
+            </a:r>
+          </a:p>
+          <a:p>
+            <a:pPr lvl="0" indent="-342900" marL="342900">
+              <a:buAutoNum type="arabicPeriod"/>
+            </a:pPr>
+            <a:r>
+              <a:rPr sz="2000" b="1"/>
+              <a:t>Test homogeneity of dispersions</a:t>
+            </a:r>
+            <a:r>
+              <a:rPr sz="2000"/>
+              <a:t> before PERMANOVA.</a:t>
+            </a:r>
+          </a:p>
+          <a:p>
+            <a:pPr lvl="0" indent="-342900" marL="342900">
+              <a:buAutoNum type="arabicPeriod"/>
+            </a:pPr>
+            <a:r>
+              <a:rPr sz="2000" b="1"/>
+              <a:t>Run PERMANOVA</a:t>
+            </a:r>
+            <a:r>
+              <a:rPr sz="2000"/>
+              <a:t> to test group differences.</a:t>
+            </a:r>
+          </a:p>
+          <a:p>
+            <a:pPr lvl="0" indent="-342900" marL="342900">
+              <a:buAutoNum type="arabicPeriod"/>
+            </a:pPr>
+            <a:r>
+              <a:rPr sz="2000" b="1"/>
+              <a:t>Consider ANOSIM</a:t>
+            </a:r>
+            <a:r>
+              <a:rPr sz="2000"/>
+              <a:t> as complementary test.</a:t>
+            </a:r>
+          </a:p>
+          <a:p>
+            <a:pPr lvl="0" indent="-342900" marL="342900">
+              <a:buAutoNum type="arabicPeriod"/>
+            </a:pPr>
+            <a:r>
+              <a:rPr sz="2000" b="1"/>
+              <a:t>Fit environmental variables</a:t>
+            </a:r>
+            <a:r>
+              <a:rPr sz="2000"/>
+              <a:t> if available.</a:t>
+            </a:r>
+          </a:p>
+          <a:p>
             <a:pPr lvl="0" indent="0" marL="0">
-              <a:spcBef>
-                <a:spcPts val="3000"/>
-              </a:spcBef>
               <a:buNone/>
             </a:pPr>
             <a:r>
               <a:rPr b="1"/>
-              <a:t>Step 4: Pairwise PERMANOVA</a:t>
-            </a:r>
-          </a:p>
-          <a:p>
-            <a:pPr lvl="0" indent="0">
+              <a:t>Key points to remember:</a:t>
+            </a:r>
+          </a:p>
+          <a:p>
+            <a:pPr lvl="0"/>
+            <a:r>
+              <a:rPr b="1"/>
+              <a:t>NMDS preserves rank order</a:t>
+            </a:r>
+            <a:r>
+              <a:rPr/>
+              <a:t> of distances, not exact values.</a:t>
+            </a:r>
+          </a:p>
+          <a:p>
+            <a:pPr lvl="0"/>
+            <a:r>
+              <a:rPr b="1"/>
+              <a:t>Stress &lt; 0.2</a:t>
+            </a:r>
+            <a:r>
+              <a:rPr/>
+              <a:t> is acceptable, &lt; 0.1 is excellent.</a:t>
+            </a:r>
+          </a:p>
+          <a:p>
+            <a:pPr lvl="0"/>
+            <a:r>
+              <a:rPr b="1"/>
+              <a:t>PERMANOVA tests centroids</a:t>
+            </a:r>
+            <a:r>
+              <a:rPr/>
+              <a:t>, ANOSIM tests overlap.</a:t>
+            </a:r>
+          </a:p>
+          <a:p>
+            <a:pPr lvl="0"/>
+            <a:r>
+              <a:rPr b="1"/>
+              <a:t>Check dispersion homogeneity</a:t>
+            </a:r>
+            <a:r>
+              <a:rPr/>
+              <a:t> - violated assumption affects interpretation.</a:t>
+            </a:r>
+          </a:p>
+          <a:p>
+            <a:pPr lvl="0"/>
+            <a:r>
+              <a:rPr b="1"/>
+              <a:t>Multiple comparisons</a:t>
+            </a:r>
+            <a:r>
+              <a:rPr/>
+              <a:t> require p-value adjustment.</a:t>
+            </a:r>
+          </a:p>
+          <a:p>
+            <a:pPr lvl="0"/>
+            <a:r>
+              <a:rPr b="1"/>
+              <a:t>Axes have no inherent meaning</a:t>
+            </a:r>
+            <a:r>
+              <a:rPr/>
+              <a:t> in NMDS (unlike PCA).</a:t>
+            </a:r>
+          </a:p>
+          <a:p>
+            <a:pPr lvl="0"/>
+            <a:r>
+              <a:rPr b="1"/>
+              <a:t>Use appropriate distance measures</a:t>
+            </a:r>
+            <a:r>
+              <a:rPr/>
+              <a:t> for your data type.</a:t>
+            </a:r>
+          </a:p>
+          <a:p>
+            <a:pPr lvl="0" indent="0" marL="1270000">
               <a:buNone/>
             </a:pPr>
             <a:r>
-              <a:rPr>
-                <a:latin typeface="Courier"/>
-              </a:rPr>
-              <a:t>      group1     group2 f_statistic r_squared p_value p_adjusted
-1     setosa versicolor    551.0039 0.8489994   0.001      0.003
-2     setosa  virginica    943.7992 0.9059320   0.001      0.003
-3 versicolor  virginica     86.7697 0.4696100   0.001      0.003</a:t>
+              <a:rPr sz="2000" b="1"/>
+              <a:t>Important</a:t>
+            </a:r>
+          </a:p>
+          <a:p>
+            <a:pPr lvl="0" indent="0" marL="1270000">
+              <a:buNone/>
+            </a:pPr>
+            <a:r>
+              <a:rPr sz="2000" b="1"/>
+              <a:t>Key takeaways from NMDS/PERMANOVA analysis</a:t>
+            </a:r>
+          </a:p>
+          <a:p>
+            <a:pPr lvl="0" indent="-342900" marL="342900">
+              <a:buAutoNum type="arabicPeriod"/>
+            </a:pPr>
+            <a:r>
+              <a:rPr sz="2000" b="1"/>
+              <a:t>NMDS is flexible</a:t>
+            </a:r>
+            <a:r>
+              <a:rPr sz="2000"/>
+              <a:t> - works with any distance measure and makes few assumptions.</a:t>
+            </a:r>
+          </a:p>
+          <a:p>
+            <a:pPr lvl="0" indent="-342900" marL="342900">
+              <a:buAutoNum type="arabicPeriod"/>
+            </a:pPr>
+            <a:r>
+              <a:rPr sz="2000" b="1"/>
+              <a:t>Stress indicates fit quality</a:t>
+            </a:r>
+            <a:r>
+              <a:rPr sz="2000"/>
+              <a:t> - always report and check this value.</a:t>
+            </a:r>
+          </a:p>
+          <a:p>
+            <a:pPr lvl="0" indent="-342900" marL="342900">
+              <a:buAutoNum type="arabicPeriod"/>
+            </a:pPr>
+            <a:r>
+              <a:rPr sz="2000" b="1"/>
+              <a:t>PERMANOVA is powerful</a:t>
+            </a:r>
+            <a:r>
+              <a:rPr sz="2000"/>
+              <a:t> but assumes homogeneous dispersions.</a:t>
+            </a:r>
+          </a:p>
+          <a:p>
+            <a:pPr lvl="0" indent="-342900" marL="342900">
+              <a:buAutoNum type="arabicPeriod"/>
+            </a:pPr>
+            <a:r>
+              <a:rPr sz="2000" b="1"/>
+              <a:t>ANOSIM is complementary</a:t>
+            </a:r>
+            <a:r>
+              <a:rPr sz="2000"/>
+              <a:t> - provides different perspective on group separation.</a:t>
+            </a:r>
+          </a:p>
+          <a:p>
+            <a:pPr lvl="0" indent="-342900" marL="342900">
+              <a:buAutoNum type="arabicPeriod"/>
+            </a:pPr>
+            <a:r>
+              <a:rPr sz="2000" b="1"/>
+              <a:t>Visualization is crucial</a:t>
+            </a:r>
+            <a:r>
+              <a:rPr sz="2000"/>
+              <a:t> - always plot your ordination results.</a:t>
+            </a:r>
+          </a:p>
+          <a:p>
+            <a:pPr lvl="0" indent="-342900" marL="342900">
+              <a:buAutoNum type="arabicPeriod"/>
+            </a:pPr>
+            <a:r>
+              <a:rPr sz="2000" b="1"/>
+              <a:t>Environmental fitting</a:t>
+            </a:r>
+            <a:r>
+              <a:rPr sz="2000"/>
+              <a:t> helps interpret ecological patterns.</a:t>
+            </a:r>
+          </a:p>
+          <a:p>
+            <a:pPr lvl="0" indent="-342900" marL="342900">
+              <a:buAutoNum type="arabicPeriod"/>
+            </a:pPr>
+            <a:r>
+              <a:rPr sz="2000" b="1"/>
+              <a:t>Permutation tests</a:t>
+            </a:r>
+            <a:r>
+              <a:rPr sz="2000"/>
+              <a:t> avoid distributional assumptions.</a:t>
+            </a:r>
+          </a:p>
+          <a:p>
+            <a:pPr lvl="0" indent="0" marL="1270000">
+              <a:buNone/>
+            </a:pPr>
+            <a:r>
+              <a:rPr sz="2000"/>
+              <a:t>Remember: NMDS is iterative and may find different solutions - always set a seed for reproducibility!</a:t>
             </a:r>
           </a:p>
         </p:txBody>
@@ -4999,7 +11139,7 @@
         <p:spPr>
           <a:xfrm>
             <a:off x="0" y="0"/>
-            <a:ext cx="9144000" cy="871538"/>
+            <a:ext cx="9144000" cy="582780"/>
           </a:xfrm>
         </p:spPr>
         <p:txBody>
@@ -5011,19 +11151,19 @@
             </a:pPr>
             <a:r>
               <a:rPr/>
-              <a:t>Part 4: ANOSIM Analysis</a:t>
+              <a:t>Review and checkpoint</a:t>
             </a:r>
           </a:p>
         </p:txBody>
       </p:sp>
       <p:sp>
         <p:nvSpPr>
-          <p:cNvPr id="4" name="Text Placeholder 3"/>
+          <p:cNvPr id="3" name="Content Placeholder 2"/>
           <p:cNvSpPr>
             <a:spLocks noGrp="1"/>
           </p:cNvSpPr>
           <p:nvPr>
-            <p:ph idx="2" sz="half" type="body"/>
+            <p:ph idx="1"/>
           </p:nvPr>
         </p:nvSpPr>
         <p:spPr/>
@@ -5032,112 +11172,144 @@
           <a:lstStyle/>
           <a:p>
             <a:pPr lvl="0" indent="0" marL="0">
-              <a:spcBef>
-                <a:spcPts val="3000"/>
-              </a:spcBef>
               <a:buNone/>
             </a:pPr>
             <a:r>
-              <a:rPr b="1"/>
-              <a:t>What is ANOSIM?</a:t>
-            </a:r>
-          </a:p>
-          <a:p>
-            <a:pPr lvl="0" indent="0" marL="0">
+              <a:rPr/>
+              <a:t>At this point you can:</a:t>
+            </a:r>
+          </a:p>
+          <a:p>
+            <a:pPr lvl="0"/>
+            <a:r>
+              <a:rPr/>
+              <a:t>☐ Explain when NMDS is preferred over PCA</a:t>
+            </a:r>
+          </a:p>
+          <a:p>
+            <a:pPr lvl="0"/>
+            <a:r>
+              <a:rPr/>
+              <a:t>☐ Run </a:t>
+            </a:r>
+            <a:r>
+              <a:rPr>
+                <a:latin typeface="Courier"/>
+              </a:rPr>
+              <a:t>metaMDS()</a:t>
+            </a:r>
+            <a:r>
+              <a:rPr/>
+              <a:t> and interpret the stress value</a:t>
+            </a:r>
+          </a:p>
+          <a:p>
+            <a:pPr lvl="0"/>
+            <a:r>
+              <a:rPr/>
+              <a:t>☐ Build an NMDS ordination plot with confidence ellipses</a:t>
+            </a:r>
+          </a:p>
+          <a:p>
+            <a:pPr lvl="0"/>
+            <a:r>
+              <a:rPr/>
+              <a:t>☐ Run and interpret PERMANOVA, including checking dispersion homogeneity with </a:t>
+            </a:r>
+            <a:r>
+              <a:rPr>
+                <a:latin typeface="Courier"/>
+              </a:rPr>
+              <a:t>betadisper()</a:t>
+            </a:r>
+          </a:p>
+          <a:p>
+            <a:pPr lvl="0"/>
+            <a:r>
+              <a:rPr/>
+              <a:t>☐ Run and interpret ANOSIM as a complementary test</a:t>
+            </a:r>
+          </a:p>
+          <a:p>
+            <a:pPr lvl="0"/>
+            <a:r>
+              <a:rPr/>
+              <a:t>☐ Fit an environmental (or other continuous) vector onto an ordination with </a:t>
+            </a:r>
+            <a:r>
+              <a:rPr>
+                <a:latin typeface="Courier"/>
+              </a:rPr>
+              <a:t>envfit()</a:t>
+            </a:r>
+          </a:p>
+          <a:p>
+            <a:pPr lvl="0" indent="0" marL="1270000">
               <a:buNone/>
             </a:pPr>
             <a:r>
-              <a:rPr/>
-              <a:t>ANOSIM (Analysis of Similarities) tests whether there is a significant difference between groups using rank dissimilarities.</a:t>
-            </a:r>
-          </a:p>
-          <a:p>
-            <a:pPr lvl="0" indent="0" marL="0">
-              <a:spcBef>
-                <a:spcPts val="3000"/>
-              </a:spcBef>
+              <a:rPr sz="2000" b="1"/>
+              <a:t>Note</a:t>
+            </a:r>
+          </a:p>
+          <a:p>
+            <a:pPr lvl="0" indent="0" marL="1270000">
               <a:buNone/>
             </a:pPr>
             <a:r>
-              <a:rPr b="1"/>
-              <a:t>Step 1: Run ANOSIM</a:t>
-            </a:r>
-          </a:p>
-          <a:p>
-            <a:pPr lvl="0" indent="0">
+              <a:rPr sz="2000" b="1"/>
+              <a:t>📤 What to turn in before next class</a:t>
+            </a:r>
+          </a:p>
+          <a:p>
+            <a:pPr lvl="0" indent="0" marL="1270000">
               <a:buNone/>
             </a:pPr>
             <a:r>
-              <a:rPr>
-                <a:latin typeface="Courier"/>
-              </a:rPr>
-              <a:t>
-Call:
-anosim(x = iris_dist_full, grouping = iris_df$species, permutations = 999) 
-Dissimilarity: euclidean 
-ANOSIM statistic R: 0.8794 
-      Significance: 0.001 
-Permutation: free
-Number of permutations: 999</a:t>
-            </a:r>
-          </a:p>
-          <a:p>
-            <a:pPr lvl="0" indent="0" marL="0">
-              <a:buNone/>
+              <a:rPr sz="2000"/>
+              <a:t>Upload both of these to the course management system:</a:t>
+            </a:r>
+          </a:p>
+          <a:p>
+            <a:pPr lvl="0" indent="-342900" marL="342900">
+              <a:buAutoNum type="arabicPeriod"/>
             </a:pPr>
             <a:r>
-              <a:rPr b="1"/>
-              <a:t>Interpretation</a:t>
-            </a:r>
-            <a:r>
-              <a:rPr/>
-              <a:t>: - R statistic: 0.879 - p-value: 0.001 - R close to 1 indicates strong separation between groups</a:t>
-            </a:r>
-          </a:p>
-          <a:p>
-            <a:pPr lvl="0" indent="0" marL="0">
-              <a:spcBef>
-                <a:spcPts val="3000"/>
-              </a:spcBef>
-              <a:buNone/>
+              <a:rPr sz="2000"/>
+              <a:t>Your code — the </a:t>
+            </a:r>
+            <a:r>
+              <a:rPr sz="2000">
+                <a:latin typeface="Courier"/>
+              </a:rPr>
+              <a:t>scripts/</a:t>
+            </a:r>
+            <a:r>
+              <a:rPr sz="2000"/>
+              <a:t> folder (or just </a:t>
+            </a:r>
+            <a:r>
+              <a:rPr sz="2000">
+                <a:latin typeface="Courier"/>
+              </a:rPr>
+              <a:t>10_nmds_permanova.R</a:t>
+            </a:r>
+            <a:r>
+              <a:rPr sz="2000"/>
+              <a:t>)</a:t>
+            </a:r>
+          </a:p>
+          <a:p>
+            <a:pPr lvl="0" indent="-342900" marL="342900">
+              <a:buAutoNum type="arabicPeriod"/>
             </a:pPr>
             <a:r>
-              <a:rPr b="1"/>
-              <a:t>Step 2: Plot ANOSIM Results</a:t>
+              <a:rPr sz="2000"/>
+              <a:t>This worksheet, with your written answers</a:t>
             </a:r>
           </a:p>
         </p:txBody>
       </p:sp>
-      <p:pic>
-        <p:nvPicPr>
-          <p:cNvPr descr="nmds_cluster_analysis_activity_files/figure-pptx/anosim_plot-1.png" id="0" name="Picture 1"/>
-          <p:cNvPicPr>
-            <a:picLocks noGrp="1" noChangeAspect="1"/>
-          </p:cNvPicPr>
-          <p:nvPr/>
-        </p:nvPicPr>
-        <p:blipFill>
-          <a:blip r:embed="rId2"/>
-          <a:stretch>
-            <a:fillRect/>
-          </a:stretch>
-        </p:blipFill>
-        <p:spPr bwMode="auto">
-          <a:xfrm>
-            <a:off x="3657600" y="1244600"/>
-            <a:ext cx="5232400" cy="3225800"/>
-          </a:xfrm>
-          <a:prstGeom prst="rect">
-            <a:avLst/>
-          </a:prstGeom>
-          <a:noFill/>
-          <a:ln w="9525">
-            <a:noFill/>
-            <a:headEnd/>
-            <a:tailEnd/>
-          </a:ln>
-        </p:spPr>
-      </p:pic>
     </p:spTree>
   </p:cSld>
 </p:sld>
